--- a/Research paper doc/Updated Images/AI for legal case outcome prediction Updated.pptx
+++ b/Research paper doc/Updated Images/AI for legal case outcome prediction Updated.pptx
@@ -5,7 +5,7 @@
     <p:sldMasterId id="2147483696" r:id="rId1"/>
   </p:sldMasterIdLst>
   <p:notesMasterIdLst>
-    <p:notesMasterId r:id="rId18"/>
+    <p:notesMasterId r:id="rId23"/>
   </p:notesMasterIdLst>
   <p:sldIdLst>
     <p:sldId id="280" r:id="rId2"/>
@@ -20,10 +20,15 @@
     <p:sldId id="289" r:id="rId11"/>
     <p:sldId id="290" r:id="rId12"/>
     <p:sldId id="297" r:id="rId13"/>
-    <p:sldId id="293" r:id="rId14"/>
-    <p:sldId id="294" r:id="rId15"/>
-    <p:sldId id="292" r:id="rId16"/>
-    <p:sldId id="298" r:id="rId17"/>
+    <p:sldId id="302" r:id="rId14"/>
+    <p:sldId id="299" r:id="rId15"/>
+    <p:sldId id="293" r:id="rId16"/>
+    <p:sldId id="301" r:id="rId17"/>
+    <p:sldId id="294" r:id="rId18"/>
+    <p:sldId id="292" r:id="rId19"/>
+    <p:sldId id="298" r:id="rId20"/>
+    <p:sldId id="303" r:id="rId21"/>
+    <p:sldId id="304" r:id="rId22"/>
   </p:sldIdLst>
   <p:sldSz cx="9144000" cy="6858000" type="screen4x3"/>
   <p:notesSz cx="6858000" cy="9144000"/>
@@ -224,7 +229,7 @@
             <a:fld id="{DA13ADEF-1232-40E6-AA0C-2DC4E3D89003}" type="datetimeFigureOut">
               <a:rPr lang="en-GB" smtClean="0"/>
               <a:pPr/>
-              <a:t>28/03/2026</a:t>
+              <a:t>02/06/2026</a:t>
             </a:fld>
             <a:endParaRPr lang="en-GB"/>
           </a:p>
@@ -911,6 +916,246 @@
         <p:cNvPr id="1" name="">
           <a:extLst>
             <a:ext uri="{FF2B5EF4-FFF2-40B4-BE49-F238E27FC236}">
+              <a16:creationId xmlns:a16="http://schemas.microsoft.com/office/drawing/2014/main" id="{C73F5B57-E5D5-AE48-25CD-31EE7285EB34}"/>
+            </a:ext>
+          </a:extLst>
+        </p:cNvPr>
+        <p:cNvGrpSpPr/>
+        <p:nvPr/>
+      </p:nvGrpSpPr>
+      <p:grpSpPr>
+        <a:xfrm>
+          <a:off x="0" y="0"/>
+          <a:ext cx="0" cy="0"/>
+          <a:chOff x="0" y="0"/>
+          <a:chExt cx="0" cy="0"/>
+        </a:xfrm>
+      </p:grpSpPr>
+      <p:sp>
+        <p:nvSpPr>
+          <p:cNvPr id="1048604" name="Rectangle 7">
+            <a:extLst>
+              <a:ext uri="{FF2B5EF4-FFF2-40B4-BE49-F238E27FC236}">
+                <a16:creationId xmlns:a16="http://schemas.microsoft.com/office/drawing/2014/main" id="{869746C9-1D09-878F-1AEC-C51AD376C6A7}"/>
+              </a:ext>
+            </a:extLst>
+          </p:cNvPr>
+          <p:cNvSpPr>
+            <a:spLocks noGrp="1" noChangeArrowheads="1"/>
+          </p:cNvSpPr>
+          <p:nvPr>
+            <p:ph type="sldNum" sz="quarter" idx="5"/>
+          </p:nvPr>
+        </p:nvSpPr>
+        <p:spPr/>
+        <p:txBody>
+          <a:bodyPr/>
+          <a:lstStyle/>
+          <a:p>
+            <a:fld id="{6BFD01EB-C9A3-4136-A0B1-C6AEC703FF81}" type="slidenum">
+              <a:rPr lang="en-US" smtClean="0"/>
+              <a:t>13</a:t>
+            </a:fld>
+            <a:endParaRPr lang="en-US"/>
+          </a:p>
+        </p:txBody>
+      </p:sp>
+      <p:sp>
+        <p:nvSpPr>
+          <p:cNvPr id="1048605" name="Rectangle 2">
+            <a:extLst>
+              <a:ext uri="{FF2B5EF4-FFF2-40B4-BE49-F238E27FC236}">
+                <a16:creationId xmlns:a16="http://schemas.microsoft.com/office/drawing/2014/main" id="{68A11CAA-EEA1-2BC4-70D2-63C9C6927A66}"/>
+              </a:ext>
+            </a:extLst>
+          </p:cNvPr>
+          <p:cNvSpPr>
+            <a:spLocks noGrp="1" noRot="1" noChangeAspect="1" noChangeArrowheads="1" noTextEdit="1"/>
+          </p:cNvSpPr>
+          <p:nvPr>
+            <p:ph type="sldImg"/>
+          </p:nvPr>
+        </p:nvSpPr>
+        <p:spPr/>
+        <p:txBody>
+          <a:bodyPr/>
+          <a:lstStyle/>
+          <a:p>
+            <a:endParaRPr lang="en-IN"/>
+          </a:p>
+        </p:txBody>
+      </p:sp>
+      <p:sp>
+        <p:nvSpPr>
+          <p:cNvPr id="1048606" name="Rectangle 3">
+            <a:extLst>
+              <a:ext uri="{FF2B5EF4-FFF2-40B4-BE49-F238E27FC236}">
+                <a16:creationId xmlns:a16="http://schemas.microsoft.com/office/drawing/2014/main" id="{D1D09C03-A0A3-2923-F8F2-4DA4E7143E91}"/>
+              </a:ext>
+            </a:extLst>
+          </p:cNvPr>
+          <p:cNvSpPr>
+            <a:spLocks noGrp="1" noChangeArrowheads="1"/>
+          </p:cNvSpPr>
+          <p:nvPr>
+            <p:ph type="body" idx="1"/>
+          </p:nvPr>
+        </p:nvSpPr>
+        <p:spPr>
+          <a:noFill/>
+        </p:spPr>
+        <p:txBody>
+          <a:bodyPr/>
+          <a:lstStyle/>
+          <a:p>
+            <a:pPr eaLnBrk="1" hangingPunct="1"/>
+            <a:endParaRPr lang="en-US">
+              <a:latin typeface="Arial" panose="020B0604020202020204" pitchFamily="34" charset="0"/>
+            </a:endParaRPr>
+          </a:p>
+        </p:txBody>
+      </p:sp>
+    </p:spTree>
+    <p:extLst>
+      <p:ext uri="{BB962C8B-B14F-4D97-AF65-F5344CB8AC3E}">
+        <p14:creationId xmlns:p14="http://schemas.microsoft.com/office/powerpoint/2010/main" val="19429341"/>
+      </p:ext>
+    </p:extLst>
+  </p:cSld>
+  <p:clrMapOvr>
+    <a:masterClrMapping/>
+  </p:clrMapOvr>
+</p:notes>
+</file>
+
+<file path=ppt/notesSlides/notesSlide14.xml><?xml version="1.0" encoding="utf-8"?>
+<p:notes xmlns:a="http://schemas.openxmlformats.org/drawingml/2006/main" xmlns:r="http://schemas.openxmlformats.org/officeDocument/2006/relationships" xmlns:p="http://schemas.openxmlformats.org/presentationml/2006/main">
+  <p:cSld>
+    <p:spTree>
+      <p:nvGrpSpPr>
+        <p:cNvPr id="1" name="">
+          <a:extLst>
+            <a:ext uri="{FF2B5EF4-FFF2-40B4-BE49-F238E27FC236}">
+              <a16:creationId xmlns:a16="http://schemas.microsoft.com/office/drawing/2014/main" id="{CC137DA7-EDCB-9A1F-A193-3B6BF928E01C}"/>
+            </a:ext>
+          </a:extLst>
+        </p:cNvPr>
+        <p:cNvGrpSpPr/>
+        <p:nvPr/>
+      </p:nvGrpSpPr>
+      <p:grpSpPr>
+        <a:xfrm>
+          <a:off x="0" y="0"/>
+          <a:ext cx="0" cy="0"/>
+          <a:chOff x="0" y="0"/>
+          <a:chExt cx="0" cy="0"/>
+        </a:xfrm>
+      </p:grpSpPr>
+      <p:sp>
+        <p:nvSpPr>
+          <p:cNvPr id="1048604" name="Rectangle 7">
+            <a:extLst>
+              <a:ext uri="{FF2B5EF4-FFF2-40B4-BE49-F238E27FC236}">
+                <a16:creationId xmlns:a16="http://schemas.microsoft.com/office/drawing/2014/main" id="{E4255C29-7EBF-35BA-744F-C8BAB096866A}"/>
+              </a:ext>
+            </a:extLst>
+          </p:cNvPr>
+          <p:cNvSpPr>
+            <a:spLocks noGrp="1" noChangeArrowheads="1"/>
+          </p:cNvSpPr>
+          <p:nvPr>
+            <p:ph type="sldNum" sz="quarter" idx="5"/>
+          </p:nvPr>
+        </p:nvSpPr>
+        <p:spPr/>
+        <p:txBody>
+          <a:bodyPr/>
+          <a:lstStyle/>
+          <a:p>
+            <a:fld id="{6BFD01EB-C9A3-4136-A0B1-C6AEC703FF81}" type="slidenum">
+              <a:rPr lang="en-US" smtClean="0"/>
+              <a:t>14</a:t>
+            </a:fld>
+            <a:endParaRPr lang="en-US"/>
+          </a:p>
+        </p:txBody>
+      </p:sp>
+      <p:sp>
+        <p:nvSpPr>
+          <p:cNvPr id="1048605" name="Rectangle 2">
+            <a:extLst>
+              <a:ext uri="{FF2B5EF4-FFF2-40B4-BE49-F238E27FC236}">
+                <a16:creationId xmlns:a16="http://schemas.microsoft.com/office/drawing/2014/main" id="{68378ABE-11E1-6E4A-2ED1-D3E8F798EC02}"/>
+              </a:ext>
+            </a:extLst>
+          </p:cNvPr>
+          <p:cNvSpPr>
+            <a:spLocks noGrp="1" noRot="1" noChangeAspect="1" noChangeArrowheads="1" noTextEdit="1"/>
+          </p:cNvSpPr>
+          <p:nvPr>
+            <p:ph type="sldImg"/>
+          </p:nvPr>
+        </p:nvSpPr>
+        <p:spPr/>
+        <p:txBody>
+          <a:bodyPr/>
+          <a:lstStyle/>
+          <a:p>
+            <a:endParaRPr lang="en-IN"/>
+          </a:p>
+        </p:txBody>
+      </p:sp>
+      <p:sp>
+        <p:nvSpPr>
+          <p:cNvPr id="1048606" name="Rectangle 3">
+            <a:extLst>
+              <a:ext uri="{FF2B5EF4-FFF2-40B4-BE49-F238E27FC236}">
+                <a16:creationId xmlns:a16="http://schemas.microsoft.com/office/drawing/2014/main" id="{7AA0AD9C-DE3A-84FB-B892-E49386A50B8F}"/>
+              </a:ext>
+            </a:extLst>
+          </p:cNvPr>
+          <p:cNvSpPr>
+            <a:spLocks noGrp="1" noChangeArrowheads="1"/>
+          </p:cNvSpPr>
+          <p:nvPr>
+            <p:ph type="body" idx="1"/>
+          </p:nvPr>
+        </p:nvSpPr>
+        <p:spPr>
+          <a:noFill/>
+        </p:spPr>
+        <p:txBody>
+          <a:bodyPr/>
+          <a:lstStyle/>
+          <a:p>
+            <a:pPr eaLnBrk="1" hangingPunct="1"/>
+            <a:endParaRPr lang="en-US">
+              <a:latin typeface="Arial" panose="020B0604020202020204" pitchFamily="34" charset="0"/>
+            </a:endParaRPr>
+          </a:p>
+        </p:txBody>
+      </p:sp>
+    </p:spTree>
+    <p:extLst>
+      <p:ext uri="{BB962C8B-B14F-4D97-AF65-F5344CB8AC3E}">
+        <p14:creationId xmlns:p14="http://schemas.microsoft.com/office/powerpoint/2010/main" val="608120023"/>
+      </p:ext>
+    </p:extLst>
+  </p:cSld>
+  <p:clrMapOvr>
+    <a:masterClrMapping/>
+  </p:clrMapOvr>
+</p:notes>
+</file>
+
+<file path=ppt/notesSlides/notesSlide15.xml><?xml version="1.0" encoding="utf-8"?>
+<p:notes xmlns:a="http://schemas.openxmlformats.org/drawingml/2006/main" xmlns:r="http://schemas.openxmlformats.org/officeDocument/2006/relationships" xmlns:p="http://schemas.openxmlformats.org/presentationml/2006/main">
+  <p:cSld>
+    <p:spTree>
+      <p:nvGrpSpPr>
+        <p:cNvPr id="1" name="">
+          <a:extLst>
+            <a:ext uri="{FF2B5EF4-FFF2-40B4-BE49-F238E27FC236}">
               <a16:creationId xmlns:a16="http://schemas.microsoft.com/office/drawing/2014/main" id="{843DD083-FB4C-9E69-D444-9BC2AF13625D}"/>
             </a:ext>
           </a:extLst>
@@ -949,7 +1194,7 @@
           <a:p>
             <a:fld id="{6BFD01EB-C9A3-4136-A0B1-C6AEC703FF81}" type="slidenum">
               <a:rPr lang="en-US" smtClean="0"/>
-              <a:t>13</a:t>
+              <a:t>15</a:t>
             </a:fld>
             <a:endParaRPr lang="en-US"/>
           </a:p>
@@ -1023,7 +1268,127 @@
 </p:notes>
 </file>
 
-<file path=ppt/notesSlides/notesSlide14.xml><?xml version="1.0" encoding="utf-8"?>
+<file path=ppt/notesSlides/notesSlide16.xml><?xml version="1.0" encoding="utf-8"?>
+<p:notes xmlns:a="http://schemas.openxmlformats.org/drawingml/2006/main" xmlns:r="http://schemas.openxmlformats.org/officeDocument/2006/relationships" xmlns:p="http://schemas.openxmlformats.org/presentationml/2006/main">
+  <p:cSld>
+    <p:spTree>
+      <p:nvGrpSpPr>
+        <p:cNvPr id="1" name="">
+          <a:extLst>
+            <a:ext uri="{FF2B5EF4-FFF2-40B4-BE49-F238E27FC236}">
+              <a16:creationId xmlns:a16="http://schemas.microsoft.com/office/drawing/2014/main" id="{0243032A-03A0-F8AE-73AC-8163B568D445}"/>
+            </a:ext>
+          </a:extLst>
+        </p:cNvPr>
+        <p:cNvGrpSpPr/>
+        <p:nvPr/>
+      </p:nvGrpSpPr>
+      <p:grpSpPr>
+        <a:xfrm>
+          <a:off x="0" y="0"/>
+          <a:ext cx="0" cy="0"/>
+          <a:chOff x="0" y="0"/>
+          <a:chExt cx="0" cy="0"/>
+        </a:xfrm>
+      </p:grpSpPr>
+      <p:sp>
+        <p:nvSpPr>
+          <p:cNvPr id="1048604" name="Rectangle 7">
+            <a:extLst>
+              <a:ext uri="{FF2B5EF4-FFF2-40B4-BE49-F238E27FC236}">
+                <a16:creationId xmlns:a16="http://schemas.microsoft.com/office/drawing/2014/main" id="{361F879C-767D-B8BA-05F2-014FA44D1211}"/>
+              </a:ext>
+            </a:extLst>
+          </p:cNvPr>
+          <p:cNvSpPr>
+            <a:spLocks noGrp="1" noChangeArrowheads="1"/>
+          </p:cNvSpPr>
+          <p:nvPr>
+            <p:ph type="sldNum" sz="quarter" idx="5"/>
+          </p:nvPr>
+        </p:nvSpPr>
+        <p:spPr/>
+        <p:txBody>
+          <a:bodyPr/>
+          <a:lstStyle/>
+          <a:p>
+            <a:fld id="{6BFD01EB-C9A3-4136-A0B1-C6AEC703FF81}" type="slidenum">
+              <a:rPr lang="en-US" smtClean="0"/>
+              <a:t>16</a:t>
+            </a:fld>
+            <a:endParaRPr lang="en-US"/>
+          </a:p>
+        </p:txBody>
+      </p:sp>
+      <p:sp>
+        <p:nvSpPr>
+          <p:cNvPr id="1048605" name="Rectangle 2">
+            <a:extLst>
+              <a:ext uri="{FF2B5EF4-FFF2-40B4-BE49-F238E27FC236}">
+                <a16:creationId xmlns:a16="http://schemas.microsoft.com/office/drawing/2014/main" id="{C1C19BE2-3398-3394-031D-CCDDCA1842C5}"/>
+              </a:ext>
+            </a:extLst>
+          </p:cNvPr>
+          <p:cNvSpPr>
+            <a:spLocks noGrp="1" noRot="1" noChangeAspect="1" noChangeArrowheads="1" noTextEdit="1"/>
+          </p:cNvSpPr>
+          <p:nvPr>
+            <p:ph type="sldImg"/>
+          </p:nvPr>
+        </p:nvSpPr>
+        <p:spPr/>
+        <p:txBody>
+          <a:bodyPr/>
+          <a:lstStyle/>
+          <a:p>
+            <a:endParaRPr lang="en-IN"/>
+          </a:p>
+        </p:txBody>
+      </p:sp>
+      <p:sp>
+        <p:nvSpPr>
+          <p:cNvPr id="1048606" name="Rectangle 3">
+            <a:extLst>
+              <a:ext uri="{FF2B5EF4-FFF2-40B4-BE49-F238E27FC236}">
+                <a16:creationId xmlns:a16="http://schemas.microsoft.com/office/drawing/2014/main" id="{A631F86D-55D2-08CC-5089-FCF899CF6E5A}"/>
+              </a:ext>
+            </a:extLst>
+          </p:cNvPr>
+          <p:cNvSpPr>
+            <a:spLocks noGrp="1" noChangeArrowheads="1"/>
+          </p:cNvSpPr>
+          <p:nvPr>
+            <p:ph type="body" idx="1"/>
+          </p:nvPr>
+        </p:nvSpPr>
+        <p:spPr>
+          <a:noFill/>
+        </p:spPr>
+        <p:txBody>
+          <a:bodyPr/>
+          <a:lstStyle/>
+          <a:p>
+            <a:pPr eaLnBrk="1" hangingPunct="1"/>
+            <a:endParaRPr lang="en-US">
+              <a:latin typeface="Arial" panose="020B0604020202020204" pitchFamily="34" charset="0"/>
+            </a:endParaRPr>
+          </a:p>
+        </p:txBody>
+      </p:sp>
+    </p:spTree>
+    <p:extLst>
+      <p:ext uri="{BB962C8B-B14F-4D97-AF65-F5344CB8AC3E}">
+        <p14:creationId xmlns:p14="http://schemas.microsoft.com/office/powerpoint/2010/main" val="1984113012"/>
+      </p:ext>
+    </p:extLst>
+  </p:cSld>
+  <p:clrMapOvr>
+    <a:masterClrMapping/>
+  </p:clrMapOvr>
+</p:notes>
+</file>
+
+<file path=ppt/notesSlides/notesSlide17.xml><?xml version="1.0" encoding="utf-8"?>
 <p:notes xmlns:a="http://schemas.openxmlformats.org/drawingml/2006/main" xmlns:r="http://schemas.openxmlformats.org/officeDocument/2006/relationships" xmlns:p="http://schemas.openxmlformats.org/presentationml/2006/main">
   <p:cSld>
     <p:spTree>
@@ -1069,7 +1434,7 @@
           <a:p>
             <a:fld id="{6BFD01EB-C9A3-4136-A0B1-C6AEC703FF81}" type="slidenum">
               <a:rPr lang="en-US" smtClean="0"/>
-              <a:t>14</a:t>
+              <a:t>17</a:t>
             </a:fld>
             <a:endParaRPr lang="en-US"/>
           </a:p>
@@ -1143,7 +1508,7 @@
 </p:notes>
 </file>
 
-<file path=ppt/notesSlides/notesSlide15.xml><?xml version="1.0" encoding="utf-8"?>
+<file path=ppt/notesSlides/notesSlide18.xml><?xml version="1.0" encoding="utf-8"?>
 <p:notes xmlns:a="http://schemas.openxmlformats.org/drawingml/2006/main" xmlns:r="http://schemas.openxmlformats.org/officeDocument/2006/relationships" xmlns:p="http://schemas.openxmlformats.org/presentationml/2006/main">
   <p:cSld>
     <p:spTree>
@@ -1177,7 +1542,7 @@
           <a:p>
             <a:fld id="{6BFD01EB-C9A3-4136-A0B1-C6AEC703FF81}" type="slidenum">
               <a:rPr lang="en-US" smtClean="0"/>
-              <a:t>15</a:t>
+              <a:t>18</a:t>
             </a:fld>
             <a:endParaRPr lang="en-US"/>
           </a:p>
@@ -1239,7 +1604,7 @@
 </p:notes>
 </file>
 
-<file path=ppt/notesSlides/notesSlide16.xml><?xml version="1.0" encoding="utf-8"?>
+<file path=ppt/notesSlides/notesSlide19.xml><?xml version="1.0" encoding="utf-8"?>
 <p:notes xmlns:a="http://schemas.openxmlformats.org/drawingml/2006/main" xmlns:r="http://schemas.openxmlformats.org/officeDocument/2006/relationships" xmlns:p="http://schemas.openxmlformats.org/presentationml/2006/main">
   <p:cSld>
     <p:spTree>
@@ -1285,7 +1650,7 @@
           <a:p>
             <a:fld id="{6BFD01EB-C9A3-4136-A0B1-C6AEC703FF81}" type="slidenum">
               <a:rPr lang="en-US" smtClean="0"/>
-              <a:t>16</a:t>
+              <a:t>19</a:t>
             </a:fld>
             <a:endParaRPr lang="en-US"/>
           </a:p>
@@ -1446,6 +1811,246 @@
     <p:extLst>
       <p:ext uri="{BB962C8B-B14F-4D97-AF65-F5344CB8AC3E}">
         <p14:creationId xmlns:p14="http://schemas.microsoft.com/office/powerpoint/2010/main" val="884008785"/>
+      </p:ext>
+    </p:extLst>
+  </p:cSld>
+  <p:clrMapOvr>
+    <a:masterClrMapping/>
+  </p:clrMapOvr>
+</p:notes>
+</file>
+
+<file path=ppt/notesSlides/notesSlide20.xml><?xml version="1.0" encoding="utf-8"?>
+<p:notes xmlns:a="http://schemas.openxmlformats.org/drawingml/2006/main" xmlns:r="http://schemas.openxmlformats.org/officeDocument/2006/relationships" xmlns:p="http://schemas.openxmlformats.org/presentationml/2006/main">
+  <p:cSld>
+    <p:spTree>
+      <p:nvGrpSpPr>
+        <p:cNvPr id="1" name="">
+          <a:extLst>
+            <a:ext uri="{FF2B5EF4-FFF2-40B4-BE49-F238E27FC236}">
+              <a16:creationId xmlns:a16="http://schemas.microsoft.com/office/drawing/2014/main" id="{94352179-913F-38AC-D347-25792B8E6CC7}"/>
+            </a:ext>
+          </a:extLst>
+        </p:cNvPr>
+        <p:cNvGrpSpPr/>
+        <p:nvPr/>
+      </p:nvGrpSpPr>
+      <p:grpSpPr>
+        <a:xfrm>
+          <a:off x="0" y="0"/>
+          <a:ext cx="0" cy="0"/>
+          <a:chOff x="0" y="0"/>
+          <a:chExt cx="0" cy="0"/>
+        </a:xfrm>
+      </p:grpSpPr>
+      <p:sp>
+        <p:nvSpPr>
+          <p:cNvPr id="1048604" name="Rectangle 7">
+            <a:extLst>
+              <a:ext uri="{FF2B5EF4-FFF2-40B4-BE49-F238E27FC236}">
+                <a16:creationId xmlns:a16="http://schemas.microsoft.com/office/drawing/2014/main" id="{58F982CA-F123-7DBA-33D9-D712BE9C6648}"/>
+              </a:ext>
+            </a:extLst>
+          </p:cNvPr>
+          <p:cNvSpPr>
+            <a:spLocks noGrp="1" noChangeArrowheads="1"/>
+          </p:cNvSpPr>
+          <p:nvPr>
+            <p:ph type="sldNum" sz="quarter" idx="5"/>
+          </p:nvPr>
+        </p:nvSpPr>
+        <p:spPr/>
+        <p:txBody>
+          <a:bodyPr/>
+          <a:lstStyle/>
+          <a:p>
+            <a:fld id="{6BFD01EB-C9A3-4136-A0B1-C6AEC703FF81}" type="slidenum">
+              <a:rPr lang="en-US" smtClean="0"/>
+              <a:t>20</a:t>
+            </a:fld>
+            <a:endParaRPr lang="en-US"/>
+          </a:p>
+        </p:txBody>
+      </p:sp>
+      <p:sp>
+        <p:nvSpPr>
+          <p:cNvPr id="1048605" name="Rectangle 2">
+            <a:extLst>
+              <a:ext uri="{FF2B5EF4-FFF2-40B4-BE49-F238E27FC236}">
+                <a16:creationId xmlns:a16="http://schemas.microsoft.com/office/drawing/2014/main" id="{20799219-A9D4-DE9D-7A5D-C428612441D8}"/>
+              </a:ext>
+            </a:extLst>
+          </p:cNvPr>
+          <p:cNvSpPr>
+            <a:spLocks noGrp="1" noRot="1" noChangeAspect="1" noChangeArrowheads="1" noTextEdit="1"/>
+          </p:cNvSpPr>
+          <p:nvPr>
+            <p:ph type="sldImg"/>
+          </p:nvPr>
+        </p:nvSpPr>
+        <p:spPr/>
+        <p:txBody>
+          <a:bodyPr/>
+          <a:lstStyle/>
+          <a:p>
+            <a:endParaRPr lang="en-IN"/>
+          </a:p>
+        </p:txBody>
+      </p:sp>
+      <p:sp>
+        <p:nvSpPr>
+          <p:cNvPr id="1048606" name="Rectangle 3">
+            <a:extLst>
+              <a:ext uri="{FF2B5EF4-FFF2-40B4-BE49-F238E27FC236}">
+                <a16:creationId xmlns:a16="http://schemas.microsoft.com/office/drawing/2014/main" id="{B81E7A85-9370-1DC3-B006-2B074F05F0B0}"/>
+              </a:ext>
+            </a:extLst>
+          </p:cNvPr>
+          <p:cNvSpPr>
+            <a:spLocks noGrp="1" noChangeArrowheads="1"/>
+          </p:cNvSpPr>
+          <p:nvPr>
+            <p:ph type="body" idx="1"/>
+          </p:nvPr>
+        </p:nvSpPr>
+        <p:spPr>
+          <a:noFill/>
+        </p:spPr>
+        <p:txBody>
+          <a:bodyPr/>
+          <a:lstStyle/>
+          <a:p>
+            <a:pPr eaLnBrk="1" hangingPunct="1"/>
+            <a:endParaRPr lang="en-US">
+              <a:latin typeface="Arial" panose="020B0604020202020204" pitchFamily="34" charset="0"/>
+            </a:endParaRPr>
+          </a:p>
+        </p:txBody>
+      </p:sp>
+    </p:spTree>
+    <p:extLst>
+      <p:ext uri="{BB962C8B-B14F-4D97-AF65-F5344CB8AC3E}">
+        <p14:creationId xmlns:p14="http://schemas.microsoft.com/office/powerpoint/2010/main" val="1511179232"/>
+      </p:ext>
+    </p:extLst>
+  </p:cSld>
+  <p:clrMapOvr>
+    <a:masterClrMapping/>
+  </p:clrMapOvr>
+</p:notes>
+</file>
+
+<file path=ppt/notesSlides/notesSlide21.xml><?xml version="1.0" encoding="utf-8"?>
+<p:notes xmlns:a="http://schemas.openxmlformats.org/drawingml/2006/main" xmlns:r="http://schemas.openxmlformats.org/officeDocument/2006/relationships" xmlns:p="http://schemas.openxmlformats.org/presentationml/2006/main">
+  <p:cSld>
+    <p:spTree>
+      <p:nvGrpSpPr>
+        <p:cNvPr id="1" name="">
+          <a:extLst>
+            <a:ext uri="{FF2B5EF4-FFF2-40B4-BE49-F238E27FC236}">
+              <a16:creationId xmlns:a16="http://schemas.microsoft.com/office/drawing/2014/main" id="{D00BC5C2-0FE2-AE25-39F7-AC4F6515B3CE}"/>
+            </a:ext>
+          </a:extLst>
+        </p:cNvPr>
+        <p:cNvGrpSpPr/>
+        <p:nvPr/>
+      </p:nvGrpSpPr>
+      <p:grpSpPr>
+        <a:xfrm>
+          <a:off x="0" y="0"/>
+          <a:ext cx="0" cy="0"/>
+          <a:chOff x="0" y="0"/>
+          <a:chExt cx="0" cy="0"/>
+        </a:xfrm>
+      </p:grpSpPr>
+      <p:sp>
+        <p:nvSpPr>
+          <p:cNvPr id="1048604" name="Rectangle 7">
+            <a:extLst>
+              <a:ext uri="{FF2B5EF4-FFF2-40B4-BE49-F238E27FC236}">
+                <a16:creationId xmlns:a16="http://schemas.microsoft.com/office/drawing/2014/main" id="{337DE882-E755-9C20-18CB-30164571DE8C}"/>
+              </a:ext>
+            </a:extLst>
+          </p:cNvPr>
+          <p:cNvSpPr>
+            <a:spLocks noGrp="1" noChangeArrowheads="1"/>
+          </p:cNvSpPr>
+          <p:nvPr>
+            <p:ph type="sldNum" sz="quarter" idx="5"/>
+          </p:nvPr>
+        </p:nvSpPr>
+        <p:spPr/>
+        <p:txBody>
+          <a:bodyPr/>
+          <a:lstStyle/>
+          <a:p>
+            <a:fld id="{6BFD01EB-C9A3-4136-A0B1-C6AEC703FF81}" type="slidenum">
+              <a:rPr lang="en-US" smtClean="0"/>
+              <a:t>21</a:t>
+            </a:fld>
+            <a:endParaRPr lang="en-US"/>
+          </a:p>
+        </p:txBody>
+      </p:sp>
+      <p:sp>
+        <p:nvSpPr>
+          <p:cNvPr id="1048605" name="Rectangle 2">
+            <a:extLst>
+              <a:ext uri="{FF2B5EF4-FFF2-40B4-BE49-F238E27FC236}">
+                <a16:creationId xmlns:a16="http://schemas.microsoft.com/office/drawing/2014/main" id="{6F919522-DFB0-5ECC-8346-8016ABF3A228}"/>
+              </a:ext>
+            </a:extLst>
+          </p:cNvPr>
+          <p:cNvSpPr>
+            <a:spLocks noGrp="1" noRot="1" noChangeAspect="1" noChangeArrowheads="1" noTextEdit="1"/>
+          </p:cNvSpPr>
+          <p:nvPr>
+            <p:ph type="sldImg"/>
+          </p:nvPr>
+        </p:nvSpPr>
+        <p:spPr/>
+        <p:txBody>
+          <a:bodyPr/>
+          <a:lstStyle/>
+          <a:p>
+            <a:endParaRPr lang="en-IN"/>
+          </a:p>
+        </p:txBody>
+      </p:sp>
+      <p:sp>
+        <p:nvSpPr>
+          <p:cNvPr id="1048606" name="Rectangle 3">
+            <a:extLst>
+              <a:ext uri="{FF2B5EF4-FFF2-40B4-BE49-F238E27FC236}">
+                <a16:creationId xmlns:a16="http://schemas.microsoft.com/office/drawing/2014/main" id="{B352A4F1-2989-7E99-B03B-73527A493544}"/>
+              </a:ext>
+            </a:extLst>
+          </p:cNvPr>
+          <p:cNvSpPr>
+            <a:spLocks noGrp="1" noChangeArrowheads="1"/>
+          </p:cNvSpPr>
+          <p:nvPr>
+            <p:ph type="body" idx="1"/>
+          </p:nvPr>
+        </p:nvSpPr>
+        <p:spPr>
+          <a:noFill/>
+        </p:spPr>
+        <p:txBody>
+          <a:bodyPr/>
+          <a:lstStyle/>
+          <a:p>
+            <a:pPr eaLnBrk="1" hangingPunct="1"/>
+            <a:endParaRPr lang="en-US">
+              <a:latin typeface="Arial" panose="020B0604020202020204" pitchFamily="34" charset="0"/>
+            </a:endParaRPr>
+          </a:p>
+        </p:txBody>
+      </p:sp>
+    </p:spTree>
+    <p:extLst>
+      <p:ext uri="{BB962C8B-B14F-4D97-AF65-F5344CB8AC3E}">
+        <p14:creationId xmlns:p14="http://schemas.microsoft.com/office/powerpoint/2010/main" val="591079401"/>
       </p:ext>
     </p:extLst>
   </p:cSld>
@@ -2308,7 +2913,7 @@
           <a:p>
             <a:fld id="{93EE43D5-2594-4735-80B7-F0E4544112AC}" type="datetime1">
               <a:rPr lang="en-GB" smtClean="0"/>
-              <a:t>28/03/2026</a:t>
+              <a:t>02/06/2026</a:t>
             </a:fld>
             <a:endParaRPr lang="en-GB"/>
           </a:p>
@@ -2477,7 +3082,7 @@
           <a:p>
             <a:fld id="{D90ED07B-0D58-4238-8D9E-3917EDEFBF11}" type="datetime1">
               <a:rPr lang="en-GB" smtClean="0"/>
-              <a:t>28/03/2026</a:t>
+              <a:t>02/06/2026</a:t>
             </a:fld>
             <a:endParaRPr lang="en-GB"/>
           </a:p>
@@ -2656,7 +3261,7 @@
           <a:p>
             <a:fld id="{0B15D4D9-60EA-4115-9F62-3D25530A60C4}" type="datetime1">
               <a:rPr lang="en-GB" smtClean="0"/>
-              <a:t>28/03/2026</a:t>
+              <a:t>02/06/2026</a:t>
             </a:fld>
             <a:endParaRPr lang="en-GB"/>
           </a:p>
@@ -2825,7 +3430,7 @@
           <a:p>
             <a:fld id="{A33F980D-9641-4D55-BA26-2EDCEA9EE1F9}" type="datetime1">
               <a:rPr lang="en-GB" smtClean="0"/>
-              <a:t>28/03/2026</a:t>
+              <a:t>02/06/2026</a:t>
             </a:fld>
             <a:endParaRPr lang="en-GB"/>
           </a:p>
@@ -3070,7 +3675,7 @@
           <a:p>
             <a:fld id="{862637F8-03A0-4970-9A0A-BCE5C1C1EC0E}" type="datetime1">
               <a:rPr lang="en-GB" smtClean="0"/>
-              <a:t>28/03/2026</a:t>
+              <a:t>02/06/2026</a:t>
             </a:fld>
             <a:endParaRPr lang="en-GB"/>
           </a:p>
@@ -3357,7 +3962,7 @@
           <a:p>
             <a:fld id="{DAAD62D7-D6ED-44F8-A2FC-AD370DF5A044}" type="datetime1">
               <a:rPr lang="en-GB" smtClean="0"/>
-              <a:t>28/03/2026</a:t>
+              <a:t>02/06/2026</a:t>
             </a:fld>
             <a:endParaRPr lang="en-GB"/>
           </a:p>
@@ -3778,7 +4383,7 @@
           <a:p>
             <a:fld id="{A74D6229-4D31-4440-844B-D28A91210DCE}" type="datetime1">
               <a:rPr lang="en-GB" smtClean="0"/>
-              <a:t>28/03/2026</a:t>
+              <a:t>02/06/2026</a:t>
             </a:fld>
             <a:endParaRPr lang="en-GB"/>
           </a:p>
@@ -3895,7 +4500,7 @@
           <a:p>
             <a:fld id="{06EB690D-B474-4F2D-8063-C3D6525BFDB7}" type="datetime1">
               <a:rPr lang="en-GB" smtClean="0"/>
-              <a:t>28/03/2026</a:t>
+              <a:t>02/06/2026</a:t>
             </a:fld>
             <a:endParaRPr lang="en-GB"/>
           </a:p>
@@ -3989,7 +4594,7 @@
           <a:p>
             <a:fld id="{965D96AC-A833-40E3-8856-0B511BFD0B34}" type="datetime1">
               <a:rPr lang="en-GB" smtClean="0"/>
-              <a:t>28/03/2026</a:t>
+              <a:t>02/06/2026</a:t>
             </a:fld>
             <a:endParaRPr lang="en-GB"/>
           </a:p>
@@ -4265,7 +4870,7 @@
           <a:p>
             <a:fld id="{6F20C083-5B51-4A6F-8A8D-25BF65281288}" type="datetime1">
               <a:rPr lang="en-GB" smtClean="0"/>
-              <a:t>28/03/2026</a:t>
+              <a:t>02/06/2026</a:t>
             </a:fld>
             <a:endParaRPr lang="en-GB"/>
           </a:p>
@@ -4517,7 +5122,7 @@
           <a:p>
             <a:fld id="{74158CEF-DEAA-4FD7-A123-4034F0FFBE51}" type="datetime1">
               <a:rPr lang="en-GB" smtClean="0"/>
-              <a:t>28/03/2026</a:t>
+              <a:t>02/06/2026</a:t>
             </a:fld>
             <a:endParaRPr lang="en-GB"/>
           </a:p>
@@ -4729,7 +5334,7 @@
           <a:p>
             <a:fld id="{EE03102E-B0BC-4EBE-905A-EE89488B9FC5}" type="datetime1">
               <a:rPr lang="en-GB" smtClean="0"/>
-              <a:t>28/03/2026</a:t>
+              <a:t>02/06/2026</a:t>
             </a:fld>
             <a:endParaRPr lang="en-GB"/>
           </a:p>
@@ -5263,8 +5868,8 @@
         </p:nvSpPr>
         <p:spPr bwMode="auto">
           <a:xfrm>
-            <a:off x="36512" y="1052736"/>
-            <a:ext cx="9144000" cy="338554"/>
+            <a:off x="0" y="1052736"/>
+            <a:ext cx="9180512" cy="338554"/>
           </a:xfrm>
           <a:prstGeom prst="rect">
             <a:avLst/>
@@ -5289,7 +5894,7 @@
                 <a:latin typeface="Times New Roman" panose="02020603050405020304" pitchFamily="18" charset="0"/>
                 <a:cs typeface="Times New Roman" panose="02020603050405020304" pitchFamily="18" charset="0"/>
               </a:rPr>
-              <a:t>Review -IV</a:t>
+              <a:t>Final Presentation</a:t>
             </a:r>
             <a:endParaRPr lang="en-IN" sz="1600" b="1" dirty="0">
               <a:latin typeface="Times New Roman" panose="02020603050405020304" pitchFamily="18" charset="0"/>
@@ -5339,7 +5944,7 @@
         <p:spPr>
           <a:xfrm>
             <a:off x="539552" y="1484784"/>
-            <a:ext cx="8091772" cy="5078313"/>
+            <a:ext cx="8091772" cy="5355312"/>
           </a:xfrm>
           <a:prstGeom prst="rect">
             <a:avLst/>
@@ -5511,7 +6116,17 @@
                 <a:latin typeface="Times New Roman" panose="02020603050405020304" pitchFamily="18" charset="0"/>
                 <a:cs typeface="Times New Roman" panose="02020603050405020304" pitchFamily="18" charset="0"/>
               </a:rPr>
-              <a:t>Prof. Priyanka </a:t>
+              <a:t>Dr. Prashant Ahire</a:t>
+            </a:r>
+          </a:p>
+          <a:p>
+            <a:pPr algn="ctr"/>
+            <a:r>
+              <a:rPr lang="en-US" dirty="0">
+                <a:latin typeface="Times New Roman" panose="02020603050405020304" pitchFamily="18" charset="0"/>
+                <a:cs typeface="Times New Roman" panose="02020603050405020304" pitchFamily="18" charset="0"/>
+              </a:rPr>
+              <a:t>Dr. Priyanka </a:t>
             </a:r>
             <a:r>
               <a:rPr lang="en-US" dirty="0" err="1">
@@ -7179,6 +7794,57 @@
           </a:graphicData>
         </a:graphic>
       </p:graphicFrame>
+      <p:sp>
+        <p:nvSpPr>
+          <p:cNvPr id="4" name="TextBox 7">
+            <a:extLst>
+              <a:ext uri="{FF2B5EF4-FFF2-40B4-BE49-F238E27FC236}">
+                <a16:creationId xmlns:a16="http://schemas.microsoft.com/office/drawing/2014/main" id="{C9F74DB3-27D2-E05D-37E3-EA0B15095D55}"/>
+              </a:ext>
+            </a:extLst>
+          </p:cNvPr>
+          <p:cNvSpPr txBox="1">
+            <a:spLocks noChangeArrowheads="1"/>
+          </p:cNvSpPr>
+          <p:nvPr/>
+        </p:nvSpPr>
+        <p:spPr bwMode="auto">
+          <a:xfrm>
+            <a:off x="0" y="1052736"/>
+            <a:ext cx="9180512" cy="338554"/>
+          </a:xfrm>
+          <a:prstGeom prst="rect">
+            <a:avLst/>
+          </a:prstGeom>
+          <a:solidFill>
+            <a:srgbClr val="FFC000"/>
+          </a:solidFill>
+          <a:ln w="9525">
+            <a:noFill/>
+            <a:miter lim="800000"/>
+          </a:ln>
+        </p:spPr>
+        <p:txBody>
+          <a:bodyPr wrap="square">
+            <a:spAutoFit/>
+          </a:bodyPr>
+          <a:lstStyle/>
+          <a:p>
+            <a:pPr algn="ctr"/>
+            <a:r>
+              <a:rPr lang="en-US" sz="1600" b="1" dirty="0">
+                <a:latin typeface="Times New Roman" panose="02020603050405020304" pitchFamily="18" charset="0"/>
+                <a:cs typeface="Times New Roman" panose="02020603050405020304" pitchFamily="18" charset="0"/>
+              </a:rPr>
+              <a:t>Final Presentation</a:t>
+            </a:r>
+            <a:endParaRPr lang="en-IN" sz="1600" b="1" dirty="0">
+              <a:latin typeface="Times New Roman" panose="02020603050405020304" pitchFamily="18" charset="0"/>
+              <a:cs typeface="Times New Roman" panose="02020603050405020304" pitchFamily="18" charset="0"/>
+            </a:endParaRPr>
+          </a:p>
+        </p:txBody>
+      </p:sp>
     </p:spTree>
     <p:extLst>
       <p:ext uri="{BB962C8B-B14F-4D97-AF65-F5344CB8AC3E}">
@@ -7517,10 +8183,10 @@
       </p:sp>
       <p:pic>
         <p:nvPicPr>
-          <p:cNvPr id="5" name="Picture 4">
+          <p:cNvPr id="6" name="Picture 5">
             <a:extLst>
               <a:ext uri="{FF2B5EF4-FFF2-40B4-BE49-F238E27FC236}">
-                <a16:creationId xmlns:a16="http://schemas.microsoft.com/office/drawing/2014/main" id="{4D703A66-23CF-57D3-A9A3-64B9E4E5E3AD}"/>
+                <a16:creationId xmlns:a16="http://schemas.microsoft.com/office/drawing/2014/main" id="{B550B607-3550-E8D6-1A1F-FA74D819B7D1}"/>
               </a:ext>
             </a:extLst>
           </p:cNvPr>
@@ -7543,14 +8209,70 @@
         </p:blipFill>
         <p:spPr>
           <a:xfrm>
-            <a:off x="251520" y="2300371"/>
-            <a:ext cx="8712968" cy="3792925"/>
+            <a:off x="760316" y="2159666"/>
+            <a:ext cx="7623367" cy="3334700"/>
           </a:xfrm>
           <a:prstGeom prst="rect">
             <a:avLst/>
           </a:prstGeom>
+          <a:ln>
+            <a:solidFill>
+              <a:schemeClr val="tx1"/>
+            </a:solidFill>
+          </a:ln>
         </p:spPr>
       </p:pic>
+      <p:sp>
+        <p:nvSpPr>
+          <p:cNvPr id="7" name="TextBox 7">
+            <a:extLst>
+              <a:ext uri="{FF2B5EF4-FFF2-40B4-BE49-F238E27FC236}">
+                <a16:creationId xmlns:a16="http://schemas.microsoft.com/office/drawing/2014/main" id="{AD5BABF8-9631-6532-FD99-1F9B92F28C53}"/>
+              </a:ext>
+            </a:extLst>
+          </p:cNvPr>
+          <p:cNvSpPr txBox="1">
+            <a:spLocks noChangeArrowheads="1"/>
+          </p:cNvSpPr>
+          <p:nvPr/>
+        </p:nvSpPr>
+        <p:spPr bwMode="auto">
+          <a:xfrm>
+            <a:off x="0" y="1052736"/>
+            <a:ext cx="9180512" cy="338554"/>
+          </a:xfrm>
+          <a:prstGeom prst="rect">
+            <a:avLst/>
+          </a:prstGeom>
+          <a:solidFill>
+            <a:srgbClr val="FFC000"/>
+          </a:solidFill>
+          <a:ln w="9525">
+            <a:noFill/>
+            <a:miter lim="800000"/>
+          </a:ln>
+        </p:spPr>
+        <p:txBody>
+          <a:bodyPr wrap="square">
+            <a:spAutoFit/>
+          </a:bodyPr>
+          <a:lstStyle/>
+          <a:p>
+            <a:pPr algn="ctr"/>
+            <a:r>
+              <a:rPr lang="en-US" sz="1600" b="1" dirty="0">
+                <a:latin typeface="Times New Roman" panose="02020603050405020304" pitchFamily="18" charset="0"/>
+                <a:cs typeface="Times New Roman" panose="02020603050405020304" pitchFamily="18" charset="0"/>
+              </a:rPr>
+              <a:t>Final Presentation</a:t>
+            </a:r>
+            <a:endParaRPr lang="en-IN" sz="1600" b="1" dirty="0">
+              <a:latin typeface="Times New Roman" panose="02020603050405020304" pitchFamily="18" charset="0"/>
+              <a:cs typeface="Times New Roman" panose="02020603050405020304" pitchFamily="18" charset="0"/>
+            </a:endParaRPr>
+          </a:p>
+        </p:txBody>
+      </p:sp>
     </p:spTree>
     <p:extLst>
       <p:ext uri="{BB962C8B-B14F-4D97-AF65-F5344CB8AC3E}">
@@ -7931,6 +8653,935 @@
       </p:sp>
       <p:pic>
         <p:nvPicPr>
+          <p:cNvPr id="5" name="Picture 4">
+            <a:extLst>
+              <a:ext uri="{FF2B5EF4-FFF2-40B4-BE49-F238E27FC236}">
+                <a16:creationId xmlns:a16="http://schemas.microsoft.com/office/drawing/2014/main" id="{01E0D771-4126-5077-8A38-204C6D1B1ADB}"/>
+              </a:ext>
+            </a:extLst>
+          </p:cNvPr>
+          <p:cNvPicPr>
+            <a:picLocks noChangeAspect="1"/>
+          </p:cNvPicPr>
+          <p:nvPr/>
+        </p:nvPicPr>
+        <p:blipFill>
+          <a:blip r:embed="rId5">
+            <a:extLst>
+              <a:ext uri="{28A0092B-C50C-407E-A947-70E740481C1C}">
+                <a14:useLocalDpi xmlns:a14="http://schemas.microsoft.com/office/drawing/2010/main" val="0"/>
+              </a:ext>
+            </a:extLst>
+          </a:blip>
+          <a:stretch>
+            <a:fillRect/>
+          </a:stretch>
+        </p:blipFill>
+        <p:spPr>
+          <a:xfrm>
+            <a:off x="467544" y="2284349"/>
+            <a:ext cx="8352928" cy="3379495"/>
+          </a:xfrm>
+          <a:prstGeom prst="rect">
+            <a:avLst/>
+          </a:prstGeom>
+          <a:ln>
+            <a:solidFill>
+              <a:schemeClr val="tx1"/>
+            </a:solidFill>
+          </a:ln>
+        </p:spPr>
+      </p:pic>
+      <p:sp>
+        <p:nvSpPr>
+          <p:cNvPr id="7" name="TextBox 7">
+            <a:extLst>
+              <a:ext uri="{FF2B5EF4-FFF2-40B4-BE49-F238E27FC236}">
+                <a16:creationId xmlns:a16="http://schemas.microsoft.com/office/drawing/2014/main" id="{D00AE7BA-953A-E95B-0524-C3CCAFEB4AFB}"/>
+              </a:ext>
+            </a:extLst>
+          </p:cNvPr>
+          <p:cNvSpPr txBox="1">
+            <a:spLocks noChangeArrowheads="1"/>
+          </p:cNvSpPr>
+          <p:nvPr/>
+        </p:nvSpPr>
+        <p:spPr bwMode="auto">
+          <a:xfrm>
+            <a:off x="0" y="1052736"/>
+            <a:ext cx="9180512" cy="338554"/>
+          </a:xfrm>
+          <a:prstGeom prst="rect">
+            <a:avLst/>
+          </a:prstGeom>
+          <a:solidFill>
+            <a:srgbClr val="FFC000"/>
+          </a:solidFill>
+          <a:ln w="9525">
+            <a:noFill/>
+            <a:miter lim="800000"/>
+          </a:ln>
+        </p:spPr>
+        <p:txBody>
+          <a:bodyPr wrap="square">
+            <a:spAutoFit/>
+          </a:bodyPr>
+          <a:lstStyle/>
+          <a:p>
+            <a:pPr algn="ctr"/>
+            <a:r>
+              <a:rPr lang="en-US" sz="1600" b="1" dirty="0">
+                <a:latin typeface="Times New Roman" panose="02020603050405020304" pitchFamily="18" charset="0"/>
+                <a:cs typeface="Times New Roman" panose="02020603050405020304" pitchFamily="18" charset="0"/>
+              </a:rPr>
+              <a:t>Final Presentation</a:t>
+            </a:r>
+            <a:endParaRPr lang="en-IN" sz="1600" b="1" dirty="0">
+              <a:latin typeface="Times New Roman" panose="02020603050405020304" pitchFamily="18" charset="0"/>
+              <a:cs typeface="Times New Roman" panose="02020603050405020304" pitchFamily="18" charset="0"/>
+            </a:endParaRPr>
+          </a:p>
+        </p:txBody>
+      </p:sp>
+    </p:spTree>
+    <p:extLst>
+      <p:ext uri="{BB962C8B-B14F-4D97-AF65-F5344CB8AC3E}">
+        <p14:creationId xmlns:p14="http://schemas.microsoft.com/office/powerpoint/2010/main" val="4214793627"/>
+      </p:ext>
+    </p:extLst>
+  </p:cSld>
+  <p:clrMapOvr>
+    <a:masterClrMapping/>
+  </p:clrMapOvr>
+</p:sld>
+</file>
+
+<file path=ppt/slides/slide13.xml><?xml version="1.0" encoding="utf-8"?>
+<p:sld xmlns:a="http://schemas.openxmlformats.org/drawingml/2006/main" xmlns:r="http://schemas.openxmlformats.org/officeDocument/2006/relationships" xmlns:p="http://schemas.openxmlformats.org/presentationml/2006/main">
+  <p:cSld>
+    <p:spTree>
+      <p:nvGrpSpPr>
+        <p:cNvPr id="1" name="">
+          <a:extLst>
+            <a:ext uri="{FF2B5EF4-FFF2-40B4-BE49-F238E27FC236}">
+              <a16:creationId xmlns:a16="http://schemas.microsoft.com/office/drawing/2014/main" id="{9F201378-38D4-A630-BDC7-EE07101EF8DE}"/>
+            </a:ext>
+          </a:extLst>
+        </p:cNvPr>
+        <p:cNvGrpSpPr/>
+        <p:nvPr/>
+      </p:nvGrpSpPr>
+      <p:grpSpPr>
+        <a:xfrm>
+          <a:off x="0" y="0"/>
+          <a:ext cx="0" cy="0"/>
+          <a:chOff x="0" y="0"/>
+          <a:chExt cx="0" cy="0"/>
+        </a:xfrm>
+      </p:grpSpPr>
+      <p:sp>
+        <p:nvSpPr>
+          <p:cNvPr id="1048598" name="Rectangle 5">
+            <a:extLst>
+              <a:ext uri="{FF2B5EF4-FFF2-40B4-BE49-F238E27FC236}">
+                <a16:creationId xmlns:a16="http://schemas.microsoft.com/office/drawing/2014/main" id="{9A1D082D-A204-5EBF-FD7D-E2403B7A9CDE}"/>
+              </a:ext>
+            </a:extLst>
+          </p:cNvPr>
+          <p:cNvSpPr>
+            <a:spLocks noGrp="1" noChangeArrowheads="1"/>
+          </p:cNvSpPr>
+          <p:nvPr>
+            <p:ph type="ctrTitle"/>
+          </p:nvPr>
+        </p:nvSpPr>
+        <p:spPr>
+          <a:xfrm>
+            <a:off x="1043608" y="160813"/>
+            <a:ext cx="6984776" cy="1035939"/>
+          </a:xfrm>
+          <a:solidFill>
+            <a:schemeClr val="bg1"/>
+          </a:solidFill>
+          <a:effectLst>
+            <a:outerShdw dist="35921" dir="2700000" algn="ctr" rotWithShape="0">
+              <a:schemeClr val="accent1">
+                <a:alpha val="50000"/>
+              </a:schemeClr>
+            </a:outerShdw>
+          </a:effectLst>
+        </p:spPr>
+        <p:txBody>
+          <a:bodyPr>
+            <a:noAutofit/>
+          </a:bodyPr>
+          <a:lstStyle/>
+          <a:p>
+            <a:r>
+              <a:rPr lang="en-US" sz="1600" dirty="0"/>
+              <a:t>Nutan Maharashtra </a:t>
+            </a:r>
+            <a:r>
+              <a:rPr lang="en-US" sz="1600" dirty="0" err="1"/>
+              <a:t>Vidya</a:t>
+            </a:r>
+            <a:r>
+              <a:rPr lang="en-US" sz="1600" dirty="0"/>
+              <a:t> </a:t>
+            </a:r>
+            <a:r>
+              <a:rPr lang="en-US" sz="1600" dirty="0" err="1"/>
+              <a:t>Prasarak</a:t>
+            </a:r>
+            <a:r>
+              <a:rPr lang="en-US" sz="1600" dirty="0"/>
+              <a:t> </a:t>
+            </a:r>
+            <a:r>
+              <a:rPr lang="en-US" sz="1600" dirty="0" err="1"/>
+              <a:t>Mandal’s</a:t>
+            </a:r>
+            <a:r>
+              <a:rPr lang="en-US" sz="1600" dirty="0"/>
+              <a:t> </a:t>
+            </a:r>
+            <a:br>
+              <a:rPr lang="en-US" sz="1600" dirty="0"/>
+            </a:br>
+            <a:r>
+              <a:rPr lang="en-US" sz="1800" dirty="0"/>
+              <a:t> </a:t>
+            </a:r>
+            <a:r>
+              <a:rPr lang="en-US" sz="1800" b="1" dirty="0"/>
+              <a:t>NUTAN COLLEGE OF ENGINEERING AND RESEARCH </a:t>
+            </a:r>
+            <a:br>
+              <a:rPr lang="en-US" sz="1800" dirty="0"/>
+            </a:br>
+            <a:r>
+              <a:rPr lang="en-US" sz="1600" dirty="0"/>
+              <a:t>Under Administrative Support of </a:t>
+            </a:r>
+            <a:r>
+              <a:rPr lang="en-US" sz="1600" dirty="0" err="1"/>
+              <a:t>Pimpri</a:t>
+            </a:r>
+            <a:r>
+              <a:rPr lang="en-US" sz="1600" dirty="0"/>
+              <a:t> </a:t>
+            </a:r>
+            <a:r>
+              <a:rPr lang="en-US" sz="1600" dirty="0" err="1"/>
+              <a:t>Chinchwad</a:t>
+            </a:r>
+            <a:r>
+              <a:rPr lang="en-US" sz="1600" dirty="0"/>
+              <a:t>  Education Trust </a:t>
+            </a:r>
+            <a:br>
+              <a:rPr lang="en-US" sz="1600" dirty="0"/>
+            </a:br>
+            <a:r>
+              <a:rPr lang="en-US" sz="1600" dirty="0"/>
+              <a:t>ISO 21001:2018 EOMS Certified </a:t>
+            </a:r>
+            <a:r>
+              <a:rPr lang="en-US" sz="1200" dirty="0"/>
+              <a:t>	</a:t>
+            </a:r>
+            <a:br>
+              <a:rPr lang="en-US" sz="1200" dirty="0"/>
+            </a:br>
+            <a:endParaRPr lang="en-US" sz="1400" dirty="0"/>
+          </a:p>
+        </p:txBody>
+      </p:sp>
+      <p:pic>
+        <p:nvPicPr>
+          <p:cNvPr id="2097159" name="Picture 6">
+            <a:extLst>
+              <a:ext uri="{FF2B5EF4-FFF2-40B4-BE49-F238E27FC236}">
+                <a16:creationId xmlns:a16="http://schemas.microsoft.com/office/drawing/2014/main" id="{6F8CE13C-7BDD-40A8-D6DE-762320E5A7CE}"/>
+              </a:ext>
+            </a:extLst>
+          </p:cNvPr>
+          <p:cNvPicPr>
+            <a:picLocks noChangeAspect="1" noChangeArrowheads="1"/>
+          </p:cNvPicPr>
+          <p:nvPr/>
+        </p:nvPicPr>
+        <p:blipFill>
+          <a:blip r:embed="rId3" cstate="print">
+            <a:extLst>
+              <a:ext uri="{28A0092B-C50C-407E-A947-70E740481C1C}">
+                <a14:useLocalDpi xmlns:a14="http://schemas.microsoft.com/office/drawing/2010/main" val="0"/>
+              </a:ext>
+            </a:extLst>
+          </a:blip>
+          <a:stretch>
+            <a:fillRect/>
+          </a:stretch>
+        </p:blipFill>
+        <p:spPr bwMode="auto">
+          <a:xfrm>
+            <a:off x="467544" y="19232"/>
+            <a:ext cx="1202454" cy="1033504"/>
+          </a:xfrm>
+          <a:prstGeom prst="rect">
+            <a:avLst/>
+          </a:prstGeom>
+          <a:noFill/>
+          <a:ln w="9525">
+            <a:noFill/>
+            <a:miter lim="800000"/>
+            <a:headEnd/>
+            <a:tailEnd/>
+          </a:ln>
+        </p:spPr>
+      </p:pic>
+      <p:sp>
+        <p:nvSpPr>
+          <p:cNvPr id="1048601" name="TextBox 7">
+            <a:extLst>
+              <a:ext uri="{FF2B5EF4-FFF2-40B4-BE49-F238E27FC236}">
+                <a16:creationId xmlns:a16="http://schemas.microsoft.com/office/drawing/2014/main" id="{A0C29D1F-D522-A20A-B2F1-D2FD38316BB7}"/>
+              </a:ext>
+            </a:extLst>
+          </p:cNvPr>
+          <p:cNvSpPr txBox="1">
+            <a:spLocks noChangeArrowheads="1"/>
+          </p:cNvSpPr>
+          <p:nvPr/>
+        </p:nvSpPr>
+        <p:spPr bwMode="auto">
+          <a:xfrm>
+            <a:off x="36512" y="1052736"/>
+            <a:ext cx="9144000" cy="338554"/>
+          </a:xfrm>
+          <a:prstGeom prst="rect">
+            <a:avLst/>
+          </a:prstGeom>
+          <a:solidFill>
+            <a:srgbClr val="FFC000"/>
+          </a:solidFill>
+          <a:ln w="9525">
+            <a:noFill/>
+            <a:miter lim="800000"/>
+          </a:ln>
+        </p:spPr>
+        <p:txBody>
+          <a:bodyPr wrap="square">
+            <a:spAutoFit/>
+          </a:bodyPr>
+          <a:lstStyle/>
+          <a:p>
+            <a:pPr algn="ctr"/>
+            <a:r>
+              <a:rPr lang="en-US" sz="1600" b="1" dirty="0">
+                <a:latin typeface="Times New Roman" panose="02020603050405020304" pitchFamily="18" charset="0"/>
+                <a:cs typeface="Times New Roman" panose="02020603050405020304" pitchFamily="18" charset="0"/>
+              </a:rPr>
+              <a:t>Review - IV</a:t>
+            </a:r>
+            <a:endParaRPr lang="en-IN" sz="1600" b="1" dirty="0">
+              <a:latin typeface="Times New Roman" panose="02020603050405020304" pitchFamily="18" charset="0"/>
+              <a:cs typeface="Times New Roman" panose="02020603050405020304" pitchFamily="18" charset="0"/>
+            </a:endParaRPr>
+          </a:p>
+        </p:txBody>
+      </p:sp>
+      <p:sp>
+        <p:nvSpPr>
+          <p:cNvPr id="2" name="Slide Number Placeholder 1">
+            <a:extLst>
+              <a:ext uri="{FF2B5EF4-FFF2-40B4-BE49-F238E27FC236}">
+                <a16:creationId xmlns:a16="http://schemas.microsoft.com/office/drawing/2014/main" id="{51CE8FF3-847A-87FA-3907-483653B0D413}"/>
+              </a:ext>
+            </a:extLst>
+          </p:cNvPr>
+          <p:cNvSpPr>
+            <a:spLocks noGrp="1"/>
+          </p:cNvSpPr>
+          <p:nvPr>
+            <p:ph type="sldNum" sz="quarter" idx="12"/>
+          </p:nvPr>
+        </p:nvSpPr>
+        <p:spPr/>
+        <p:txBody>
+          <a:bodyPr/>
+          <a:lstStyle/>
+          <a:p>
+            <a:fld id="{1EC248AB-E565-412B-9D95-9B07D6A4F3F3}" type="slidenum">
+              <a:rPr lang="en-GB" b="1" smtClean="0">
+                <a:solidFill>
+                  <a:schemeClr val="tx1"/>
+                </a:solidFill>
+              </a:rPr>
+              <a:pPr/>
+              <a:t>13</a:t>
+            </a:fld>
+            <a:endParaRPr lang="en-GB" b="1" dirty="0">
+              <a:solidFill>
+                <a:schemeClr val="tx1"/>
+              </a:solidFill>
+            </a:endParaRPr>
+          </a:p>
+        </p:txBody>
+      </p:sp>
+      <p:pic>
+        <p:nvPicPr>
+          <p:cNvPr id="1027" name="Picture 3" descr="C:\Users\admin\Desktop\download.png">
+            <a:extLst>
+              <a:ext uri="{FF2B5EF4-FFF2-40B4-BE49-F238E27FC236}">
+                <a16:creationId xmlns:a16="http://schemas.microsoft.com/office/drawing/2014/main" id="{8969F686-11C2-7336-106A-792DB8DC7064}"/>
+              </a:ext>
+            </a:extLst>
+          </p:cNvPr>
+          <p:cNvPicPr>
+            <a:picLocks noChangeAspect="1" noChangeArrowheads="1"/>
+          </p:cNvPicPr>
+          <p:nvPr/>
+        </p:nvPicPr>
+        <p:blipFill>
+          <a:blip r:embed="rId4">
+            <a:extLst>
+              <a:ext uri="{28A0092B-C50C-407E-A947-70E740481C1C}">
+                <a14:useLocalDpi xmlns:a14="http://schemas.microsoft.com/office/drawing/2010/main" val="0"/>
+              </a:ext>
+            </a:extLst>
+          </a:blip>
+          <a:srcRect/>
+          <a:stretch>
+            <a:fillRect/>
+          </a:stretch>
+        </p:blipFill>
+        <p:spPr bwMode="auto">
+          <a:xfrm>
+            <a:off x="7452320" y="44624"/>
+            <a:ext cx="1207008" cy="1033505"/>
+          </a:xfrm>
+          <a:prstGeom prst="rect">
+            <a:avLst/>
+          </a:prstGeom>
+          <a:noFill/>
+          <a:extLst>
+            <a:ext uri="{909E8E84-426E-40DD-AFC4-6F175D3DCCD1}">
+              <a14:hiddenFill xmlns:a14="http://schemas.microsoft.com/office/drawing/2010/main">
+                <a:solidFill>
+                  <a:srgbClr val="FFFFFF"/>
+                </a:solidFill>
+              </a14:hiddenFill>
+            </a:ext>
+          </a:extLst>
+        </p:spPr>
+      </p:pic>
+      <p:sp>
+        <p:nvSpPr>
+          <p:cNvPr id="3" name="Rectangle 2">
+            <a:extLst>
+              <a:ext uri="{FF2B5EF4-FFF2-40B4-BE49-F238E27FC236}">
+                <a16:creationId xmlns:a16="http://schemas.microsoft.com/office/drawing/2014/main" id="{F9CBAED3-E320-931B-85F9-8C2782651E56}"/>
+              </a:ext>
+            </a:extLst>
+          </p:cNvPr>
+          <p:cNvSpPr/>
+          <p:nvPr/>
+        </p:nvSpPr>
+        <p:spPr>
+          <a:xfrm>
+            <a:off x="59285" y="1582511"/>
+            <a:ext cx="9084715" cy="584775"/>
+          </a:xfrm>
+          <a:prstGeom prst="rect">
+            <a:avLst/>
+          </a:prstGeom>
+        </p:spPr>
+        <p:txBody>
+          <a:bodyPr wrap="square">
+            <a:spAutoFit/>
+          </a:bodyPr>
+          <a:lstStyle/>
+          <a:p>
+            <a:pPr lvl="0" algn="ctr" eaLnBrk="0" fontAlgn="base" hangingPunct="0">
+              <a:spcBef>
+                <a:spcPct val="0"/>
+              </a:spcBef>
+              <a:spcAft>
+                <a:spcPct val="0"/>
+              </a:spcAft>
+            </a:pPr>
+            <a:r>
+              <a:rPr lang="en-US" altLang="en-US" sz="3200" b="1" dirty="0">
+                <a:latin typeface="Times New Roman" panose="02020603050405020304" pitchFamily="18" charset="0"/>
+                <a:cs typeface="Times New Roman" panose="02020603050405020304" pitchFamily="18" charset="0"/>
+              </a:rPr>
+              <a:t>Implementation of Work / Result</a:t>
+            </a:r>
+          </a:p>
+        </p:txBody>
+      </p:sp>
+      <p:sp>
+        <p:nvSpPr>
+          <p:cNvPr id="7" name="TextBox 7">
+            <a:extLst>
+              <a:ext uri="{FF2B5EF4-FFF2-40B4-BE49-F238E27FC236}">
+                <a16:creationId xmlns:a16="http://schemas.microsoft.com/office/drawing/2014/main" id="{A3F6D7D3-5918-0A5D-B689-56F38270944D}"/>
+              </a:ext>
+            </a:extLst>
+          </p:cNvPr>
+          <p:cNvSpPr txBox="1">
+            <a:spLocks noChangeArrowheads="1"/>
+          </p:cNvSpPr>
+          <p:nvPr/>
+        </p:nvSpPr>
+        <p:spPr bwMode="auto">
+          <a:xfrm>
+            <a:off x="0" y="1052736"/>
+            <a:ext cx="9180512" cy="338554"/>
+          </a:xfrm>
+          <a:prstGeom prst="rect">
+            <a:avLst/>
+          </a:prstGeom>
+          <a:solidFill>
+            <a:srgbClr val="FFC000"/>
+          </a:solidFill>
+          <a:ln w="9525">
+            <a:noFill/>
+            <a:miter lim="800000"/>
+          </a:ln>
+        </p:spPr>
+        <p:txBody>
+          <a:bodyPr wrap="square">
+            <a:spAutoFit/>
+          </a:bodyPr>
+          <a:lstStyle/>
+          <a:p>
+            <a:pPr algn="ctr"/>
+            <a:r>
+              <a:rPr lang="en-US" sz="1600" b="1" dirty="0">
+                <a:latin typeface="Times New Roman" panose="02020603050405020304" pitchFamily="18" charset="0"/>
+                <a:cs typeface="Times New Roman" panose="02020603050405020304" pitchFamily="18" charset="0"/>
+              </a:rPr>
+              <a:t>Final Presentation</a:t>
+            </a:r>
+            <a:endParaRPr lang="en-IN" sz="1600" b="1" dirty="0">
+              <a:latin typeface="Times New Roman" panose="02020603050405020304" pitchFamily="18" charset="0"/>
+              <a:cs typeface="Times New Roman" panose="02020603050405020304" pitchFamily="18" charset="0"/>
+            </a:endParaRPr>
+          </a:p>
+        </p:txBody>
+      </p:sp>
+      <p:pic>
+        <p:nvPicPr>
+          <p:cNvPr id="6" name="Picture 5">
+            <a:extLst>
+              <a:ext uri="{FF2B5EF4-FFF2-40B4-BE49-F238E27FC236}">
+                <a16:creationId xmlns:a16="http://schemas.microsoft.com/office/drawing/2014/main" id="{DFDE756D-BDD7-A820-9B04-F44ABABDF085}"/>
+              </a:ext>
+            </a:extLst>
+          </p:cNvPr>
+          <p:cNvPicPr>
+            <a:picLocks noChangeAspect="1"/>
+          </p:cNvPicPr>
+          <p:nvPr/>
+        </p:nvPicPr>
+        <p:blipFill>
+          <a:blip r:embed="rId5"/>
+          <a:stretch>
+            <a:fillRect/>
+          </a:stretch>
+        </p:blipFill>
+        <p:spPr>
+          <a:xfrm>
+            <a:off x="617917" y="2310146"/>
+            <a:ext cx="8058539" cy="3495118"/>
+          </a:xfrm>
+          <a:prstGeom prst="rect">
+            <a:avLst/>
+          </a:prstGeom>
+        </p:spPr>
+      </p:pic>
+    </p:spTree>
+    <p:extLst>
+      <p:ext uri="{BB962C8B-B14F-4D97-AF65-F5344CB8AC3E}">
+        <p14:creationId xmlns:p14="http://schemas.microsoft.com/office/powerpoint/2010/main" val="837364989"/>
+      </p:ext>
+    </p:extLst>
+  </p:cSld>
+  <p:clrMapOvr>
+    <a:masterClrMapping/>
+  </p:clrMapOvr>
+</p:sld>
+</file>
+
+<file path=ppt/slides/slide14.xml><?xml version="1.0" encoding="utf-8"?>
+<p:sld xmlns:a="http://schemas.openxmlformats.org/drawingml/2006/main" xmlns:r="http://schemas.openxmlformats.org/officeDocument/2006/relationships" xmlns:p="http://schemas.openxmlformats.org/presentationml/2006/main">
+  <p:cSld>
+    <p:spTree>
+      <p:nvGrpSpPr>
+        <p:cNvPr id="1" name="">
+          <a:extLst>
+            <a:ext uri="{FF2B5EF4-FFF2-40B4-BE49-F238E27FC236}">
+              <a16:creationId xmlns:a16="http://schemas.microsoft.com/office/drawing/2014/main" id="{35816148-D99C-43B3-030C-FAB4E7866E83}"/>
+            </a:ext>
+          </a:extLst>
+        </p:cNvPr>
+        <p:cNvGrpSpPr/>
+        <p:nvPr/>
+      </p:nvGrpSpPr>
+      <p:grpSpPr>
+        <a:xfrm>
+          <a:off x="0" y="0"/>
+          <a:ext cx="0" cy="0"/>
+          <a:chOff x="0" y="0"/>
+          <a:chExt cx="0" cy="0"/>
+        </a:xfrm>
+      </p:grpSpPr>
+      <p:sp>
+        <p:nvSpPr>
+          <p:cNvPr id="1048598" name="Rectangle 5">
+            <a:extLst>
+              <a:ext uri="{FF2B5EF4-FFF2-40B4-BE49-F238E27FC236}">
+                <a16:creationId xmlns:a16="http://schemas.microsoft.com/office/drawing/2014/main" id="{E541C203-B470-647E-A8F7-2F2B9E590A1F}"/>
+              </a:ext>
+            </a:extLst>
+          </p:cNvPr>
+          <p:cNvSpPr>
+            <a:spLocks noGrp="1" noChangeArrowheads="1"/>
+          </p:cNvSpPr>
+          <p:nvPr>
+            <p:ph type="ctrTitle"/>
+          </p:nvPr>
+        </p:nvSpPr>
+        <p:spPr>
+          <a:xfrm>
+            <a:off x="1043608" y="160813"/>
+            <a:ext cx="6984776" cy="1035939"/>
+          </a:xfrm>
+          <a:solidFill>
+            <a:schemeClr val="bg1"/>
+          </a:solidFill>
+          <a:effectLst>
+            <a:outerShdw dist="35921" dir="2700000" algn="ctr" rotWithShape="0">
+              <a:schemeClr val="accent1">
+                <a:alpha val="50000"/>
+              </a:schemeClr>
+            </a:outerShdw>
+          </a:effectLst>
+        </p:spPr>
+        <p:txBody>
+          <a:bodyPr>
+            <a:noAutofit/>
+          </a:bodyPr>
+          <a:lstStyle/>
+          <a:p>
+            <a:r>
+              <a:rPr lang="en-US" sz="1600" dirty="0"/>
+              <a:t>Nutan Maharashtra </a:t>
+            </a:r>
+            <a:r>
+              <a:rPr lang="en-US" sz="1600" dirty="0" err="1"/>
+              <a:t>Vidya</a:t>
+            </a:r>
+            <a:r>
+              <a:rPr lang="en-US" sz="1600" dirty="0"/>
+              <a:t> </a:t>
+            </a:r>
+            <a:r>
+              <a:rPr lang="en-US" sz="1600" dirty="0" err="1"/>
+              <a:t>Prasarak</a:t>
+            </a:r>
+            <a:r>
+              <a:rPr lang="en-US" sz="1600" dirty="0"/>
+              <a:t> </a:t>
+            </a:r>
+            <a:r>
+              <a:rPr lang="en-US" sz="1600" dirty="0" err="1"/>
+              <a:t>Mandal’s</a:t>
+            </a:r>
+            <a:r>
+              <a:rPr lang="en-US" sz="1600" dirty="0"/>
+              <a:t> </a:t>
+            </a:r>
+            <a:br>
+              <a:rPr lang="en-US" sz="1600" dirty="0"/>
+            </a:br>
+            <a:r>
+              <a:rPr lang="en-US" sz="1800" dirty="0"/>
+              <a:t> </a:t>
+            </a:r>
+            <a:r>
+              <a:rPr lang="en-US" sz="1800" b="1" dirty="0"/>
+              <a:t>NUTAN COLLEGE OF ENGINEERING AND RESEARCH </a:t>
+            </a:r>
+            <a:br>
+              <a:rPr lang="en-US" sz="1800" dirty="0"/>
+            </a:br>
+            <a:r>
+              <a:rPr lang="en-US" sz="1600" dirty="0"/>
+              <a:t>Under Administrative Support of </a:t>
+            </a:r>
+            <a:r>
+              <a:rPr lang="en-US" sz="1600" dirty="0" err="1"/>
+              <a:t>Pimpri</a:t>
+            </a:r>
+            <a:r>
+              <a:rPr lang="en-US" sz="1600" dirty="0"/>
+              <a:t> </a:t>
+            </a:r>
+            <a:r>
+              <a:rPr lang="en-US" sz="1600" dirty="0" err="1"/>
+              <a:t>Chinchwad</a:t>
+            </a:r>
+            <a:r>
+              <a:rPr lang="en-US" sz="1600" dirty="0"/>
+              <a:t>  Education Trust </a:t>
+            </a:r>
+            <a:br>
+              <a:rPr lang="en-US" sz="1600" dirty="0"/>
+            </a:br>
+            <a:r>
+              <a:rPr lang="en-US" sz="1600" dirty="0"/>
+              <a:t>ISO 21001:2018 EOMS Certified </a:t>
+            </a:r>
+            <a:r>
+              <a:rPr lang="en-US" sz="1200" dirty="0"/>
+              <a:t>	</a:t>
+            </a:r>
+            <a:br>
+              <a:rPr lang="en-US" sz="1200" dirty="0"/>
+            </a:br>
+            <a:endParaRPr lang="en-US" sz="1400" dirty="0"/>
+          </a:p>
+        </p:txBody>
+      </p:sp>
+      <p:pic>
+        <p:nvPicPr>
+          <p:cNvPr id="2097159" name="Picture 6">
+            <a:extLst>
+              <a:ext uri="{FF2B5EF4-FFF2-40B4-BE49-F238E27FC236}">
+                <a16:creationId xmlns:a16="http://schemas.microsoft.com/office/drawing/2014/main" id="{CAE54825-C204-7F36-98DB-250D51EDEA96}"/>
+              </a:ext>
+            </a:extLst>
+          </p:cNvPr>
+          <p:cNvPicPr>
+            <a:picLocks noChangeAspect="1" noChangeArrowheads="1"/>
+          </p:cNvPicPr>
+          <p:nvPr/>
+        </p:nvPicPr>
+        <p:blipFill>
+          <a:blip r:embed="rId3" cstate="print">
+            <a:extLst>
+              <a:ext uri="{28A0092B-C50C-407E-A947-70E740481C1C}">
+                <a14:useLocalDpi xmlns:a14="http://schemas.microsoft.com/office/drawing/2010/main" val="0"/>
+              </a:ext>
+            </a:extLst>
+          </a:blip>
+          <a:stretch>
+            <a:fillRect/>
+          </a:stretch>
+        </p:blipFill>
+        <p:spPr bwMode="auto">
+          <a:xfrm>
+            <a:off x="467544" y="19232"/>
+            <a:ext cx="1202454" cy="1033504"/>
+          </a:xfrm>
+          <a:prstGeom prst="rect">
+            <a:avLst/>
+          </a:prstGeom>
+          <a:noFill/>
+          <a:ln w="9525">
+            <a:noFill/>
+            <a:miter lim="800000"/>
+            <a:headEnd/>
+            <a:tailEnd/>
+          </a:ln>
+        </p:spPr>
+      </p:pic>
+      <p:sp>
+        <p:nvSpPr>
+          <p:cNvPr id="1048601" name="TextBox 7">
+            <a:extLst>
+              <a:ext uri="{FF2B5EF4-FFF2-40B4-BE49-F238E27FC236}">
+                <a16:creationId xmlns:a16="http://schemas.microsoft.com/office/drawing/2014/main" id="{1810DE3A-A0C0-8AA3-B6FD-1B8D163DA1ED}"/>
+              </a:ext>
+            </a:extLst>
+          </p:cNvPr>
+          <p:cNvSpPr txBox="1">
+            <a:spLocks noChangeArrowheads="1"/>
+          </p:cNvSpPr>
+          <p:nvPr/>
+        </p:nvSpPr>
+        <p:spPr bwMode="auto">
+          <a:xfrm>
+            <a:off x="36512" y="1052736"/>
+            <a:ext cx="9144000" cy="338554"/>
+          </a:xfrm>
+          <a:prstGeom prst="rect">
+            <a:avLst/>
+          </a:prstGeom>
+          <a:solidFill>
+            <a:srgbClr val="FFC000"/>
+          </a:solidFill>
+          <a:ln w="9525">
+            <a:noFill/>
+            <a:miter lim="800000"/>
+          </a:ln>
+        </p:spPr>
+        <p:txBody>
+          <a:bodyPr wrap="square">
+            <a:spAutoFit/>
+          </a:bodyPr>
+          <a:lstStyle/>
+          <a:p>
+            <a:pPr algn="ctr"/>
+            <a:r>
+              <a:rPr lang="en-US" sz="1600" b="1" dirty="0">
+                <a:latin typeface="Times New Roman" panose="02020603050405020304" pitchFamily="18" charset="0"/>
+                <a:cs typeface="Times New Roman" panose="02020603050405020304" pitchFamily="18" charset="0"/>
+              </a:rPr>
+              <a:t>Review - IV</a:t>
+            </a:r>
+            <a:endParaRPr lang="en-IN" sz="1600" b="1" dirty="0">
+              <a:latin typeface="Times New Roman" panose="02020603050405020304" pitchFamily="18" charset="0"/>
+              <a:cs typeface="Times New Roman" panose="02020603050405020304" pitchFamily="18" charset="0"/>
+            </a:endParaRPr>
+          </a:p>
+        </p:txBody>
+      </p:sp>
+      <p:sp>
+        <p:nvSpPr>
+          <p:cNvPr id="2" name="Slide Number Placeholder 1">
+            <a:extLst>
+              <a:ext uri="{FF2B5EF4-FFF2-40B4-BE49-F238E27FC236}">
+                <a16:creationId xmlns:a16="http://schemas.microsoft.com/office/drawing/2014/main" id="{2989BA9C-9F15-2815-1614-00B81C306D5F}"/>
+              </a:ext>
+            </a:extLst>
+          </p:cNvPr>
+          <p:cNvSpPr>
+            <a:spLocks noGrp="1"/>
+          </p:cNvSpPr>
+          <p:nvPr>
+            <p:ph type="sldNum" sz="quarter" idx="12"/>
+          </p:nvPr>
+        </p:nvSpPr>
+        <p:spPr/>
+        <p:txBody>
+          <a:bodyPr/>
+          <a:lstStyle/>
+          <a:p>
+            <a:fld id="{1EC248AB-E565-412B-9D95-9B07D6A4F3F3}" type="slidenum">
+              <a:rPr lang="en-GB" b="1" smtClean="0">
+                <a:solidFill>
+                  <a:schemeClr val="tx1"/>
+                </a:solidFill>
+              </a:rPr>
+              <a:pPr/>
+              <a:t>14</a:t>
+            </a:fld>
+            <a:endParaRPr lang="en-GB" b="1" dirty="0">
+              <a:solidFill>
+                <a:schemeClr val="tx1"/>
+              </a:solidFill>
+            </a:endParaRPr>
+          </a:p>
+        </p:txBody>
+      </p:sp>
+      <p:pic>
+        <p:nvPicPr>
+          <p:cNvPr id="1027" name="Picture 3" descr="C:\Users\admin\Desktop\download.png">
+            <a:extLst>
+              <a:ext uri="{FF2B5EF4-FFF2-40B4-BE49-F238E27FC236}">
+                <a16:creationId xmlns:a16="http://schemas.microsoft.com/office/drawing/2014/main" id="{2322FFBA-C2A8-D34C-3D6B-291347D87E75}"/>
+              </a:ext>
+            </a:extLst>
+          </p:cNvPr>
+          <p:cNvPicPr>
+            <a:picLocks noChangeAspect="1" noChangeArrowheads="1"/>
+          </p:cNvPicPr>
+          <p:nvPr/>
+        </p:nvPicPr>
+        <p:blipFill>
+          <a:blip r:embed="rId4">
+            <a:extLst>
+              <a:ext uri="{28A0092B-C50C-407E-A947-70E740481C1C}">
+                <a14:useLocalDpi xmlns:a14="http://schemas.microsoft.com/office/drawing/2010/main" val="0"/>
+              </a:ext>
+            </a:extLst>
+          </a:blip>
+          <a:srcRect/>
+          <a:stretch>
+            <a:fillRect/>
+          </a:stretch>
+        </p:blipFill>
+        <p:spPr bwMode="auto">
+          <a:xfrm>
+            <a:off x="7452320" y="44624"/>
+            <a:ext cx="1207008" cy="1033505"/>
+          </a:xfrm>
+          <a:prstGeom prst="rect">
+            <a:avLst/>
+          </a:prstGeom>
+          <a:noFill/>
+          <a:extLst>
+            <a:ext uri="{909E8E84-426E-40DD-AFC4-6F175D3DCCD1}">
+              <a14:hiddenFill xmlns:a14="http://schemas.microsoft.com/office/drawing/2010/main">
+                <a:solidFill>
+                  <a:srgbClr val="FFFFFF"/>
+                </a:solidFill>
+              </a14:hiddenFill>
+            </a:ext>
+          </a:extLst>
+        </p:spPr>
+      </p:pic>
+      <p:sp>
+        <p:nvSpPr>
+          <p:cNvPr id="3" name="Rectangle 2">
+            <a:extLst>
+              <a:ext uri="{FF2B5EF4-FFF2-40B4-BE49-F238E27FC236}">
+                <a16:creationId xmlns:a16="http://schemas.microsoft.com/office/drawing/2014/main" id="{28EC4E97-98FC-D236-99D8-7EB2255B6777}"/>
+              </a:ext>
+            </a:extLst>
+          </p:cNvPr>
+          <p:cNvSpPr/>
+          <p:nvPr/>
+        </p:nvSpPr>
+        <p:spPr>
+          <a:xfrm>
+            <a:off x="59285" y="1582511"/>
+            <a:ext cx="9084715" cy="584775"/>
+          </a:xfrm>
+          <a:prstGeom prst="rect">
+            <a:avLst/>
+          </a:prstGeom>
+        </p:spPr>
+        <p:txBody>
+          <a:bodyPr wrap="square">
+            <a:spAutoFit/>
+          </a:bodyPr>
+          <a:lstStyle/>
+          <a:p>
+            <a:pPr lvl="0" algn="ctr" eaLnBrk="0" fontAlgn="base" hangingPunct="0">
+              <a:spcBef>
+                <a:spcPct val="0"/>
+              </a:spcBef>
+              <a:spcAft>
+                <a:spcPct val="0"/>
+              </a:spcAft>
+            </a:pPr>
+            <a:r>
+              <a:rPr lang="en-US" altLang="en-US" sz="3200" b="1" dirty="0">
+                <a:latin typeface="Times New Roman" panose="02020603050405020304" pitchFamily="18" charset="0"/>
+                <a:cs typeface="Times New Roman" panose="02020603050405020304" pitchFamily="18" charset="0"/>
+              </a:rPr>
+              <a:t>Implementation of Work / Result</a:t>
+            </a:r>
+          </a:p>
+        </p:txBody>
+      </p:sp>
+      <p:pic>
+        <p:nvPicPr>
           <p:cNvPr id="6" name="Picture 5">
             <a:extLst>
               <a:ext uri="{FF2B5EF4-FFF2-40B4-BE49-F238E27FC236}">
@@ -7957,54 +9608,69 @@
         </p:blipFill>
         <p:spPr>
           <a:xfrm>
-            <a:off x="4355976" y="2258412"/>
-            <a:ext cx="4788024" cy="3906892"/>
+            <a:off x="702332" y="2308372"/>
+            <a:ext cx="7812360" cy="3906892"/>
           </a:xfrm>
           <a:prstGeom prst="rect">
             <a:avLst/>
           </a:prstGeom>
         </p:spPr>
       </p:pic>
-      <p:pic>
-        <p:nvPicPr>
-          <p:cNvPr id="9" name="Picture 8">
+      <p:sp>
+        <p:nvSpPr>
+          <p:cNvPr id="4" name="TextBox 7">
             <a:extLst>
               <a:ext uri="{FF2B5EF4-FFF2-40B4-BE49-F238E27FC236}">
-                <a16:creationId xmlns:a16="http://schemas.microsoft.com/office/drawing/2014/main" id="{0A1720EB-6911-5434-047C-F005D26B6BE4}"/>
+                <a16:creationId xmlns:a16="http://schemas.microsoft.com/office/drawing/2014/main" id="{B19B5DC8-54FA-F35B-21CE-8BB76DCD85C7}"/>
               </a:ext>
             </a:extLst>
           </p:cNvPr>
-          <p:cNvPicPr>
-            <a:picLocks noChangeAspect="1"/>
-          </p:cNvPicPr>
+          <p:cNvSpPr txBox="1">
+            <a:spLocks noChangeArrowheads="1"/>
+          </p:cNvSpPr>
           <p:nvPr/>
-        </p:nvPicPr>
-        <p:blipFill>
-          <a:blip r:embed="rId6">
-            <a:extLst>
-              <a:ext uri="{28A0092B-C50C-407E-A947-70E740481C1C}">
-                <a14:useLocalDpi xmlns:a14="http://schemas.microsoft.com/office/drawing/2010/main" val="0"/>
-              </a:ext>
-            </a:extLst>
-          </a:blip>
-          <a:stretch>
-            <a:fillRect/>
-          </a:stretch>
-        </p:blipFill>
-        <p:spPr>
+        </p:nvSpPr>
+        <p:spPr bwMode="auto">
           <a:xfrm>
-            <a:off x="107505" y="2210679"/>
-            <a:ext cx="4104456" cy="4026633"/>
+            <a:off x="0" y="1052736"/>
+            <a:ext cx="9180512" cy="338554"/>
           </a:xfrm>
           <a:prstGeom prst="rect">
             <a:avLst/>
           </a:prstGeom>
+          <a:solidFill>
+            <a:srgbClr val="FFC000"/>
+          </a:solidFill>
+          <a:ln w="9525">
+            <a:noFill/>
+            <a:miter lim="800000"/>
+          </a:ln>
         </p:spPr>
-      </p:pic>
+        <p:txBody>
+          <a:bodyPr wrap="square">
+            <a:spAutoFit/>
+          </a:bodyPr>
+          <a:lstStyle/>
+          <a:p>
+            <a:pPr algn="ctr"/>
+            <a:r>
+              <a:rPr lang="en-US" sz="1600" b="1" dirty="0">
+                <a:latin typeface="Times New Roman" panose="02020603050405020304" pitchFamily="18" charset="0"/>
+                <a:cs typeface="Times New Roman" panose="02020603050405020304" pitchFamily="18" charset="0"/>
+              </a:rPr>
+              <a:t>Final Presentation</a:t>
+            </a:r>
+            <a:endParaRPr lang="en-IN" sz="1600" b="1" dirty="0">
+              <a:latin typeface="Times New Roman" panose="02020603050405020304" pitchFamily="18" charset="0"/>
+              <a:cs typeface="Times New Roman" panose="02020603050405020304" pitchFamily="18" charset="0"/>
+            </a:endParaRPr>
+          </a:p>
+        </p:txBody>
+      </p:sp>
     </p:spTree>
     <p:extLst>
       <p:ext uri="{BB962C8B-B14F-4D97-AF65-F5344CB8AC3E}">
-        <p14:creationId xmlns:p14="http://schemas.microsoft.com/office/powerpoint/2010/main" val="4214793627"/>
+        <p14:creationId xmlns:p14="http://schemas.microsoft.com/office/powerpoint/2010/main" val="2254589314"/>
       </p:ext>
     </p:extLst>
   </p:cSld>
@@ -8014,7 +9680,7 @@
 </p:sld>
 </file>
 
-<file path=ppt/slides/slide13.xml><?xml version="1.0" encoding="utf-8"?>
+<file path=ppt/slides/slide15.xml><?xml version="1.0" encoding="utf-8"?>
 <p:sld xmlns:a="http://schemas.openxmlformats.org/drawingml/2006/main" xmlns:r="http://schemas.openxmlformats.org/officeDocument/2006/relationships" xmlns:p="http://schemas.openxmlformats.org/presentationml/2006/main">
   <p:cSld>
     <p:spTree>
@@ -8277,7 +9943,7 @@
                 </a:solidFill>
               </a:rPr>
               <a:pPr/>
-              <a:t>13</a:t>
+              <a:t>15</a:t>
             </a:fld>
             <a:endParaRPr lang="en-GB" b="1" dirty="0">
               <a:solidFill>
@@ -8336,44 +10002,6 @@
       </p:pic>
       <p:sp>
         <p:nvSpPr>
-          <p:cNvPr id="3" name="Rectangle 2">
-            <a:extLst>
-              <a:ext uri="{FF2B5EF4-FFF2-40B4-BE49-F238E27FC236}">
-                <a16:creationId xmlns:a16="http://schemas.microsoft.com/office/drawing/2014/main" id="{CF91F948-9D4F-DBFC-7A3D-D4B513A0E898}"/>
-              </a:ext>
-            </a:extLst>
-          </p:cNvPr>
-          <p:cNvSpPr/>
-          <p:nvPr/>
-        </p:nvSpPr>
-        <p:spPr>
-          <a:xfrm>
-            <a:off x="59285" y="1582511"/>
-            <a:ext cx="9084715" cy="584775"/>
-          </a:xfrm>
-          <a:prstGeom prst="rect">
-            <a:avLst/>
-          </a:prstGeom>
-        </p:spPr>
-        <p:txBody>
-          <a:bodyPr wrap="square">
-            <a:spAutoFit/>
-          </a:bodyPr>
-          <a:lstStyle/>
-          <a:p>
-            <a:pPr algn="ctr">
-              <a:buNone/>
-            </a:pPr>
-            <a:r>
-              <a:rPr lang="en-US" sz="3200" b="1" dirty="0"/>
-              <a:t>Conclusion </a:t>
-            </a:r>
-            <a:endParaRPr lang="en-US" sz="3200" dirty="0"/>
-          </a:p>
-        </p:txBody>
-      </p:sp>
-      <p:sp>
-        <p:nvSpPr>
           <p:cNvPr id="6" name="TextBox 5">
             <a:extLst>
               <a:ext uri="{FF2B5EF4-FFF2-40B4-BE49-F238E27FC236}">
@@ -8386,8 +10014,8 @@
         </p:nvSpPr>
         <p:spPr>
           <a:xfrm>
-            <a:off x="324036" y="2767280"/>
-            <a:ext cx="8568952" cy="1938992"/>
+            <a:off x="324036" y="1700808"/>
+            <a:ext cx="8280412" cy="4524315"/>
           </a:xfrm>
           <a:prstGeom prst="rect">
             <a:avLst/>
@@ -8400,27 +10028,202 @@
           </a:bodyPr>
           <a:lstStyle/>
           <a:p>
-            <a:pPr marL="285750" indent="-285750" algn="just">
+            <a:r>
+              <a:rPr lang="en-IN" dirty="0"/>
+              <a:t>Title: Database Design (</a:t>
+            </a:r>
+            <a:r>
+              <a:rPr lang="en-IN" dirty="0" err="1"/>
+              <a:t>Supabase</a:t>
+            </a:r>
+            <a:r>
+              <a:rPr lang="en-IN" dirty="0"/>
+              <a:t> PostgreSQL)</a:t>
+            </a:r>
+          </a:p>
+          <a:p>
+            <a:endParaRPr lang="en-IN" dirty="0"/>
+          </a:p>
+          <a:p>
+            <a:r>
+              <a:rPr lang="en-IN" b="1" dirty="0"/>
+              <a:t>Tables</a:t>
+            </a:r>
+            <a:r>
+              <a:rPr lang="en-IN" dirty="0"/>
+              <a:t>:</a:t>
+            </a:r>
+          </a:p>
+          <a:p>
+            <a:endParaRPr lang="en-IN" dirty="0"/>
+          </a:p>
+          <a:p>
+            <a:endParaRPr lang="en-IN" dirty="0"/>
+          </a:p>
+          <a:p>
+            <a:endParaRPr lang="en-IN" dirty="0"/>
+          </a:p>
+          <a:p>
+            <a:endParaRPr lang="en-IN" dirty="0"/>
+          </a:p>
+          <a:p>
+            <a:endParaRPr lang="en-IN" dirty="0"/>
+          </a:p>
+          <a:p>
+            <a:endParaRPr lang="en-IN" dirty="0"/>
+          </a:p>
+          <a:p>
+            <a:endParaRPr lang="en-IN" dirty="0"/>
+          </a:p>
+          <a:p>
+            <a:endParaRPr lang="en-IN" dirty="0"/>
+          </a:p>
+          <a:p>
+            <a:r>
+              <a:rPr lang="en-IN" b="1" dirty="0"/>
+              <a:t>Security Features:</a:t>
+            </a:r>
+          </a:p>
+          <a:p>
+            <a:pPr marL="285750" indent="-285750">
               <a:buFont typeface="Arial" panose="020B0604020202020204" pitchFamily="34" charset="0"/>
               <a:buChar char="•"/>
             </a:pPr>
             <a:r>
-              <a:rPr lang="en-US" sz="2000" dirty="0"/>
-              <a:t>We successfully engineered a production-ready Legal AI platform capable of parsing unstructured PDFs, dynamically updating historical laws (IPC to BNS), and predicting appellate outcomes with 85.2% accuracy.</a:t>
-            </a:r>
-          </a:p>
-          <a:p>
-            <a:pPr marL="285750" indent="-285750" algn="just">
+              <a:rPr lang="en-IN" dirty="0"/>
+              <a:t>Row Level Security (RLS) enabled on all tables</a:t>
+            </a:r>
+          </a:p>
+          <a:p>
+            <a:pPr marL="285750" indent="-285750">
               <a:buFont typeface="Arial" panose="020B0604020202020204" pitchFamily="34" charset="0"/>
               <a:buChar char="•"/>
             </a:pPr>
             <a:r>
-              <a:rPr lang="en-US" sz="2000" dirty="0"/>
-              <a:t>By integrating NER-filtered Explainable AI (SHAP) and deploying it on a secure cloud architecture, we transformed a theoretical deep learning model into a practical, highly transparent decision-support tool for Indian lawyers.</a:t>
-            </a:r>
-          </a:p>
-        </p:txBody>
-      </p:sp>
+              <a:rPr lang="en-IN" dirty="0"/>
+              <a:t>Auto-profile creation via PostgreSQL trigger on user signup</a:t>
+            </a:r>
+          </a:p>
+          <a:p>
+            <a:pPr marL="285750" indent="-285750">
+              <a:buFont typeface="Arial" panose="020B0604020202020204" pitchFamily="34" charset="0"/>
+              <a:buChar char="•"/>
+            </a:pPr>
+            <a:r>
+              <a:rPr lang="en-IN" dirty="0"/>
+              <a:t>Performance indexes on </a:t>
+            </a:r>
+            <a:r>
+              <a:rPr lang="en-IN" dirty="0" err="1"/>
+              <a:t>user_email</a:t>
+            </a:r>
+            <a:r>
+              <a:rPr lang="en-IN" dirty="0"/>
+              <a:t> and </a:t>
+            </a:r>
+            <a:r>
+              <a:rPr lang="en-IN" dirty="0" err="1"/>
+              <a:t>case_category</a:t>
+            </a:r>
+            <a:endParaRPr lang="en-IN" dirty="0"/>
+          </a:p>
+          <a:p>
+            <a:pPr marL="285750" indent="-285750">
+              <a:buFont typeface="Arial" panose="020B0604020202020204" pitchFamily="34" charset="0"/>
+              <a:buChar char="•"/>
+            </a:pPr>
+            <a:r>
+              <a:rPr lang="en-IN" dirty="0" err="1"/>
+              <a:t>Supabase</a:t>
+            </a:r>
+            <a:r>
+              <a:rPr lang="en-IN" dirty="0"/>
+              <a:t> Auth for encrypted authentication</a:t>
+            </a:r>
+          </a:p>
+        </p:txBody>
+      </p:sp>
+      <p:sp>
+        <p:nvSpPr>
+          <p:cNvPr id="4" name="TextBox 7">
+            <a:extLst>
+              <a:ext uri="{FF2B5EF4-FFF2-40B4-BE49-F238E27FC236}">
+                <a16:creationId xmlns:a16="http://schemas.microsoft.com/office/drawing/2014/main" id="{6C9536DB-0161-234F-78D3-178862FFCDB5}"/>
+              </a:ext>
+            </a:extLst>
+          </p:cNvPr>
+          <p:cNvSpPr txBox="1">
+            <a:spLocks noChangeArrowheads="1"/>
+          </p:cNvSpPr>
+          <p:nvPr/>
+        </p:nvSpPr>
+        <p:spPr bwMode="auto">
+          <a:xfrm>
+            <a:off x="0" y="1052736"/>
+            <a:ext cx="9180512" cy="338554"/>
+          </a:xfrm>
+          <a:prstGeom prst="rect">
+            <a:avLst/>
+          </a:prstGeom>
+          <a:solidFill>
+            <a:srgbClr val="FFC000"/>
+          </a:solidFill>
+          <a:ln w="9525">
+            <a:noFill/>
+            <a:miter lim="800000"/>
+          </a:ln>
+        </p:spPr>
+        <p:txBody>
+          <a:bodyPr wrap="square">
+            <a:spAutoFit/>
+          </a:bodyPr>
+          <a:lstStyle/>
+          <a:p>
+            <a:pPr algn="ctr"/>
+            <a:r>
+              <a:rPr lang="en-US" sz="1600" b="1" dirty="0">
+                <a:latin typeface="Times New Roman" panose="02020603050405020304" pitchFamily="18" charset="0"/>
+                <a:cs typeface="Times New Roman" panose="02020603050405020304" pitchFamily="18" charset="0"/>
+              </a:rPr>
+              <a:t>Final Presentation</a:t>
+            </a:r>
+            <a:endParaRPr lang="en-IN" sz="1600" b="1" dirty="0">
+              <a:latin typeface="Times New Roman" panose="02020603050405020304" pitchFamily="18" charset="0"/>
+              <a:cs typeface="Times New Roman" panose="02020603050405020304" pitchFamily="18" charset="0"/>
+            </a:endParaRPr>
+          </a:p>
+        </p:txBody>
+      </p:sp>
+      <p:pic>
+        <p:nvPicPr>
+          <p:cNvPr id="10" name="Picture 9">
+            <a:extLst>
+              <a:ext uri="{FF2B5EF4-FFF2-40B4-BE49-F238E27FC236}">
+                <a16:creationId xmlns:a16="http://schemas.microsoft.com/office/drawing/2014/main" id="{A0628C5A-F52D-DA5B-2EDB-18AF24218F20}"/>
+              </a:ext>
+            </a:extLst>
+          </p:cNvPr>
+          <p:cNvPicPr>
+            <a:picLocks noChangeAspect="1"/>
+          </p:cNvPicPr>
+          <p:nvPr/>
+        </p:nvPicPr>
+        <p:blipFill>
+          <a:blip r:embed="rId5"/>
+          <a:stretch>
+            <a:fillRect/>
+          </a:stretch>
+        </p:blipFill>
+        <p:spPr>
+          <a:xfrm>
+            <a:off x="539552" y="2564904"/>
+            <a:ext cx="8119776" cy="2043938"/>
+          </a:xfrm>
+          <a:prstGeom prst="rect">
+            <a:avLst/>
+          </a:prstGeom>
+        </p:spPr>
+      </p:pic>
     </p:spTree>
     <p:extLst>
       <p:ext uri="{BB962C8B-B14F-4D97-AF65-F5344CB8AC3E}">
@@ -8434,7 +10237,563 @@
 </p:sld>
 </file>
 
-<file path=ppt/slides/slide14.xml><?xml version="1.0" encoding="utf-8"?>
+<file path=ppt/slides/slide16.xml><?xml version="1.0" encoding="utf-8"?>
+<p:sld xmlns:a="http://schemas.openxmlformats.org/drawingml/2006/main" xmlns:r="http://schemas.openxmlformats.org/officeDocument/2006/relationships" xmlns:p="http://schemas.openxmlformats.org/presentationml/2006/main">
+  <p:cSld>
+    <p:spTree>
+      <p:nvGrpSpPr>
+        <p:cNvPr id="1" name="">
+          <a:extLst>
+            <a:ext uri="{FF2B5EF4-FFF2-40B4-BE49-F238E27FC236}">
+              <a16:creationId xmlns:a16="http://schemas.microsoft.com/office/drawing/2014/main" id="{DEFBD47A-408D-665D-9F47-4E4C5886C350}"/>
+            </a:ext>
+          </a:extLst>
+        </p:cNvPr>
+        <p:cNvGrpSpPr/>
+        <p:nvPr/>
+      </p:nvGrpSpPr>
+      <p:grpSpPr>
+        <a:xfrm>
+          <a:off x="0" y="0"/>
+          <a:ext cx="0" cy="0"/>
+          <a:chOff x="0" y="0"/>
+          <a:chExt cx="0" cy="0"/>
+        </a:xfrm>
+      </p:grpSpPr>
+      <p:sp>
+        <p:nvSpPr>
+          <p:cNvPr id="1048598" name="Rectangle 5">
+            <a:extLst>
+              <a:ext uri="{FF2B5EF4-FFF2-40B4-BE49-F238E27FC236}">
+                <a16:creationId xmlns:a16="http://schemas.microsoft.com/office/drawing/2014/main" id="{D69C3D97-D2A4-714E-C8C1-D0C6AE343BE8}"/>
+              </a:ext>
+            </a:extLst>
+          </p:cNvPr>
+          <p:cNvSpPr>
+            <a:spLocks noGrp="1" noChangeArrowheads="1"/>
+          </p:cNvSpPr>
+          <p:nvPr>
+            <p:ph type="ctrTitle"/>
+          </p:nvPr>
+        </p:nvSpPr>
+        <p:spPr>
+          <a:xfrm>
+            <a:off x="1043608" y="160813"/>
+            <a:ext cx="6984776" cy="1035939"/>
+          </a:xfrm>
+          <a:solidFill>
+            <a:schemeClr val="bg1"/>
+          </a:solidFill>
+          <a:effectLst>
+            <a:outerShdw dist="35921" dir="2700000" algn="ctr" rotWithShape="0">
+              <a:schemeClr val="accent1">
+                <a:alpha val="50000"/>
+              </a:schemeClr>
+            </a:outerShdw>
+          </a:effectLst>
+        </p:spPr>
+        <p:txBody>
+          <a:bodyPr>
+            <a:noAutofit/>
+          </a:bodyPr>
+          <a:lstStyle/>
+          <a:p>
+            <a:r>
+              <a:rPr lang="en-US" sz="1600" dirty="0"/>
+              <a:t>Nutan Maharashtra </a:t>
+            </a:r>
+            <a:r>
+              <a:rPr lang="en-US" sz="1600" dirty="0" err="1"/>
+              <a:t>Vidya</a:t>
+            </a:r>
+            <a:r>
+              <a:rPr lang="en-US" sz="1600" dirty="0"/>
+              <a:t> </a:t>
+            </a:r>
+            <a:r>
+              <a:rPr lang="en-US" sz="1600" dirty="0" err="1"/>
+              <a:t>Prasarak</a:t>
+            </a:r>
+            <a:r>
+              <a:rPr lang="en-US" sz="1600" dirty="0"/>
+              <a:t> </a:t>
+            </a:r>
+            <a:r>
+              <a:rPr lang="en-US" sz="1600" dirty="0" err="1"/>
+              <a:t>Mandal’s</a:t>
+            </a:r>
+            <a:r>
+              <a:rPr lang="en-US" sz="1600" dirty="0"/>
+              <a:t> </a:t>
+            </a:r>
+            <a:br>
+              <a:rPr lang="en-US" sz="1600" dirty="0"/>
+            </a:br>
+            <a:r>
+              <a:rPr lang="en-US" sz="1800" dirty="0"/>
+              <a:t> </a:t>
+            </a:r>
+            <a:r>
+              <a:rPr lang="en-US" sz="1800" b="1" dirty="0"/>
+              <a:t>NUTAN COLLEGE OF ENGINEERING AND RESEARCH </a:t>
+            </a:r>
+            <a:br>
+              <a:rPr lang="en-US" sz="1800" dirty="0"/>
+            </a:br>
+            <a:r>
+              <a:rPr lang="en-US" sz="1600" dirty="0"/>
+              <a:t>Under Administrative Support of </a:t>
+            </a:r>
+            <a:r>
+              <a:rPr lang="en-US" sz="1600" dirty="0" err="1"/>
+              <a:t>Pimpri</a:t>
+            </a:r>
+            <a:r>
+              <a:rPr lang="en-US" sz="1600" dirty="0"/>
+              <a:t> </a:t>
+            </a:r>
+            <a:r>
+              <a:rPr lang="en-US" sz="1600" dirty="0" err="1"/>
+              <a:t>Chinchwad</a:t>
+            </a:r>
+            <a:r>
+              <a:rPr lang="en-US" sz="1600" dirty="0"/>
+              <a:t>  Education Trust </a:t>
+            </a:r>
+            <a:br>
+              <a:rPr lang="en-US" sz="1600" dirty="0"/>
+            </a:br>
+            <a:r>
+              <a:rPr lang="en-US" sz="1600" dirty="0"/>
+              <a:t>ISO 21001:2018 EOMS Certified </a:t>
+            </a:r>
+            <a:r>
+              <a:rPr lang="en-US" sz="1200" dirty="0"/>
+              <a:t>	</a:t>
+            </a:r>
+            <a:br>
+              <a:rPr lang="en-US" sz="1200" dirty="0"/>
+            </a:br>
+            <a:endParaRPr lang="en-US" sz="1400" dirty="0"/>
+          </a:p>
+        </p:txBody>
+      </p:sp>
+      <p:pic>
+        <p:nvPicPr>
+          <p:cNvPr id="2097159" name="Picture 6">
+            <a:extLst>
+              <a:ext uri="{FF2B5EF4-FFF2-40B4-BE49-F238E27FC236}">
+                <a16:creationId xmlns:a16="http://schemas.microsoft.com/office/drawing/2014/main" id="{129E94AF-7266-C2F3-4AA8-C5ED0411E37E}"/>
+              </a:ext>
+            </a:extLst>
+          </p:cNvPr>
+          <p:cNvPicPr>
+            <a:picLocks noChangeAspect="1" noChangeArrowheads="1"/>
+          </p:cNvPicPr>
+          <p:nvPr/>
+        </p:nvPicPr>
+        <p:blipFill>
+          <a:blip r:embed="rId3" cstate="print">
+            <a:extLst>
+              <a:ext uri="{28A0092B-C50C-407E-A947-70E740481C1C}">
+                <a14:useLocalDpi xmlns:a14="http://schemas.microsoft.com/office/drawing/2010/main" val="0"/>
+              </a:ext>
+            </a:extLst>
+          </a:blip>
+          <a:stretch>
+            <a:fillRect/>
+          </a:stretch>
+        </p:blipFill>
+        <p:spPr bwMode="auto">
+          <a:xfrm>
+            <a:off x="467544" y="19232"/>
+            <a:ext cx="1202454" cy="1033504"/>
+          </a:xfrm>
+          <a:prstGeom prst="rect">
+            <a:avLst/>
+          </a:prstGeom>
+          <a:noFill/>
+          <a:ln w="9525">
+            <a:noFill/>
+            <a:miter lim="800000"/>
+            <a:headEnd/>
+            <a:tailEnd/>
+          </a:ln>
+        </p:spPr>
+      </p:pic>
+      <p:sp>
+        <p:nvSpPr>
+          <p:cNvPr id="1048601" name="TextBox 7">
+            <a:extLst>
+              <a:ext uri="{FF2B5EF4-FFF2-40B4-BE49-F238E27FC236}">
+                <a16:creationId xmlns:a16="http://schemas.microsoft.com/office/drawing/2014/main" id="{7F3C28B9-52E1-55E5-99C2-4B945C18B75E}"/>
+              </a:ext>
+            </a:extLst>
+          </p:cNvPr>
+          <p:cNvSpPr txBox="1">
+            <a:spLocks noChangeArrowheads="1"/>
+          </p:cNvSpPr>
+          <p:nvPr/>
+        </p:nvSpPr>
+        <p:spPr bwMode="auto">
+          <a:xfrm>
+            <a:off x="36512" y="1052736"/>
+            <a:ext cx="9144000" cy="338554"/>
+          </a:xfrm>
+          <a:prstGeom prst="rect">
+            <a:avLst/>
+          </a:prstGeom>
+          <a:solidFill>
+            <a:srgbClr val="FFC000"/>
+          </a:solidFill>
+          <a:ln w="9525">
+            <a:noFill/>
+            <a:miter lim="800000"/>
+          </a:ln>
+        </p:spPr>
+        <p:txBody>
+          <a:bodyPr wrap="square">
+            <a:spAutoFit/>
+          </a:bodyPr>
+          <a:lstStyle/>
+          <a:p>
+            <a:pPr algn="ctr"/>
+            <a:r>
+              <a:rPr lang="en-US" sz="1600" b="1" dirty="0">
+                <a:latin typeface="Times New Roman" panose="02020603050405020304" pitchFamily="18" charset="0"/>
+                <a:cs typeface="Times New Roman" panose="02020603050405020304" pitchFamily="18" charset="0"/>
+              </a:rPr>
+              <a:t>Review - IV</a:t>
+            </a:r>
+            <a:endParaRPr lang="en-IN" sz="1600" b="1" dirty="0">
+              <a:latin typeface="Times New Roman" panose="02020603050405020304" pitchFamily="18" charset="0"/>
+              <a:cs typeface="Times New Roman" panose="02020603050405020304" pitchFamily="18" charset="0"/>
+            </a:endParaRPr>
+          </a:p>
+        </p:txBody>
+      </p:sp>
+      <p:sp>
+        <p:nvSpPr>
+          <p:cNvPr id="2" name="Slide Number Placeholder 1">
+            <a:extLst>
+              <a:ext uri="{FF2B5EF4-FFF2-40B4-BE49-F238E27FC236}">
+                <a16:creationId xmlns:a16="http://schemas.microsoft.com/office/drawing/2014/main" id="{B0013C91-C715-46ED-0953-873E6197A829}"/>
+              </a:ext>
+            </a:extLst>
+          </p:cNvPr>
+          <p:cNvSpPr>
+            <a:spLocks noGrp="1"/>
+          </p:cNvSpPr>
+          <p:nvPr>
+            <p:ph type="sldNum" sz="quarter" idx="12"/>
+          </p:nvPr>
+        </p:nvSpPr>
+        <p:spPr/>
+        <p:txBody>
+          <a:bodyPr/>
+          <a:lstStyle/>
+          <a:p>
+            <a:fld id="{1EC248AB-E565-412B-9D95-9B07D6A4F3F3}" type="slidenum">
+              <a:rPr lang="en-GB" b="1" smtClean="0">
+                <a:solidFill>
+                  <a:schemeClr val="tx1"/>
+                </a:solidFill>
+              </a:rPr>
+              <a:pPr/>
+              <a:t>16</a:t>
+            </a:fld>
+            <a:endParaRPr lang="en-GB" b="1" dirty="0">
+              <a:solidFill>
+                <a:schemeClr val="tx1"/>
+              </a:solidFill>
+            </a:endParaRPr>
+          </a:p>
+        </p:txBody>
+      </p:sp>
+      <p:pic>
+        <p:nvPicPr>
+          <p:cNvPr id="1027" name="Picture 3" descr="C:\Users\admin\Desktop\download.png">
+            <a:extLst>
+              <a:ext uri="{FF2B5EF4-FFF2-40B4-BE49-F238E27FC236}">
+                <a16:creationId xmlns:a16="http://schemas.microsoft.com/office/drawing/2014/main" id="{ADD09C09-82E2-3C87-06CB-70875804E245}"/>
+              </a:ext>
+            </a:extLst>
+          </p:cNvPr>
+          <p:cNvPicPr>
+            <a:picLocks noChangeAspect="1" noChangeArrowheads="1"/>
+          </p:cNvPicPr>
+          <p:nvPr/>
+        </p:nvPicPr>
+        <p:blipFill>
+          <a:blip r:embed="rId4">
+            <a:extLst>
+              <a:ext uri="{28A0092B-C50C-407E-A947-70E740481C1C}">
+                <a14:useLocalDpi xmlns:a14="http://schemas.microsoft.com/office/drawing/2010/main" val="0"/>
+              </a:ext>
+            </a:extLst>
+          </a:blip>
+          <a:srcRect/>
+          <a:stretch>
+            <a:fillRect/>
+          </a:stretch>
+        </p:blipFill>
+        <p:spPr bwMode="auto">
+          <a:xfrm>
+            <a:off x="7452320" y="44624"/>
+            <a:ext cx="1207008" cy="1033505"/>
+          </a:xfrm>
+          <a:prstGeom prst="rect">
+            <a:avLst/>
+          </a:prstGeom>
+          <a:noFill/>
+          <a:extLst>
+            <a:ext uri="{909E8E84-426E-40DD-AFC4-6F175D3DCCD1}">
+              <a14:hiddenFill xmlns:a14="http://schemas.microsoft.com/office/drawing/2010/main">
+                <a:solidFill>
+                  <a:srgbClr val="FFFFFF"/>
+                </a:solidFill>
+              </a14:hiddenFill>
+            </a:ext>
+          </a:extLst>
+        </p:spPr>
+      </p:pic>
+      <p:sp>
+        <p:nvSpPr>
+          <p:cNvPr id="3" name="Rectangle 2">
+            <a:extLst>
+              <a:ext uri="{FF2B5EF4-FFF2-40B4-BE49-F238E27FC236}">
+                <a16:creationId xmlns:a16="http://schemas.microsoft.com/office/drawing/2014/main" id="{8A460DBC-8CF9-B5D8-14CD-4F45D46A8CA5}"/>
+              </a:ext>
+            </a:extLst>
+          </p:cNvPr>
+          <p:cNvSpPr/>
+          <p:nvPr/>
+        </p:nvSpPr>
+        <p:spPr>
+          <a:xfrm>
+            <a:off x="59285" y="1582511"/>
+            <a:ext cx="9084715" cy="584775"/>
+          </a:xfrm>
+          <a:prstGeom prst="rect">
+            <a:avLst/>
+          </a:prstGeom>
+        </p:spPr>
+        <p:txBody>
+          <a:bodyPr wrap="square">
+            <a:spAutoFit/>
+          </a:bodyPr>
+          <a:lstStyle/>
+          <a:p>
+            <a:pPr algn="ctr">
+              <a:buNone/>
+            </a:pPr>
+            <a:r>
+              <a:rPr lang="en-US" sz="3200" b="1" dirty="0"/>
+              <a:t>Conclusion </a:t>
+            </a:r>
+            <a:endParaRPr lang="en-US" sz="3200" dirty="0"/>
+          </a:p>
+        </p:txBody>
+      </p:sp>
+      <p:sp>
+        <p:nvSpPr>
+          <p:cNvPr id="6" name="TextBox 5">
+            <a:extLst>
+              <a:ext uri="{FF2B5EF4-FFF2-40B4-BE49-F238E27FC236}">
+                <a16:creationId xmlns:a16="http://schemas.microsoft.com/office/drawing/2014/main" id="{42B907E3-BBD1-8119-6EB5-123F1AC4ADA5}"/>
+              </a:ext>
+            </a:extLst>
+          </p:cNvPr>
+          <p:cNvSpPr txBox="1"/>
+          <p:nvPr/>
+        </p:nvSpPr>
+        <p:spPr>
+          <a:xfrm>
+            <a:off x="324036" y="2186275"/>
+            <a:ext cx="8568952" cy="4278094"/>
+          </a:xfrm>
+          <a:prstGeom prst="rect">
+            <a:avLst/>
+          </a:prstGeom>
+          <a:noFill/>
+        </p:spPr>
+        <p:txBody>
+          <a:bodyPr wrap="square">
+            <a:spAutoFit/>
+          </a:bodyPr>
+          <a:lstStyle/>
+          <a:p>
+            <a:pPr marL="285750" indent="-285750">
+              <a:buFont typeface="Arial" panose="020B0604020202020204" pitchFamily="34" charset="0"/>
+              <a:buChar char="•"/>
+            </a:pPr>
+            <a:r>
+              <a:rPr lang="en-IN" dirty="0"/>
+              <a:t>We successfully engineered a </a:t>
+            </a:r>
+            <a:r>
+              <a:rPr lang="en-IN" b="1" dirty="0"/>
+              <a:t>production-ready Legal AI platform</a:t>
+            </a:r>
+            <a:r>
+              <a:rPr lang="en-IN" dirty="0"/>
+              <a:t> that parses unstructured court judgment PDFs, preprocesses them through a custom NLP pipeline, and predicts appellate outcomes with </a:t>
+            </a:r>
+            <a:r>
+              <a:rPr lang="en-IN" b="1" dirty="0"/>
+              <a:t>85.2% accuracy</a:t>
+            </a:r>
+            <a:r>
+              <a:rPr lang="en-IN" dirty="0"/>
+              <a:t> using fine-tuned InLegalBERT.</a:t>
+            </a:r>
+          </a:p>
+          <a:p>
+            <a:pPr marL="285750" indent="-285750">
+              <a:buFont typeface="Arial" panose="020B0604020202020204" pitchFamily="34" charset="0"/>
+              <a:buChar char="•"/>
+            </a:pPr>
+            <a:r>
+              <a:rPr lang="en-IN" dirty="0"/>
+              <a:t>Our </a:t>
+            </a:r>
+            <a:r>
+              <a:rPr lang="en-IN" b="1" dirty="0"/>
+              <a:t>dual-model architecture</a:t>
+            </a:r>
+            <a:r>
+              <a:rPr lang="en-IN" dirty="0"/>
+              <a:t> (Module B for Jurisdiction, Module C for Outcome) provides comprehensive case analysis — classifying domain and forecasting decisions in a single workflow.</a:t>
+            </a:r>
+          </a:p>
+          <a:p>
+            <a:pPr marL="285750" indent="-285750">
+              <a:buFont typeface="Arial" panose="020B0604020202020204" pitchFamily="34" charset="0"/>
+              <a:buChar char="•"/>
+            </a:pPr>
+            <a:r>
+              <a:rPr lang="en-IN" dirty="0"/>
+              <a:t>The </a:t>
+            </a:r>
+            <a:r>
+              <a:rPr lang="en-IN" b="1" dirty="0"/>
+              <a:t>IPC-to-BNS translation engine</a:t>
+            </a:r>
+            <a:r>
+              <a:rPr lang="en-IN" dirty="0"/>
+              <a:t> with 80+ statutory mappings addresses a real, urgent need created by India's 2023 penal code transition — making it immediately useful for legal professionals.</a:t>
+            </a:r>
+          </a:p>
+          <a:p>
+            <a:pPr marL="285750" indent="-285750">
+              <a:buFont typeface="Arial" panose="020B0604020202020204" pitchFamily="34" charset="0"/>
+              <a:buChar char="•"/>
+            </a:pPr>
+            <a:r>
+              <a:rPr lang="en-IN" b="1" dirty="0"/>
+              <a:t>Role-based access control</a:t>
+            </a:r>
+            <a:r>
+              <a:rPr lang="en-IN" dirty="0"/>
+              <a:t> with </a:t>
+            </a:r>
+            <a:r>
+              <a:rPr lang="en-IN" dirty="0" err="1"/>
+              <a:t>Supabase</a:t>
+            </a:r>
+            <a:r>
+              <a:rPr lang="en-IN" dirty="0"/>
+              <a:t> authentication ensures that Students, Lawyers, Judges, and Admins each have a secure, tailored experience.</a:t>
+            </a:r>
+          </a:p>
+          <a:p>
+            <a:pPr marL="285750" indent="-285750">
+              <a:buFont typeface="Arial" panose="020B0604020202020204" pitchFamily="34" charset="0"/>
+              <a:buChar char="•"/>
+            </a:pPr>
+            <a:r>
+              <a:rPr lang="en-IN" dirty="0"/>
+              <a:t>The project demonstrates that </a:t>
+            </a:r>
+            <a:r>
+              <a:rPr lang="en-IN" b="1" dirty="0"/>
+              <a:t>domain-specific AI models</a:t>
+            </a:r>
+            <a:r>
+              <a:rPr lang="en-IN" dirty="0"/>
+              <a:t> (InLegalBERT) significantly outperform generic approaches (+23% over baseline), proving the value of specialized NLP in the legal domain.</a:t>
+            </a:r>
+          </a:p>
+          <a:p>
+            <a:endParaRPr lang="en-US" sz="2000" dirty="0"/>
+          </a:p>
+        </p:txBody>
+      </p:sp>
+      <p:sp>
+        <p:nvSpPr>
+          <p:cNvPr id="4" name="TextBox 7">
+            <a:extLst>
+              <a:ext uri="{FF2B5EF4-FFF2-40B4-BE49-F238E27FC236}">
+                <a16:creationId xmlns:a16="http://schemas.microsoft.com/office/drawing/2014/main" id="{1A4AEA44-CDAB-D638-DF22-984558C7255A}"/>
+              </a:ext>
+            </a:extLst>
+          </p:cNvPr>
+          <p:cNvSpPr txBox="1">
+            <a:spLocks noChangeArrowheads="1"/>
+          </p:cNvSpPr>
+          <p:nvPr/>
+        </p:nvSpPr>
+        <p:spPr bwMode="auto">
+          <a:xfrm>
+            <a:off x="0" y="1052736"/>
+            <a:ext cx="9180512" cy="338554"/>
+          </a:xfrm>
+          <a:prstGeom prst="rect">
+            <a:avLst/>
+          </a:prstGeom>
+          <a:solidFill>
+            <a:srgbClr val="FFC000"/>
+          </a:solidFill>
+          <a:ln w="9525">
+            <a:noFill/>
+            <a:miter lim="800000"/>
+          </a:ln>
+        </p:spPr>
+        <p:txBody>
+          <a:bodyPr wrap="square">
+            <a:spAutoFit/>
+          </a:bodyPr>
+          <a:lstStyle/>
+          <a:p>
+            <a:pPr algn="ctr"/>
+            <a:r>
+              <a:rPr lang="en-US" sz="1600" b="1" dirty="0">
+                <a:latin typeface="Times New Roman" panose="02020603050405020304" pitchFamily="18" charset="0"/>
+                <a:cs typeface="Times New Roman" panose="02020603050405020304" pitchFamily="18" charset="0"/>
+              </a:rPr>
+              <a:t>Final Presentation</a:t>
+            </a:r>
+            <a:endParaRPr lang="en-IN" sz="1600" b="1" dirty="0">
+              <a:latin typeface="Times New Roman" panose="02020603050405020304" pitchFamily="18" charset="0"/>
+              <a:cs typeface="Times New Roman" panose="02020603050405020304" pitchFamily="18" charset="0"/>
+            </a:endParaRPr>
+          </a:p>
+        </p:txBody>
+      </p:sp>
+    </p:spTree>
+    <p:extLst>
+      <p:ext uri="{BB962C8B-B14F-4D97-AF65-F5344CB8AC3E}">
+        <p14:creationId xmlns:p14="http://schemas.microsoft.com/office/powerpoint/2010/main" val="467726450"/>
+      </p:ext>
+    </p:extLst>
+  </p:cSld>
+  <p:clrMapOvr>
+    <a:masterClrMapping/>
+  </p:clrMapOvr>
+</p:sld>
+</file>
+
+<file path=ppt/slides/slide17.xml><?xml version="1.0" encoding="utf-8"?>
 <p:sld xmlns:a="http://schemas.openxmlformats.org/drawingml/2006/main" xmlns:r="http://schemas.openxmlformats.org/officeDocument/2006/relationships" xmlns:p="http://schemas.openxmlformats.org/presentationml/2006/main">
   <p:cSld>
     <p:spTree>
@@ -8697,7 +11056,7 @@
                 </a:solidFill>
               </a:rPr>
               <a:pPr/>
-              <a:t>14</a:t>
+              <a:t>17</a:t>
             </a:fld>
             <a:endParaRPr lang="en-GB" b="1" dirty="0">
               <a:solidFill>
@@ -8806,8 +11165,8 @@
         </p:nvSpPr>
         <p:spPr>
           <a:xfrm>
-            <a:off x="317166" y="2564904"/>
-            <a:ext cx="8568952" cy="2554545"/>
+            <a:off x="317166" y="2276872"/>
+            <a:ext cx="8568952" cy="4247317"/>
           </a:xfrm>
           <a:prstGeom prst="rect">
             <a:avLst/>
@@ -8825,8 +11184,12 @@
               <a:buChar char="•"/>
             </a:pPr>
             <a:r>
-              <a:rPr lang="en-US" sz="2000" dirty="0"/>
-              <a:t>Generative AI Integration: Implementing Large Language Models (LLMs) to automatically generate plain-English summaries of complex judgments alongside the predictions.</a:t>
+              <a:rPr lang="en-IN" b="1" dirty="0"/>
+              <a:t>Generative AI Integration:</a:t>
+            </a:r>
+            <a:r>
+              <a:rPr lang="en-IN" dirty="0"/>
+              <a:t> Implementing Large Language Models (LLMs) to automatically generate plain-English summaries of complex court judgments alongside the AI predictions — making outputs accessible to non-legal users.</a:t>
             </a:r>
           </a:p>
           <a:p>
@@ -8835,8 +11198,28 @@
               <a:buChar char="•"/>
             </a:pPr>
             <a:r>
-              <a:rPr lang="en-US" sz="2000" dirty="0"/>
-              <a:t>Regional Expansion: Expanding our JSON mapping dictionaries to include regional state laws and multilingual High Court translations (Marathi, Hindi).</a:t>
+              <a:rPr lang="en-IN" b="1" dirty="0"/>
+              <a:t>Explainable AI (SHAP):</a:t>
+            </a:r>
+            <a:r>
+              <a:rPr lang="en-IN" dirty="0"/>
+              <a:t> Integrating SHAP (</a:t>
+            </a:r>
+            <a:r>
+              <a:rPr lang="en-IN" dirty="0" err="1"/>
+              <a:t>SHapley</a:t>
+            </a:r>
+            <a:r>
+              <a:rPr lang="en-IN" dirty="0"/>
+              <a:t> Additive </a:t>
+            </a:r>
+            <a:r>
+              <a:rPr lang="en-IN" dirty="0" err="1"/>
+              <a:t>exPlanations</a:t>
+            </a:r>
+            <a:r>
+              <a:rPr lang="en-IN" dirty="0"/>
+              <a:t>) to generate visual heatmaps highlighting the exact words and phrases that influenced the AI's prediction — increasing transparency and trust.</a:t>
             </a:r>
           </a:p>
           <a:p>
@@ -8845,9 +11228,106 @@
               <a:buChar char="•"/>
             </a:pPr>
             <a:r>
-              <a:rPr lang="en-US" sz="2000" dirty="0"/>
-              <a:t>Frontend Migration: Rebuilding the Streamlit UI in React.js or Next.js to provide a seamless, native mobile application experience for practicing lawyers on the go.</a:t>
-            </a:r>
+              <a:rPr lang="en-IN" b="1" dirty="0"/>
+              <a:t>Multilingual Support:</a:t>
+            </a:r>
+            <a:r>
+              <a:rPr lang="en-IN" dirty="0"/>
+              <a:t> Expanding the NLP pipeline to process court documents in regional languages — Hindi, Marathi, and Tamil — using multilingual transformer models.</a:t>
+            </a:r>
+          </a:p>
+          <a:p>
+            <a:pPr marL="285750" indent="-285750" algn="just">
+              <a:buFont typeface="Arial" panose="020B0604020202020204" pitchFamily="34" charset="0"/>
+              <a:buChar char="•"/>
+            </a:pPr>
+            <a:r>
+              <a:rPr lang="en-IN" b="1" dirty="0"/>
+              <a:t>Sentence &amp; Penalty Prediction:</a:t>
+            </a:r>
+            <a:r>
+              <a:rPr lang="en-IN" dirty="0"/>
+              <a:t> Extending the model to predict not just outcomes but also estimated imprisonment duration and settlement amounts for civil cases.</a:t>
+            </a:r>
+          </a:p>
+          <a:p>
+            <a:pPr marL="285750" indent="-285750" algn="just">
+              <a:buFont typeface="Arial" panose="020B0604020202020204" pitchFamily="34" charset="0"/>
+              <a:buChar char="•"/>
+            </a:pPr>
+            <a:r>
+              <a:rPr lang="en-IN" b="1" dirty="0"/>
+              <a:t>Frontend Migration:</a:t>
+            </a:r>
+            <a:r>
+              <a:rPr lang="en-IN" dirty="0"/>
+              <a:t> Rebuilding the Streamlit UI in React.js or Next.js to provide a production-grade, mobile-responsive application for practicing lawyers on the go.</a:t>
+            </a:r>
+          </a:p>
+          <a:p>
+            <a:pPr marL="285750" indent="-285750" algn="just">
+              <a:buFont typeface="Arial" panose="020B0604020202020204" pitchFamily="34" charset="0"/>
+              <a:buChar char="•"/>
+            </a:pPr>
+            <a:r>
+              <a:rPr lang="en-IN" b="1" dirty="0"/>
+              <a:t>REST API Deployment:</a:t>
+            </a:r>
+            <a:r>
+              <a:rPr lang="en-IN" dirty="0"/>
+              <a:t> Exposing the prediction models as RESTful APIs so third-party legal-tech platforms can integrate our predictions into their workflows.</a:t>
+            </a:r>
+          </a:p>
+        </p:txBody>
+      </p:sp>
+      <p:sp>
+        <p:nvSpPr>
+          <p:cNvPr id="4" name="TextBox 7">
+            <a:extLst>
+              <a:ext uri="{FF2B5EF4-FFF2-40B4-BE49-F238E27FC236}">
+                <a16:creationId xmlns:a16="http://schemas.microsoft.com/office/drawing/2014/main" id="{6EC1EAA2-2782-BBD3-F7A4-A9C0382DB884}"/>
+              </a:ext>
+            </a:extLst>
+          </p:cNvPr>
+          <p:cNvSpPr txBox="1">
+            <a:spLocks noChangeArrowheads="1"/>
+          </p:cNvSpPr>
+          <p:nvPr/>
+        </p:nvSpPr>
+        <p:spPr bwMode="auto">
+          <a:xfrm>
+            <a:off x="0" y="1052736"/>
+            <a:ext cx="9180512" cy="338554"/>
+          </a:xfrm>
+          <a:prstGeom prst="rect">
+            <a:avLst/>
+          </a:prstGeom>
+          <a:solidFill>
+            <a:srgbClr val="FFC000"/>
+          </a:solidFill>
+          <a:ln w="9525">
+            <a:noFill/>
+            <a:miter lim="800000"/>
+          </a:ln>
+        </p:spPr>
+        <p:txBody>
+          <a:bodyPr wrap="square">
+            <a:spAutoFit/>
+          </a:bodyPr>
+          <a:lstStyle/>
+          <a:p>
+            <a:pPr algn="ctr"/>
+            <a:r>
+              <a:rPr lang="en-US" sz="1600" b="1" dirty="0">
+                <a:latin typeface="Times New Roman" panose="02020603050405020304" pitchFamily="18" charset="0"/>
+                <a:cs typeface="Times New Roman" panose="02020603050405020304" pitchFamily="18" charset="0"/>
+              </a:rPr>
+              <a:t>Final Presentation</a:t>
+            </a:r>
+            <a:endParaRPr lang="en-IN" sz="1600" b="1" dirty="0">
+              <a:latin typeface="Times New Roman" panose="02020603050405020304" pitchFamily="18" charset="0"/>
+              <a:cs typeface="Times New Roman" panose="02020603050405020304" pitchFamily="18" charset="0"/>
+            </a:endParaRPr>
           </a:p>
         </p:txBody>
       </p:sp>
@@ -8864,7 +11344,7 @@
 </p:sld>
 </file>
 
-<file path=ppt/slides/slide15.xml><?xml version="1.0" encoding="utf-8"?>
+<file path=ppt/slides/slide18.xml><?xml version="1.0" encoding="utf-8"?>
 <p:sld xmlns:a="http://schemas.openxmlformats.org/drawingml/2006/main" xmlns:r="http://schemas.openxmlformats.org/officeDocument/2006/relationships" xmlns:p="http://schemas.openxmlformats.org/presentationml/2006/main">
   <p:cSld>
     <p:spTree>
@@ -9097,7 +11577,7 @@
                 </a:solidFill>
               </a:rPr>
               <a:pPr/>
-              <a:t>15</a:t>
+              <a:t>18</a:t>
             </a:fld>
             <a:endParaRPr lang="en-GB" b="1" dirty="0">
               <a:solidFill>
@@ -9395,6 +11875,57 @@
           </a:p>
         </p:txBody>
       </p:sp>
+      <p:sp>
+        <p:nvSpPr>
+          <p:cNvPr id="5" name="TextBox 7">
+            <a:extLst>
+              <a:ext uri="{FF2B5EF4-FFF2-40B4-BE49-F238E27FC236}">
+                <a16:creationId xmlns:a16="http://schemas.microsoft.com/office/drawing/2014/main" id="{C44A7D1F-3ACC-D74F-ECE8-069201CF240A}"/>
+              </a:ext>
+            </a:extLst>
+          </p:cNvPr>
+          <p:cNvSpPr txBox="1">
+            <a:spLocks noChangeArrowheads="1"/>
+          </p:cNvSpPr>
+          <p:nvPr/>
+        </p:nvSpPr>
+        <p:spPr bwMode="auto">
+          <a:xfrm>
+            <a:off x="0" y="1052736"/>
+            <a:ext cx="9180512" cy="338554"/>
+          </a:xfrm>
+          <a:prstGeom prst="rect">
+            <a:avLst/>
+          </a:prstGeom>
+          <a:solidFill>
+            <a:srgbClr val="FFC000"/>
+          </a:solidFill>
+          <a:ln w="9525">
+            <a:noFill/>
+            <a:miter lim="800000"/>
+          </a:ln>
+        </p:spPr>
+        <p:txBody>
+          <a:bodyPr wrap="square">
+            <a:spAutoFit/>
+          </a:bodyPr>
+          <a:lstStyle/>
+          <a:p>
+            <a:pPr algn="ctr"/>
+            <a:r>
+              <a:rPr lang="en-US" sz="1600" b="1" dirty="0">
+                <a:latin typeface="Times New Roman" panose="02020603050405020304" pitchFamily="18" charset="0"/>
+                <a:cs typeface="Times New Roman" panose="02020603050405020304" pitchFamily="18" charset="0"/>
+              </a:rPr>
+              <a:t>Final Presentation</a:t>
+            </a:r>
+            <a:endParaRPr lang="en-IN" sz="1600" b="1" dirty="0">
+              <a:latin typeface="Times New Roman" panose="02020603050405020304" pitchFamily="18" charset="0"/>
+              <a:cs typeface="Times New Roman" panose="02020603050405020304" pitchFamily="18" charset="0"/>
+            </a:endParaRPr>
+          </a:p>
+        </p:txBody>
+      </p:sp>
     </p:spTree>
     <p:extLst>
       <p:ext uri="{BB962C8B-B14F-4D97-AF65-F5344CB8AC3E}">
@@ -9408,7 +11939,7 @@
 </p:sld>
 </file>
 
-<file path=ppt/slides/slide16.xml><?xml version="1.0" encoding="utf-8"?>
+<file path=ppt/slides/slide19.xml><?xml version="1.0" encoding="utf-8"?>
 <p:sld xmlns:a="http://schemas.openxmlformats.org/drawingml/2006/main" xmlns:r="http://schemas.openxmlformats.org/officeDocument/2006/relationships" xmlns:p="http://schemas.openxmlformats.org/presentationml/2006/main">
   <p:cSld>
     <p:spTree>
@@ -9671,7 +12202,7 @@
                 </a:solidFill>
               </a:rPr>
               <a:pPr/>
-              <a:t>16</a:t>
+              <a:t>19</a:t>
             </a:fld>
             <a:endParaRPr lang="en-GB" b="1" dirty="0">
               <a:solidFill>
@@ -9898,6 +12429,57 @@
           </a:p>
         </p:txBody>
       </p:sp>
+      <p:sp>
+        <p:nvSpPr>
+          <p:cNvPr id="5" name="TextBox 7">
+            <a:extLst>
+              <a:ext uri="{FF2B5EF4-FFF2-40B4-BE49-F238E27FC236}">
+                <a16:creationId xmlns:a16="http://schemas.microsoft.com/office/drawing/2014/main" id="{4EB09DDC-D3CB-97B0-B1BB-F7BEDAD014BE}"/>
+              </a:ext>
+            </a:extLst>
+          </p:cNvPr>
+          <p:cNvSpPr txBox="1">
+            <a:spLocks noChangeArrowheads="1"/>
+          </p:cNvSpPr>
+          <p:nvPr/>
+        </p:nvSpPr>
+        <p:spPr bwMode="auto">
+          <a:xfrm>
+            <a:off x="0" y="1052736"/>
+            <a:ext cx="9180512" cy="338554"/>
+          </a:xfrm>
+          <a:prstGeom prst="rect">
+            <a:avLst/>
+          </a:prstGeom>
+          <a:solidFill>
+            <a:srgbClr val="FFC000"/>
+          </a:solidFill>
+          <a:ln w="9525">
+            <a:noFill/>
+            <a:miter lim="800000"/>
+          </a:ln>
+        </p:spPr>
+        <p:txBody>
+          <a:bodyPr wrap="square">
+            <a:spAutoFit/>
+          </a:bodyPr>
+          <a:lstStyle/>
+          <a:p>
+            <a:pPr algn="ctr"/>
+            <a:r>
+              <a:rPr lang="en-US" sz="1600" b="1" dirty="0">
+                <a:latin typeface="Times New Roman" panose="02020603050405020304" pitchFamily="18" charset="0"/>
+                <a:cs typeface="Times New Roman" panose="02020603050405020304" pitchFamily="18" charset="0"/>
+              </a:rPr>
+              <a:t>Final Presentation</a:t>
+            </a:r>
+            <a:endParaRPr lang="en-IN" sz="1600" b="1" dirty="0">
+              <a:latin typeface="Times New Roman" panose="02020603050405020304" pitchFamily="18" charset="0"/>
+              <a:cs typeface="Times New Roman" panose="02020603050405020304" pitchFamily="18" charset="0"/>
+            </a:endParaRPr>
+          </a:p>
+        </p:txBody>
+      </p:sp>
     </p:spTree>
     <p:extLst>
       <p:ext uri="{BB962C8B-B14F-4D97-AF65-F5344CB8AC3E}">
@@ -10087,7 +12669,7 @@
         </p:nvSpPr>
         <p:spPr bwMode="auto">
           <a:xfrm>
-            <a:off x="36512" y="1052736"/>
+            <a:off x="0" y="1052736"/>
             <a:ext cx="9144000" cy="338554"/>
           </a:xfrm>
           <a:prstGeom prst="rect">
@@ -10296,10 +12878,1296 @@
           </a:p>
         </p:txBody>
       </p:sp>
+      <p:sp>
+        <p:nvSpPr>
+          <p:cNvPr id="3" name="TextBox 7">
+            <a:extLst>
+              <a:ext uri="{FF2B5EF4-FFF2-40B4-BE49-F238E27FC236}">
+                <a16:creationId xmlns:a16="http://schemas.microsoft.com/office/drawing/2014/main" id="{6B67A367-E99F-1F45-2F50-63B323D2A4F8}"/>
+              </a:ext>
+            </a:extLst>
+          </p:cNvPr>
+          <p:cNvSpPr txBox="1">
+            <a:spLocks noChangeArrowheads="1"/>
+          </p:cNvSpPr>
+          <p:nvPr/>
+        </p:nvSpPr>
+        <p:spPr bwMode="auto">
+          <a:xfrm>
+            <a:off x="0" y="1052736"/>
+            <a:ext cx="9180512" cy="338554"/>
+          </a:xfrm>
+          <a:prstGeom prst="rect">
+            <a:avLst/>
+          </a:prstGeom>
+          <a:solidFill>
+            <a:srgbClr val="FFC000"/>
+          </a:solidFill>
+          <a:ln w="9525">
+            <a:noFill/>
+            <a:miter lim="800000"/>
+          </a:ln>
+        </p:spPr>
+        <p:txBody>
+          <a:bodyPr wrap="square">
+            <a:spAutoFit/>
+          </a:bodyPr>
+          <a:lstStyle/>
+          <a:p>
+            <a:pPr algn="ctr"/>
+            <a:r>
+              <a:rPr lang="en-US" sz="1600" b="1" dirty="0">
+                <a:latin typeface="Times New Roman" panose="02020603050405020304" pitchFamily="18" charset="0"/>
+                <a:cs typeface="Times New Roman" panose="02020603050405020304" pitchFamily="18" charset="0"/>
+              </a:rPr>
+              <a:t>Final Presentation</a:t>
+            </a:r>
+            <a:endParaRPr lang="en-IN" sz="1600" b="1" dirty="0">
+              <a:latin typeface="Times New Roman" panose="02020603050405020304" pitchFamily="18" charset="0"/>
+              <a:cs typeface="Times New Roman" panose="02020603050405020304" pitchFamily="18" charset="0"/>
+            </a:endParaRPr>
+          </a:p>
+        </p:txBody>
+      </p:sp>
     </p:spTree>
     <p:extLst>
       <p:ext uri="{BB962C8B-B14F-4D97-AF65-F5344CB8AC3E}">
         <p14:creationId xmlns:p14="http://schemas.microsoft.com/office/powerpoint/2010/main" val="1704150010"/>
+      </p:ext>
+    </p:extLst>
+  </p:cSld>
+  <p:clrMapOvr>
+    <a:masterClrMapping/>
+  </p:clrMapOvr>
+</p:sld>
+</file>
+
+<file path=ppt/slides/slide20.xml><?xml version="1.0" encoding="utf-8"?>
+<p:sld xmlns:a="http://schemas.openxmlformats.org/drawingml/2006/main" xmlns:r="http://schemas.openxmlformats.org/officeDocument/2006/relationships" xmlns:p="http://schemas.openxmlformats.org/presentationml/2006/main">
+  <p:cSld>
+    <p:spTree>
+      <p:nvGrpSpPr>
+        <p:cNvPr id="1" name="">
+          <a:extLst>
+            <a:ext uri="{FF2B5EF4-FFF2-40B4-BE49-F238E27FC236}">
+              <a16:creationId xmlns:a16="http://schemas.microsoft.com/office/drawing/2014/main" id="{F2CC67CC-D295-5935-9C60-0446F0BC01B7}"/>
+            </a:ext>
+          </a:extLst>
+        </p:cNvPr>
+        <p:cNvGrpSpPr/>
+        <p:nvPr/>
+      </p:nvGrpSpPr>
+      <p:grpSpPr>
+        <a:xfrm>
+          <a:off x="0" y="0"/>
+          <a:ext cx="0" cy="0"/>
+          <a:chOff x="0" y="0"/>
+          <a:chExt cx="0" cy="0"/>
+        </a:xfrm>
+      </p:grpSpPr>
+      <p:sp>
+        <p:nvSpPr>
+          <p:cNvPr id="1048598" name="Rectangle 5">
+            <a:extLst>
+              <a:ext uri="{FF2B5EF4-FFF2-40B4-BE49-F238E27FC236}">
+                <a16:creationId xmlns:a16="http://schemas.microsoft.com/office/drawing/2014/main" id="{FA7797B1-33CA-545C-B6B1-33E6240DF470}"/>
+              </a:ext>
+            </a:extLst>
+          </p:cNvPr>
+          <p:cNvSpPr>
+            <a:spLocks noGrp="1" noChangeArrowheads="1"/>
+          </p:cNvSpPr>
+          <p:nvPr>
+            <p:ph type="ctrTitle"/>
+          </p:nvPr>
+        </p:nvSpPr>
+        <p:spPr>
+          <a:xfrm>
+            <a:off x="1043608" y="160813"/>
+            <a:ext cx="6984776" cy="1035939"/>
+          </a:xfrm>
+          <a:solidFill>
+            <a:schemeClr val="bg1"/>
+          </a:solidFill>
+          <a:effectLst>
+            <a:outerShdw dist="35921" dir="2700000" algn="ctr" rotWithShape="0">
+              <a:schemeClr val="accent1">
+                <a:alpha val="50000"/>
+              </a:schemeClr>
+            </a:outerShdw>
+          </a:effectLst>
+        </p:spPr>
+        <p:txBody>
+          <a:bodyPr>
+            <a:noAutofit/>
+          </a:bodyPr>
+          <a:lstStyle/>
+          <a:p>
+            <a:r>
+              <a:rPr lang="en-US" sz="1600" dirty="0"/>
+              <a:t>Nutan Maharashtra </a:t>
+            </a:r>
+            <a:r>
+              <a:rPr lang="en-US" sz="1600" dirty="0" err="1"/>
+              <a:t>Vidya</a:t>
+            </a:r>
+            <a:r>
+              <a:rPr lang="en-US" sz="1600" dirty="0"/>
+              <a:t> </a:t>
+            </a:r>
+            <a:r>
+              <a:rPr lang="en-US" sz="1600" dirty="0" err="1"/>
+              <a:t>Prasarak</a:t>
+            </a:r>
+            <a:r>
+              <a:rPr lang="en-US" sz="1600" dirty="0"/>
+              <a:t> </a:t>
+            </a:r>
+            <a:r>
+              <a:rPr lang="en-US" sz="1600" dirty="0" err="1"/>
+              <a:t>Mandal’s</a:t>
+            </a:r>
+            <a:r>
+              <a:rPr lang="en-US" sz="1600" dirty="0"/>
+              <a:t> </a:t>
+            </a:r>
+            <a:br>
+              <a:rPr lang="en-US" sz="1600" dirty="0"/>
+            </a:br>
+            <a:r>
+              <a:rPr lang="en-US" sz="1800" dirty="0"/>
+              <a:t> </a:t>
+            </a:r>
+            <a:r>
+              <a:rPr lang="en-US" sz="1800" b="1" dirty="0"/>
+              <a:t>NUTAN COLLEGE OF ENGINEERING AND RESEARCH </a:t>
+            </a:r>
+            <a:br>
+              <a:rPr lang="en-US" sz="1800" dirty="0"/>
+            </a:br>
+            <a:r>
+              <a:rPr lang="en-US" sz="1600" dirty="0"/>
+              <a:t>Under Administrative Support of </a:t>
+            </a:r>
+            <a:r>
+              <a:rPr lang="en-US" sz="1600" dirty="0" err="1"/>
+              <a:t>Pimpri</a:t>
+            </a:r>
+            <a:r>
+              <a:rPr lang="en-US" sz="1600" dirty="0"/>
+              <a:t> </a:t>
+            </a:r>
+            <a:r>
+              <a:rPr lang="en-US" sz="1600" dirty="0" err="1"/>
+              <a:t>Chinchwad</a:t>
+            </a:r>
+            <a:r>
+              <a:rPr lang="en-US" sz="1600" dirty="0"/>
+              <a:t>  Education Trust </a:t>
+            </a:r>
+            <a:br>
+              <a:rPr lang="en-US" sz="1600" dirty="0"/>
+            </a:br>
+            <a:r>
+              <a:rPr lang="en-US" sz="1600" dirty="0"/>
+              <a:t>ISO 21001:2018 EOMS Certified </a:t>
+            </a:r>
+            <a:r>
+              <a:rPr lang="en-US" sz="1200" dirty="0"/>
+              <a:t>	</a:t>
+            </a:r>
+            <a:br>
+              <a:rPr lang="en-US" sz="1200" dirty="0"/>
+            </a:br>
+            <a:endParaRPr lang="en-US" sz="1400" dirty="0"/>
+          </a:p>
+        </p:txBody>
+      </p:sp>
+      <p:pic>
+        <p:nvPicPr>
+          <p:cNvPr id="2097159" name="Picture 6">
+            <a:extLst>
+              <a:ext uri="{FF2B5EF4-FFF2-40B4-BE49-F238E27FC236}">
+                <a16:creationId xmlns:a16="http://schemas.microsoft.com/office/drawing/2014/main" id="{B9883F6A-FA07-48EE-CA9E-0691091F2459}"/>
+              </a:ext>
+            </a:extLst>
+          </p:cNvPr>
+          <p:cNvPicPr>
+            <a:picLocks noChangeAspect="1" noChangeArrowheads="1"/>
+          </p:cNvPicPr>
+          <p:nvPr/>
+        </p:nvPicPr>
+        <p:blipFill>
+          <a:blip r:embed="rId3" cstate="print">
+            <a:extLst>
+              <a:ext uri="{28A0092B-C50C-407E-A947-70E740481C1C}">
+                <a14:useLocalDpi xmlns:a14="http://schemas.microsoft.com/office/drawing/2010/main" val="0"/>
+              </a:ext>
+            </a:extLst>
+          </a:blip>
+          <a:stretch>
+            <a:fillRect/>
+          </a:stretch>
+        </p:blipFill>
+        <p:spPr bwMode="auto">
+          <a:xfrm>
+            <a:off x="467544" y="19232"/>
+            <a:ext cx="1202454" cy="1033504"/>
+          </a:xfrm>
+          <a:prstGeom prst="rect">
+            <a:avLst/>
+          </a:prstGeom>
+          <a:noFill/>
+          <a:ln w="9525">
+            <a:noFill/>
+            <a:miter lim="800000"/>
+            <a:headEnd/>
+            <a:tailEnd/>
+          </a:ln>
+        </p:spPr>
+      </p:pic>
+      <p:sp>
+        <p:nvSpPr>
+          <p:cNvPr id="1048601" name="TextBox 7">
+            <a:extLst>
+              <a:ext uri="{FF2B5EF4-FFF2-40B4-BE49-F238E27FC236}">
+                <a16:creationId xmlns:a16="http://schemas.microsoft.com/office/drawing/2014/main" id="{8A21C568-2AC4-0016-A403-EB51D684C6EC}"/>
+              </a:ext>
+            </a:extLst>
+          </p:cNvPr>
+          <p:cNvSpPr txBox="1">
+            <a:spLocks noChangeArrowheads="1"/>
+          </p:cNvSpPr>
+          <p:nvPr/>
+        </p:nvSpPr>
+        <p:spPr bwMode="auto">
+          <a:xfrm>
+            <a:off x="36512" y="1052736"/>
+            <a:ext cx="9144000" cy="338554"/>
+          </a:xfrm>
+          <a:prstGeom prst="rect">
+            <a:avLst/>
+          </a:prstGeom>
+          <a:solidFill>
+            <a:srgbClr val="FFC000"/>
+          </a:solidFill>
+          <a:ln w="9525">
+            <a:noFill/>
+            <a:miter lim="800000"/>
+          </a:ln>
+        </p:spPr>
+        <p:txBody>
+          <a:bodyPr wrap="square">
+            <a:spAutoFit/>
+          </a:bodyPr>
+          <a:lstStyle/>
+          <a:p>
+            <a:pPr algn="ctr"/>
+            <a:r>
+              <a:rPr lang="en-US" sz="1600" b="1" dirty="0">
+                <a:latin typeface="Times New Roman" panose="02020603050405020304" pitchFamily="18" charset="0"/>
+                <a:cs typeface="Times New Roman" panose="02020603050405020304" pitchFamily="18" charset="0"/>
+              </a:rPr>
+              <a:t>Review - IV</a:t>
+            </a:r>
+            <a:endParaRPr lang="en-IN" sz="1600" b="1" dirty="0">
+              <a:latin typeface="Times New Roman" panose="02020603050405020304" pitchFamily="18" charset="0"/>
+              <a:cs typeface="Times New Roman" panose="02020603050405020304" pitchFamily="18" charset="0"/>
+            </a:endParaRPr>
+          </a:p>
+        </p:txBody>
+      </p:sp>
+      <p:sp>
+        <p:nvSpPr>
+          <p:cNvPr id="2" name="Slide Number Placeholder 1">
+            <a:extLst>
+              <a:ext uri="{FF2B5EF4-FFF2-40B4-BE49-F238E27FC236}">
+                <a16:creationId xmlns:a16="http://schemas.microsoft.com/office/drawing/2014/main" id="{E1DCA1E7-ABB2-009B-389C-8D7AD84BEFEF}"/>
+              </a:ext>
+            </a:extLst>
+          </p:cNvPr>
+          <p:cNvSpPr>
+            <a:spLocks noGrp="1"/>
+          </p:cNvSpPr>
+          <p:nvPr>
+            <p:ph type="sldNum" sz="quarter" idx="12"/>
+          </p:nvPr>
+        </p:nvSpPr>
+        <p:spPr/>
+        <p:txBody>
+          <a:bodyPr/>
+          <a:lstStyle/>
+          <a:p>
+            <a:fld id="{1EC248AB-E565-412B-9D95-9B07D6A4F3F3}" type="slidenum">
+              <a:rPr lang="en-GB" b="1" smtClean="0">
+                <a:solidFill>
+                  <a:schemeClr val="tx1"/>
+                </a:solidFill>
+              </a:rPr>
+              <a:pPr/>
+              <a:t>20</a:t>
+            </a:fld>
+            <a:endParaRPr lang="en-GB" b="1" dirty="0">
+              <a:solidFill>
+                <a:schemeClr val="tx1"/>
+              </a:solidFill>
+            </a:endParaRPr>
+          </a:p>
+        </p:txBody>
+      </p:sp>
+      <p:pic>
+        <p:nvPicPr>
+          <p:cNvPr id="1027" name="Picture 3" descr="C:\Users\admin\Desktop\download.png">
+            <a:extLst>
+              <a:ext uri="{FF2B5EF4-FFF2-40B4-BE49-F238E27FC236}">
+                <a16:creationId xmlns:a16="http://schemas.microsoft.com/office/drawing/2014/main" id="{E0BD03BE-A4BB-F89E-D5A5-D7F11FF807DD}"/>
+              </a:ext>
+            </a:extLst>
+          </p:cNvPr>
+          <p:cNvPicPr>
+            <a:picLocks noChangeAspect="1" noChangeArrowheads="1"/>
+          </p:cNvPicPr>
+          <p:nvPr/>
+        </p:nvPicPr>
+        <p:blipFill>
+          <a:blip r:embed="rId4">
+            <a:extLst>
+              <a:ext uri="{28A0092B-C50C-407E-A947-70E740481C1C}">
+                <a14:useLocalDpi xmlns:a14="http://schemas.microsoft.com/office/drawing/2010/main" val="0"/>
+              </a:ext>
+            </a:extLst>
+          </a:blip>
+          <a:srcRect/>
+          <a:stretch>
+            <a:fillRect/>
+          </a:stretch>
+        </p:blipFill>
+        <p:spPr bwMode="auto">
+          <a:xfrm>
+            <a:off x="7452320" y="44624"/>
+            <a:ext cx="1207008" cy="1033505"/>
+          </a:xfrm>
+          <a:prstGeom prst="rect">
+            <a:avLst/>
+          </a:prstGeom>
+          <a:noFill/>
+          <a:extLst>
+            <a:ext uri="{909E8E84-426E-40DD-AFC4-6F175D3DCCD1}">
+              <a14:hiddenFill xmlns:a14="http://schemas.microsoft.com/office/drawing/2010/main">
+                <a:solidFill>
+                  <a:srgbClr val="FFFFFF"/>
+                </a:solidFill>
+              </a14:hiddenFill>
+            </a:ext>
+          </a:extLst>
+        </p:spPr>
+      </p:pic>
+      <p:sp>
+        <p:nvSpPr>
+          <p:cNvPr id="3" name="Rectangle 2">
+            <a:extLst>
+              <a:ext uri="{FF2B5EF4-FFF2-40B4-BE49-F238E27FC236}">
+                <a16:creationId xmlns:a16="http://schemas.microsoft.com/office/drawing/2014/main" id="{0ABC71F6-32FE-2B8C-7FCF-139C5279174E}"/>
+              </a:ext>
+            </a:extLst>
+          </p:cNvPr>
+          <p:cNvSpPr/>
+          <p:nvPr/>
+        </p:nvSpPr>
+        <p:spPr>
+          <a:xfrm>
+            <a:off x="37581" y="1385277"/>
+            <a:ext cx="9084715" cy="584775"/>
+          </a:xfrm>
+          <a:prstGeom prst="rect">
+            <a:avLst/>
+          </a:prstGeom>
+        </p:spPr>
+        <p:txBody>
+          <a:bodyPr wrap="square">
+            <a:spAutoFit/>
+          </a:bodyPr>
+          <a:lstStyle/>
+          <a:p>
+            <a:pPr lvl="0" algn="ctr" eaLnBrk="0" fontAlgn="base" hangingPunct="0">
+              <a:spcBef>
+                <a:spcPct val="0"/>
+              </a:spcBef>
+              <a:spcAft>
+                <a:spcPct val="0"/>
+              </a:spcAft>
+            </a:pPr>
+            <a:r>
+              <a:rPr lang="en-US" altLang="en-US" sz="3200" b="1" dirty="0">
+                <a:latin typeface="Times New Roman" panose="02020603050405020304" pitchFamily="18" charset="0"/>
+                <a:cs typeface="Times New Roman" panose="02020603050405020304" pitchFamily="18" charset="0"/>
+              </a:rPr>
+              <a:t>References</a:t>
+            </a:r>
+          </a:p>
+        </p:txBody>
+      </p:sp>
+      <p:sp>
+        <p:nvSpPr>
+          <p:cNvPr id="4" name="Rectangle 3">
+            <a:extLst>
+              <a:ext uri="{FF2B5EF4-FFF2-40B4-BE49-F238E27FC236}">
+                <a16:creationId xmlns:a16="http://schemas.microsoft.com/office/drawing/2014/main" id="{17848A77-3ED2-FFC3-0190-4FCF8E2C5410}"/>
+              </a:ext>
+            </a:extLst>
+          </p:cNvPr>
+          <p:cNvSpPr/>
+          <p:nvPr/>
+        </p:nvSpPr>
+        <p:spPr>
+          <a:xfrm>
+            <a:off x="251520" y="2060848"/>
+            <a:ext cx="8568952" cy="4031873"/>
+          </a:xfrm>
+          <a:prstGeom prst="rect">
+            <a:avLst/>
+          </a:prstGeom>
+        </p:spPr>
+        <p:txBody>
+          <a:bodyPr wrap="square">
+            <a:spAutoFit/>
+          </a:bodyPr>
+          <a:lstStyle/>
+          <a:p>
+            <a:pPr algn="just"/>
+            <a:r>
+              <a:rPr lang="en-IN" sz="1600" dirty="0"/>
+              <a:t>[13] R. Jaegers, “A Novel Approach to Legal Text Summarization with Deep Reinforcement Learning,” Journal of Political Science and International Relations Studies, vol. 7, no. 1, pp. 1–11, 2024. </a:t>
+            </a:r>
+          </a:p>
+          <a:p>
+            <a:pPr algn="just"/>
+            <a:r>
+              <a:rPr lang="en-IN" sz="1600" dirty="0"/>
+              <a:t>[14] P. de Souza, L. Chalkidis, and V. </a:t>
+            </a:r>
+            <a:r>
+              <a:rPr lang="en-IN" sz="1600" dirty="0" err="1"/>
+              <a:t>Simaki</a:t>
+            </a:r>
+            <a:r>
+              <a:rPr lang="en-IN" sz="1600" dirty="0"/>
+              <a:t>, “Topic Modelling of Legal Documents via LEGAL-BERT,” in 2022 IEEE International Conference on Big Data (Big Data), 2022, pp. 4465–4474. </a:t>
+            </a:r>
+          </a:p>
+          <a:p>
+            <a:pPr algn="just"/>
+            <a:r>
+              <a:rPr lang="en-IN" sz="1600" dirty="0"/>
+              <a:t>[15] S. Tuladhar, S. Zuk, and M. Shardlow, “BERT-based Classification of US Supreme Court Decisions,” in Proceedings of the 14th Interna </a:t>
+            </a:r>
+            <a:r>
+              <a:rPr lang="en-IN" sz="1600" dirty="0" err="1"/>
+              <a:t>tional</a:t>
+            </a:r>
+            <a:r>
+              <a:rPr lang="en-IN" sz="1600" dirty="0"/>
+              <a:t> Conference on Recent Advances in Natural Language Processing (RANLP 2023), Varna, Bulgaria: INCOMA Ltd., 2023, pp. 1195–1205. </a:t>
+            </a:r>
+          </a:p>
+          <a:p>
+            <a:pPr algn="just"/>
+            <a:r>
+              <a:rPr lang="en-IN" sz="1600" dirty="0"/>
+              <a:t>[16] Anonymous, “A Hybrid Model for Legal Entity Recognition using Legal-BERT and Semantic Filtering,” </a:t>
+            </a:r>
+            <a:r>
+              <a:rPr lang="en-IN" sz="1600" dirty="0" err="1"/>
+              <a:t>arXiv</a:t>
+            </a:r>
+            <a:r>
+              <a:rPr lang="en-IN" sz="1600" dirty="0"/>
+              <a:t> preprint arXiv:2410.08521v1, 2024. </a:t>
+            </a:r>
+          </a:p>
+          <a:p>
+            <a:pPr algn="just"/>
+            <a:r>
+              <a:rPr lang="en-IN" sz="1600" dirty="0"/>
+              <a:t>[17] P. </a:t>
+            </a:r>
+            <a:r>
+              <a:rPr lang="en-IN" sz="1600" dirty="0" err="1"/>
+              <a:t>Katsikouli</a:t>
+            </a:r>
+            <a:r>
+              <a:rPr lang="en-IN" sz="1600" dirty="0"/>
+              <a:t>, R. Sorge, and N. Perra, “Machine Learning and Asylum Adjudications: From Analysis of Variations to Outcome Predictions,” in 2022 IEEE International Conference on Big Data (Big Data), 2022, pp. 4786–4795. </a:t>
+            </a:r>
+          </a:p>
+          <a:p>
+            <a:pPr algn="just"/>
+            <a:r>
+              <a:rPr lang="en-IN" sz="1600" dirty="0"/>
+              <a:t>[18] M. B. </a:t>
+            </a:r>
+            <a:r>
+              <a:rPr lang="en-IN" sz="1600" dirty="0" err="1"/>
+              <a:t>Kmainasi</a:t>
+            </a:r>
+            <a:r>
+              <a:rPr lang="en-IN" sz="1600" dirty="0"/>
+              <a:t>, S. </a:t>
+            </a:r>
+            <a:r>
+              <a:rPr lang="en-IN" sz="1600" dirty="0" err="1"/>
+              <a:t>Kmainasi</a:t>
+            </a:r>
+            <a:r>
+              <a:rPr lang="en-IN" sz="1600" dirty="0"/>
+              <a:t>, and O. El </a:t>
+            </a:r>
+            <a:r>
+              <a:rPr lang="en-IN" sz="1600" dirty="0" err="1"/>
+              <a:t>Mounadi</a:t>
+            </a:r>
+            <a:r>
+              <a:rPr lang="en-IN" sz="1600" dirty="0"/>
+              <a:t>, “Can Large Language Models Predict the Outcome of Judicial Decisions?,” </a:t>
+            </a:r>
+            <a:r>
+              <a:rPr lang="en-IN" sz="1600" dirty="0" err="1"/>
+              <a:t>arXiv</a:t>
+            </a:r>
+            <a:r>
+              <a:rPr lang="en-IN" sz="1600" dirty="0"/>
+              <a:t> preprint arXiv:2501.09768, 2025. </a:t>
+            </a:r>
+          </a:p>
+          <a:p>
+            <a:pPr algn="just"/>
+            <a:r>
+              <a:rPr lang="en-IN" sz="1600" dirty="0"/>
+              <a:t>[19] D. L. Katz, M. J. Bommarito, and J. Blackman, “A time-evolving random forest classifier for judicial prediction,” PLOS ONE, vol. 12, no. 4, p. e0174185, 2017. </a:t>
+            </a:r>
+          </a:p>
+        </p:txBody>
+      </p:sp>
+      <p:sp>
+        <p:nvSpPr>
+          <p:cNvPr id="5" name="TextBox 7">
+            <a:extLst>
+              <a:ext uri="{FF2B5EF4-FFF2-40B4-BE49-F238E27FC236}">
+                <a16:creationId xmlns:a16="http://schemas.microsoft.com/office/drawing/2014/main" id="{AA220B88-F040-354C-C779-09B5352C8C9B}"/>
+              </a:ext>
+            </a:extLst>
+          </p:cNvPr>
+          <p:cNvSpPr txBox="1">
+            <a:spLocks noChangeArrowheads="1"/>
+          </p:cNvSpPr>
+          <p:nvPr/>
+        </p:nvSpPr>
+        <p:spPr bwMode="auto">
+          <a:xfrm>
+            <a:off x="0" y="1052736"/>
+            <a:ext cx="9180512" cy="338554"/>
+          </a:xfrm>
+          <a:prstGeom prst="rect">
+            <a:avLst/>
+          </a:prstGeom>
+          <a:solidFill>
+            <a:srgbClr val="FFC000"/>
+          </a:solidFill>
+          <a:ln w="9525">
+            <a:noFill/>
+            <a:miter lim="800000"/>
+          </a:ln>
+        </p:spPr>
+        <p:txBody>
+          <a:bodyPr wrap="square">
+            <a:spAutoFit/>
+          </a:bodyPr>
+          <a:lstStyle/>
+          <a:p>
+            <a:pPr algn="ctr"/>
+            <a:r>
+              <a:rPr lang="en-US" sz="1600" b="1" dirty="0">
+                <a:latin typeface="Times New Roman" panose="02020603050405020304" pitchFamily="18" charset="0"/>
+                <a:cs typeface="Times New Roman" panose="02020603050405020304" pitchFamily="18" charset="0"/>
+              </a:rPr>
+              <a:t>Final Presentation</a:t>
+            </a:r>
+            <a:endParaRPr lang="en-IN" sz="1600" b="1" dirty="0">
+              <a:latin typeface="Times New Roman" panose="02020603050405020304" pitchFamily="18" charset="0"/>
+              <a:cs typeface="Times New Roman" panose="02020603050405020304" pitchFamily="18" charset="0"/>
+            </a:endParaRPr>
+          </a:p>
+        </p:txBody>
+      </p:sp>
+    </p:spTree>
+    <p:extLst>
+      <p:ext uri="{BB962C8B-B14F-4D97-AF65-F5344CB8AC3E}">
+        <p14:creationId xmlns:p14="http://schemas.microsoft.com/office/powerpoint/2010/main" val="948007648"/>
+      </p:ext>
+    </p:extLst>
+  </p:cSld>
+  <p:clrMapOvr>
+    <a:masterClrMapping/>
+  </p:clrMapOvr>
+</p:sld>
+</file>
+
+<file path=ppt/slides/slide21.xml><?xml version="1.0" encoding="utf-8"?>
+<p:sld xmlns:a="http://schemas.openxmlformats.org/drawingml/2006/main" xmlns:r="http://schemas.openxmlformats.org/officeDocument/2006/relationships" xmlns:p="http://schemas.openxmlformats.org/presentationml/2006/main">
+  <p:cSld>
+    <p:spTree>
+      <p:nvGrpSpPr>
+        <p:cNvPr id="1" name="">
+          <a:extLst>
+            <a:ext uri="{FF2B5EF4-FFF2-40B4-BE49-F238E27FC236}">
+              <a16:creationId xmlns:a16="http://schemas.microsoft.com/office/drawing/2014/main" id="{5BE36FE4-C708-7FA8-2205-9671D89F2ACA}"/>
+            </a:ext>
+          </a:extLst>
+        </p:cNvPr>
+        <p:cNvGrpSpPr/>
+        <p:nvPr/>
+      </p:nvGrpSpPr>
+      <p:grpSpPr>
+        <a:xfrm>
+          <a:off x="0" y="0"/>
+          <a:ext cx="0" cy="0"/>
+          <a:chOff x="0" y="0"/>
+          <a:chExt cx="0" cy="0"/>
+        </a:xfrm>
+      </p:grpSpPr>
+      <p:sp>
+        <p:nvSpPr>
+          <p:cNvPr id="1048598" name="Rectangle 5">
+            <a:extLst>
+              <a:ext uri="{FF2B5EF4-FFF2-40B4-BE49-F238E27FC236}">
+                <a16:creationId xmlns:a16="http://schemas.microsoft.com/office/drawing/2014/main" id="{F51B017F-78DB-0745-CFA9-9373F8859C3F}"/>
+              </a:ext>
+            </a:extLst>
+          </p:cNvPr>
+          <p:cNvSpPr>
+            <a:spLocks noGrp="1" noChangeArrowheads="1"/>
+          </p:cNvSpPr>
+          <p:nvPr>
+            <p:ph type="ctrTitle"/>
+          </p:nvPr>
+        </p:nvSpPr>
+        <p:spPr>
+          <a:xfrm>
+            <a:off x="1043608" y="160813"/>
+            <a:ext cx="6984776" cy="1035939"/>
+          </a:xfrm>
+          <a:solidFill>
+            <a:schemeClr val="bg1"/>
+          </a:solidFill>
+          <a:effectLst>
+            <a:outerShdw dist="35921" dir="2700000" algn="ctr" rotWithShape="0">
+              <a:schemeClr val="accent1">
+                <a:alpha val="50000"/>
+              </a:schemeClr>
+            </a:outerShdw>
+          </a:effectLst>
+        </p:spPr>
+        <p:txBody>
+          <a:bodyPr>
+            <a:noAutofit/>
+          </a:bodyPr>
+          <a:lstStyle/>
+          <a:p>
+            <a:r>
+              <a:rPr lang="en-US" sz="1600" dirty="0"/>
+              <a:t>Nutan Maharashtra </a:t>
+            </a:r>
+            <a:r>
+              <a:rPr lang="en-US" sz="1600" dirty="0" err="1"/>
+              <a:t>Vidya</a:t>
+            </a:r>
+            <a:r>
+              <a:rPr lang="en-US" sz="1600" dirty="0"/>
+              <a:t> </a:t>
+            </a:r>
+            <a:r>
+              <a:rPr lang="en-US" sz="1600" dirty="0" err="1"/>
+              <a:t>Prasarak</a:t>
+            </a:r>
+            <a:r>
+              <a:rPr lang="en-US" sz="1600" dirty="0"/>
+              <a:t> </a:t>
+            </a:r>
+            <a:r>
+              <a:rPr lang="en-US" sz="1600" dirty="0" err="1"/>
+              <a:t>Mandal’s</a:t>
+            </a:r>
+            <a:r>
+              <a:rPr lang="en-US" sz="1600" dirty="0"/>
+              <a:t> </a:t>
+            </a:r>
+            <a:br>
+              <a:rPr lang="en-US" sz="1600" dirty="0"/>
+            </a:br>
+            <a:r>
+              <a:rPr lang="en-US" sz="1800" dirty="0"/>
+              <a:t> </a:t>
+            </a:r>
+            <a:r>
+              <a:rPr lang="en-US" sz="1800" b="1" dirty="0"/>
+              <a:t>NUTAN COLLEGE OF ENGINEERING AND RESEARCH </a:t>
+            </a:r>
+            <a:br>
+              <a:rPr lang="en-US" sz="1800" dirty="0"/>
+            </a:br>
+            <a:r>
+              <a:rPr lang="en-US" sz="1600" dirty="0"/>
+              <a:t>Under Administrative Support of </a:t>
+            </a:r>
+            <a:r>
+              <a:rPr lang="en-US" sz="1600" dirty="0" err="1"/>
+              <a:t>Pimpri</a:t>
+            </a:r>
+            <a:r>
+              <a:rPr lang="en-US" sz="1600" dirty="0"/>
+              <a:t> </a:t>
+            </a:r>
+            <a:r>
+              <a:rPr lang="en-US" sz="1600" dirty="0" err="1"/>
+              <a:t>Chinchwad</a:t>
+            </a:r>
+            <a:r>
+              <a:rPr lang="en-US" sz="1600" dirty="0"/>
+              <a:t>  Education Trust </a:t>
+            </a:r>
+            <a:br>
+              <a:rPr lang="en-US" sz="1600" dirty="0"/>
+            </a:br>
+            <a:r>
+              <a:rPr lang="en-US" sz="1600" dirty="0"/>
+              <a:t>ISO 21001:2018 EOMS Certified </a:t>
+            </a:r>
+            <a:r>
+              <a:rPr lang="en-US" sz="1200" dirty="0"/>
+              <a:t>	</a:t>
+            </a:r>
+            <a:br>
+              <a:rPr lang="en-US" sz="1200" dirty="0"/>
+            </a:br>
+            <a:endParaRPr lang="en-US" sz="1400" dirty="0"/>
+          </a:p>
+        </p:txBody>
+      </p:sp>
+      <p:pic>
+        <p:nvPicPr>
+          <p:cNvPr id="2097159" name="Picture 6">
+            <a:extLst>
+              <a:ext uri="{FF2B5EF4-FFF2-40B4-BE49-F238E27FC236}">
+                <a16:creationId xmlns:a16="http://schemas.microsoft.com/office/drawing/2014/main" id="{12269FFD-E14F-F109-944D-F9D11BF3EE05}"/>
+              </a:ext>
+            </a:extLst>
+          </p:cNvPr>
+          <p:cNvPicPr>
+            <a:picLocks noChangeAspect="1" noChangeArrowheads="1"/>
+          </p:cNvPicPr>
+          <p:nvPr/>
+        </p:nvPicPr>
+        <p:blipFill>
+          <a:blip r:embed="rId3" cstate="print">
+            <a:extLst>
+              <a:ext uri="{28A0092B-C50C-407E-A947-70E740481C1C}">
+                <a14:useLocalDpi xmlns:a14="http://schemas.microsoft.com/office/drawing/2010/main" val="0"/>
+              </a:ext>
+            </a:extLst>
+          </a:blip>
+          <a:stretch>
+            <a:fillRect/>
+          </a:stretch>
+        </p:blipFill>
+        <p:spPr bwMode="auto">
+          <a:xfrm>
+            <a:off x="467544" y="19232"/>
+            <a:ext cx="1202454" cy="1033504"/>
+          </a:xfrm>
+          <a:prstGeom prst="rect">
+            <a:avLst/>
+          </a:prstGeom>
+          <a:noFill/>
+          <a:ln w="9525">
+            <a:noFill/>
+            <a:miter lim="800000"/>
+            <a:headEnd/>
+            <a:tailEnd/>
+          </a:ln>
+        </p:spPr>
+      </p:pic>
+      <p:sp>
+        <p:nvSpPr>
+          <p:cNvPr id="1048601" name="TextBox 7">
+            <a:extLst>
+              <a:ext uri="{FF2B5EF4-FFF2-40B4-BE49-F238E27FC236}">
+                <a16:creationId xmlns:a16="http://schemas.microsoft.com/office/drawing/2014/main" id="{539AF2BF-B17A-8D57-E3C2-58A097E4B59A}"/>
+              </a:ext>
+            </a:extLst>
+          </p:cNvPr>
+          <p:cNvSpPr txBox="1">
+            <a:spLocks noChangeArrowheads="1"/>
+          </p:cNvSpPr>
+          <p:nvPr/>
+        </p:nvSpPr>
+        <p:spPr bwMode="auto">
+          <a:xfrm>
+            <a:off x="36512" y="1052736"/>
+            <a:ext cx="9144000" cy="338554"/>
+          </a:xfrm>
+          <a:prstGeom prst="rect">
+            <a:avLst/>
+          </a:prstGeom>
+          <a:solidFill>
+            <a:srgbClr val="FFC000"/>
+          </a:solidFill>
+          <a:ln w="9525">
+            <a:noFill/>
+            <a:miter lim="800000"/>
+          </a:ln>
+        </p:spPr>
+        <p:txBody>
+          <a:bodyPr wrap="square">
+            <a:spAutoFit/>
+          </a:bodyPr>
+          <a:lstStyle/>
+          <a:p>
+            <a:pPr algn="ctr"/>
+            <a:r>
+              <a:rPr lang="en-US" sz="1600" b="1" dirty="0">
+                <a:latin typeface="Times New Roman" panose="02020603050405020304" pitchFamily="18" charset="0"/>
+                <a:cs typeface="Times New Roman" panose="02020603050405020304" pitchFamily="18" charset="0"/>
+              </a:rPr>
+              <a:t>Review - IV</a:t>
+            </a:r>
+            <a:endParaRPr lang="en-IN" sz="1600" b="1" dirty="0">
+              <a:latin typeface="Times New Roman" panose="02020603050405020304" pitchFamily="18" charset="0"/>
+              <a:cs typeface="Times New Roman" panose="02020603050405020304" pitchFamily="18" charset="0"/>
+            </a:endParaRPr>
+          </a:p>
+        </p:txBody>
+      </p:sp>
+      <p:sp>
+        <p:nvSpPr>
+          <p:cNvPr id="2" name="Slide Number Placeholder 1">
+            <a:extLst>
+              <a:ext uri="{FF2B5EF4-FFF2-40B4-BE49-F238E27FC236}">
+                <a16:creationId xmlns:a16="http://schemas.microsoft.com/office/drawing/2014/main" id="{A351F39E-24F7-457C-8562-3BF53B22BF3D}"/>
+              </a:ext>
+            </a:extLst>
+          </p:cNvPr>
+          <p:cNvSpPr>
+            <a:spLocks noGrp="1"/>
+          </p:cNvSpPr>
+          <p:nvPr>
+            <p:ph type="sldNum" sz="quarter" idx="12"/>
+          </p:nvPr>
+        </p:nvSpPr>
+        <p:spPr/>
+        <p:txBody>
+          <a:bodyPr/>
+          <a:lstStyle/>
+          <a:p>
+            <a:fld id="{1EC248AB-E565-412B-9D95-9B07D6A4F3F3}" type="slidenum">
+              <a:rPr lang="en-GB" b="1" smtClean="0">
+                <a:solidFill>
+                  <a:schemeClr val="tx1"/>
+                </a:solidFill>
+              </a:rPr>
+              <a:pPr/>
+              <a:t>21</a:t>
+            </a:fld>
+            <a:endParaRPr lang="en-GB" b="1" dirty="0">
+              <a:solidFill>
+                <a:schemeClr val="tx1"/>
+              </a:solidFill>
+            </a:endParaRPr>
+          </a:p>
+        </p:txBody>
+      </p:sp>
+      <p:pic>
+        <p:nvPicPr>
+          <p:cNvPr id="1027" name="Picture 3" descr="C:\Users\admin\Desktop\download.png">
+            <a:extLst>
+              <a:ext uri="{FF2B5EF4-FFF2-40B4-BE49-F238E27FC236}">
+                <a16:creationId xmlns:a16="http://schemas.microsoft.com/office/drawing/2014/main" id="{4E5960B4-FC9A-B0BE-1BE6-7327E564BBB8}"/>
+              </a:ext>
+            </a:extLst>
+          </p:cNvPr>
+          <p:cNvPicPr>
+            <a:picLocks noChangeAspect="1" noChangeArrowheads="1"/>
+          </p:cNvPicPr>
+          <p:nvPr/>
+        </p:nvPicPr>
+        <p:blipFill>
+          <a:blip r:embed="rId4">
+            <a:extLst>
+              <a:ext uri="{28A0092B-C50C-407E-A947-70E740481C1C}">
+                <a14:useLocalDpi xmlns:a14="http://schemas.microsoft.com/office/drawing/2010/main" val="0"/>
+              </a:ext>
+            </a:extLst>
+          </a:blip>
+          <a:srcRect/>
+          <a:stretch>
+            <a:fillRect/>
+          </a:stretch>
+        </p:blipFill>
+        <p:spPr bwMode="auto">
+          <a:xfrm>
+            <a:off x="7452320" y="44624"/>
+            <a:ext cx="1207008" cy="1033505"/>
+          </a:xfrm>
+          <a:prstGeom prst="rect">
+            <a:avLst/>
+          </a:prstGeom>
+          <a:noFill/>
+          <a:extLst>
+            <a:ext uri="{909E8E84-426E-40DD-AFC4-6F175D3DCCD1}">
+              <a14:hiddenFill xmlns:a14="http://schemas.microsoft.com/office/drawing/2010/main">
+                <a:solidFill>
+                  <a:srgbClr val="FFFFFF"/>
+                </a:solidFill>
+              </a14:hiddenFill>
+            </a:ext>
+          </a:extLst>
+        </p:spPr>
+      </p:pic>
+      <p:sp>
+        <p:nvSpPr>
+          <p:cNvPr id="3" name="Rectangle 2">
+            <a:extLst>
+              <a:ext uri="{FF2B5EF4-FFF2-40B4-BE49-F238E27FC236}">
+                <a16:creationId xmlns:a16="http://schemas.microsoft.com/office/drawing/2014/main" id="{DE6D753F-408F-5C9D-A1AF-8624991B723C}"/>
+              </a:ext>
+            </a:extLst>
+          </p:cNvPr>
+          <p:cNvSpPr/>
+          <p:nvPr/>
+        </p:nvSpPr>
+        <p:spPr>
+          <a:xfrm>
+            <a:off x="37581" y="1385277"/>
+            <a:ext cx="9084715" cy="584775"/>
+          </a:xfrm>
+          <a:prstGeom prst="rect">
+            <a:avLst/>
+          </a:prstGeom>
+        </p:spPr>
+        <p:txBody>
+          <a:bodyPr wrap="square">
+            <a:spAutoFit/>
+          </a:bodyPr>
+          <a:lstStyle/>
+          <a:p>
+            <a:pPr lvl="0" algn="ctr" eaLnBrk="0" fontAlgn="base" hangingPunct="0">
+              <a:spcBef>
+                <a:spcPct val="0"/>
+              </a:spcBef>
+              <a:spcAft>
+                <a:spcPct val="0"/>
+              </a:spcAft>
+            </a:pPr>
+            <a:r>
+              <a:rPr lang="en-US" altLang="en-US" sz="3200" b="1" dirty="0">
+                <a:latin typeface="Times New Roman" panose="02020603050405020304" pitchFamily="18" charset="0"/>
+                <a:cs typeface="Times New Roman" panose="02020603050405020304" pitchFamily="18" charset="0"/>
+              </a:rPr>
+              <a:t>References</a:t>
+            </a:r>
+          </a:p>
+        </p:txBody>
+      </p:sp>
+      <p:sp>
+        <p:nvSpPr>
+          <p:cNvPr id="4" name="Rectangle 3">
+            <a:extLst>
+              <a:ext uri="{FF2B5EF4-FFF2-40B4-BE49-F238E27FC236}">
+                <a16:creationId xmlns:a16="http://schemas.microsoft.com/office/drawing/2014/main" id="{3ADDF733-ED6C-4BBF-4443-893496F478C6}"/>
+              </a:ext>
+            </a:extLst>
+          </p:cNvPr>
+          <p:cNvSpPr/>
+          <p:nvPr/>
+        </p:nvSpPr>
+        <p:spPr>
+          <a:xfrm>
+            <a:off x="251520" y="2060848"/>
+            <a:ext cx="8568952" cy="4524315"/>
+          </a:xfrm>
+          <a:prstGeom prst="rect">
+            <a:avLst/>
+          </a:prstGeom>
+        </p:spPr>
+        <p:txBody>
+          <a:bodyPr wrap="square">
+            <a:spAutoFit/>
+          </a:bodyPr>
+          <a:lstStyle/>
+          <a:p>
+            <a:pPr algn="just"/>
+            <a:r>
+              <a:rPr lang="en-IN" sz="1600" dirty="0"/>
+              <a:t>[20] F. </a:t>
+            </a:r>
+            <a:r>
+              <a:rPr lang="en-IN" sz="1600" dirty="0" err="1"/>
+              <a:t>Ariai</a:t>
+            </a:r>
+            <a:r>
+              <a:rPr lang="en-IN" sz="1600" dirty="0"/>
+              <a:t> and G. </a:t>
+            </a:r>
+            <a:r>
+              <a:rPr lang="en-IN" sz="1600" dirty="0" err="1"/>
+              <a:t>Demartini</a:t>
+            </a:r>
+            <a:r>
+              <a:rPr lang="en-IN" sz="1600" dirty="0"/>
+              <a:t>, “Natural Language Processing for the Legal Domain: A Survey,” </a:t>
+            </a:r>
+            <a:r>
+              <a:rPr lang="en-IN" sz="1600" dirty="0" err="1"/>
+              <a:t>arXiv</a:t>
+            </a:r>
+            <a:r>
+              <a:rPr lang="en-IN" sz="1600" dirty="0"/>
+              <a:t> preprint arXiv:2410.21306, 2024. </a:t>
+            </a:r>
+          </a:p>
+          <a:p>
+            <a:pPr algn="just"/>
+            <a:r>
+              <a:rPr lang="en-IN" sz="1600" dirty="0"/>
+              <a:t>[21] D. M. Katz, M. J. Bommarito II, and J. Blackman, “A general approach for predicting the </a:t>
+            </a:r>
+            <a:r>
+              <a:rPr lang="en-IN" sz="1600" dirty="0" err="1"/>
+              <a:t>behavior</a:t>
+            </a:r>
+            <a:r>
+              <a:rPr lang="en-IN" sz="1600" dirty="0"/>
+              <a:t> of the Supreme Court of the United States,” PLOS ONE, vol. 12, no. 4, 2017. </a:t>
+            </a:r>
+          </a:p>
+          <a:p>
+            <a:pPr algn="just"/>
+            <a:r>
+              <a:rPr lang="en-IN" sz="1600" dirty="0"/>
+              <a:t>[22] N. </a:t>
+            </a:r>
+            <a:r>
+              <a:rPr lang="en-IN" sz="1600" dirty="0" err="1"/>
+              <a:t>Aletras</a:t>
+            </a:r>
+            <a:r>
+              <a:rPr lang="en-IN" sz="1600" dirty="0"/>
+              <a:t>, D. </a:t>
+            </a:r>
+            <a:r>
+              <a:rPr lang="en-IN" sz="1600" dirty="0" err="1"/>
+              <a:t>Tsarapatsanis</a:t>
+            </a:r>
+            <a:r>
+              <a:rPr lang="en-IN" sz="1600" dirty="0"/>
+              <a:t>, D. </a:t>
+            </a:r>
+            <a:r>
+              <a:rPr lang="en-IN" sz="1600" dirty="0" err="1"/>
+              <a:t>Preot¸iuc-Pietro</a:t>
+            </a:r>
+            <a:r>
+              <a:rPr lang="en-IN" sz="1600" dirty="0"/>
+              <a:t>, and V. Lampos, “Pre </a:t>
+            </a:r>
+            <a:r>
+              <a:rPr lang="en-IN" sz="1600" dirty="0" err="1"/>
+              <a:t>dicting</a:t>
+            </a:r>
+            <a:r>
+              <a:rPr lang="en-IN" sz="1600" dirty="0"/>
+              <a:t> judicial decisions of the European Court of Human Rights,” </a:t>
+            </a:r>
+            <a:r>
+              <a:rPr lang="en-IN" sz="1600" dirty="0" err="1"/>
+              <a:t>PeerJ</a:t>
+            </a:r>
+            <a:r>
+              <a:rPr lang="en-IN" sz="1600" dirty="0"/>
+              <a:t> Computer Science, vol. 2, 2016. </a:t>
+            </a:r>
+          </a:p>
+          <a:p>
+            <a:pPr algn="just"/>
+            <a:r>
+              <a:rPr lang="en-IN" sz="1600" dirty="0"/>
+              <a:t>[23] V. Malik et al., “ILDC for CJPE: Indian Legal Documents Corpus for Court Judgment Prediction and Explanation,” in Proceedings of ACL IJCNLP, 2021, pp. 4046–4062. </a:t>
+            </a:r>
+          </a:p>
+          <a:p>
+            <a:pPr algn="just"/>
+            <a:r>
+              <a:rPr lang="en-IN" sz="1600" dirty="0"/>
+              <a:t>[24] Z. Zhong, C. Xiao, C. Tu, T. Zhang, Z. Liu, and M. Sun, “Legal </a:t>
+            </a:r>
+            <a:r>
+              <a:rPr lang="en-IN" sz="1600" dirty="0" err="1"/>
+              <a:t>Judg</a:t>
+            </a:r>
+            <a:r>
+              <a:rPr lang="en-IN" sz="1600" dirty="0"/>
+              <a:t> </a:t>
+            </a:r>
+            <a:r>
+              <a:rPr lang="en-IN" sz="1600" dirty="0" err="1"/>
+              <a:t>ment</a:t>
+            </a:r>
+            <a:r>
+              <a:rPr lang="en-IN" sz="1600" dirty="0"/>
+              <a:t> Prediction via Topological Learning,” in Proceedings of EMNLP, 2018. </a:t>
+            </a:r>
+          </a:p>
+          <a:p>
+            <a:pPr algn="just"/>
+            <a:r>
+              <a:rPr lang="en-IN" sz="1600" dirty="0"/>
+              <a:t>[25] Y. Feng, Y. Qin, X. Wang, and J. Chen, “Legal Judgment Prediction via Event Extraction,” in Proceedings of COLING, 2022. </a:t>
+            </a:r>
+          </a:p>
+          <a:p>
+            <a:pPr algn="just"/>
+            <a:r>
+              <a:rPr lang="en-IN" sz="1600" dirty="0"/>
+              <a:t>[26] J. ˇ </a:t>
+            </a:r>
+            <a:r>
+              <a:rPr lang="en-IN" sz="1600" dirty="0" err="1"/>
+              <a:t>Savelka</a:t>
+            </a:r>
+            <a:r>
+              <a:rPr lang="en-IN" sz="1600" dirty="0"/>
+              <a:t> and K. Ashley, “Leveraging Large Language Models for Legal Text Prediction,” Artificial Intelligence and Law, 2023. </a:t>
+            </a:r>
+          </a:p>
+          <a:p>
+            <a:pPr algn="just"/>
+            <a:r>
+              <a:rPr lang="en-IN" sz="1600" dirty="0"/>
+              <a:t>[27] S. K. Nigam et al., “</a:t>
+            </a:r>
+            <a:r>
+              <a:rPr lang="en-IN" sz="1600" dirty="0" err="1"/>
+              <a:t>NyayaAnumana</a:t>
+            </a:r>
+            <a:r>
+              <a:rPr lang="en-IN" sz="1600" dirty="0"/>
+              <a:t> &amp; </a:t>
+            </a:r>
+            <a:r>
+              <a:rPr lang="en-IN" sz="1600" dirty="0" err="1"/>
+              <a:t>INLegalLlama</a:t>
+            </a:r>
+            <a:r>
+              <a:rPr lang="en-IN" sz="1600" dirty="0"/>
+              <a:t>: The Largest Indian Legal Judgment Prediction Dataset,” </a:t>
+            </a:r>
+            <a:r>
+              <a:rPr lang="en-IN" sz="1600" dirty="0" err="1"/>
+              <a:t>arXiv</a:t>
+            </a:r>
+            <a:r>
+              <a:rPr lang="en-IN" sz="1600" dirty="0"/>
+              <a:t> preprint arXiv:2412.08385, 2024. </a:t>
+            </a:r>
+          </a:p>
+          <a:p>
+            <a:pPr algn="just"/>
+            <a:r>
+              <a:rPr lang="en-IN" sz="1600" dirty="0"/>
+              <a:t>[28] S. K. Nigam et al., “</a:t>
+            </a:r>
+            <a:r>
+              <a:rPr lang="en-IN" sz="1600" dirty="0" err="1"/>
+              <a:t>TathyaNyaya</a:t>
+            </a:r>
+            <a:r>
+              <a:rPr lang="en-IN" sz="1600" dirty="0"/>
+              <a:t> and </a:t>
+            </a:r>
+            <a:r>
+              <a:rPr lang="en-IN" sz="1600" dirty="0" err="1"/>
+              <a:t>FactLegalLlama</a:t>
+            </a:r>
+            <a:r>
+              <a:rPr lang="en-IN" sz="1600" dirty="0"/>
+              <a:t>: Advancing Factual Judgment Prediction,” </a:t>
+            </a:r>
+            <a:r>
+              <a:rPr lang="en-IN" sz="1600" dirty="0" err="1"/>
+              <a:t>arXiv</a:t>
+            </a:r>
+            <a:r>
+              <a:rPr lang="en-IN" sz="1600" dirty="0"/>
+              <a:t> preprint arXiv:2504.04737, 2025</a:t>
+            </a:r>
+            <a:endParaRPr lang="en-IN" sz="1700" dirty="0"/>
+          </a:p>
+        </p:txBody>
+      </p:sp>
+      <p:sp>
+        <p:nvSpPr>
+          <p:cNvPr id="5" name="TextBox 7">
+            <a:extLst>
+              <a:ext uri="{FF2B5EF4-FFF2-40B4-BE49-F238E27FC236}">
+                <a16:creationId xmlns:a16="http://schemas.microsoft.com/office/drawing/2014/main" id="{DE56AAB7-937D-4992-DEC7-2AF632E437D8}"/>
+              </a:ext>
+            </a:extLst>
+          </p:cNvPr>
+          <p:cNvSpPr txBox="1">
+            <a:spLocks noChangeArrowheads="1"/>
+          </p:cNvSpPr>
+          <p:nvPr/>
+        </p:nvSpPr>
+        <p:spPr bwMode="auto">
+          <a:xfrm>
+            <a:off x="0" y="1052736"/>
+            <a:ext cx="9180512" cy="338554"/>
+          </a:xfrm>
+          <a:prstGeom prst="rect">
+            <a:avLst/>
+          </a:prstGeom>
+          <a:solidFill>
+            <a:srgbClr val="FFC000"/>
+          </a:solidFill>
+          <a:ln w="9525">
+            <a:noFill/>
+            <a:miter lim="800000"/>
+          </a:ln>
+        </p:spPr>
+        <p:txBody>
+          <a:bodyPr wrap="square">
+            <a:spAutoFit/>
+          </a:bodyPr>
+          <a:lstStyle/>
+          <a:p>
+            <a:pPr algn="ctr"/>
+            <a:r>
+              <a:rPr lang="en-US" sz="1600" b="1" dirty="0">
+                <a:latin typeface="Times New Roman" panose="02020603050405020304" pitchFamily="18" charset="0"/>
+                <a:cs typeface="Times New Roman" panose="02020603050405020304" pitchFamily="18" charset="0"/>
+              </a:rPr>
+              <a:t>Final Presentation</a:t>
+            </a:r>
+            <a:endParaRPr lang="en-IN" sz="1600" b="1" dirty="0">
+              <a:latin typeface="Times New Roman" panose="02020603050405020304" pitchFamily="18" charset="0"/>
+              <a:cs typeface="Times New Roman" panose="02020603050405020304" pitchFamily="18" charset="0"/>
+            </a:endParaRPr>
+          </a:p>
+        </p:txBody>
+      </p:sp>
+    </p:spTree>
+    <p:extLst>
+      <p:ext uri="{BB962C8B-B14F-4D97-AF65-F5344CB8AC3E}">
+        <p14:creationId xmlns:p14="http://schemas.microsoft.com/office/powerpoint/2010/main" val="2881502188"/>
       </p:ext>
     </p:extLst>
   </p:cSld>
@@ -10601,7 +14469,7 @@
         </p:nvSpPr>
         <p:spPr>
           <a:xfrm>
-            <a:off x="36512" y="1625605"/>
+            <a:off x="36512" y="1484784"/>
             <a:ext cx="9107488" cy="584775"/>
           </a:xfrm>
           <a:prstGeom prst="rect">
@@ -10639,8 +14507,8 @@
         </p:nvSpPr>
         <p:spPr>
           <a:xfrm>
-            <a:off x="539076" y="2444695"/>
-            <a:ext cx="8102359" cy="3139321"/>
+            <a:off x="520820" y="2048773"/>
+            <a:ext cx="8102359" cy="4524315"/>
           </a:xfrm>
           <a:prstGeom prst="rect">
             <a:avLst/>
@@ -10664,37 +14532,149 @@
             <a:endParaRPr lang="en-US" dirty="0"/>
           </a:p>
           <a:p>
-            <a:pPr algn="just"/>
-            <a:r>
-              <a:rPr lang="en-US" b="1" dirty="0"/>
-              <a:t>1. Token Limits &amp; Data Leakage:</a:t>
-            </a:r>
-            <a:r>
-              <a:rPr lang="en-US" dirty="0"/>
-              <a:t> Standard models crash on documents over 512 tokens, or they accidentally read the judge's final verdict while trying to predict it (data leakage).</a:t>
-            </a:r>
-          </a:p>
-          <a:p>
-            <a:pPr algn="just"/>
-            <a:r>
-              <a:rPr lang="en-US" b="1" dirty="0"/>
-              <a:t>2. Statutory Transitions: </a:t>
-            </a:r>
-            <a:r>
-              <a:rPr lang="en-US" dirty="0"/>
-              <a:t>India's shift from the Indian Penal Code (IPC) to the Bharatiya Nyaya Sanhita (BNS) makes legacy AI models instantly obsolete, as they don't understand the new laws.</a:t>
-            </a:r>
-          </a:p>
-          <a:p>
-            <a:pPr algn="just"/>
-            <a:r>
-              <a:rPr lang="en-US" b="1" dirty="0"/>
-              <a:t>3. The "Black Box" Trust Issue: </a:t>
-            </a:r>
-            <a:r>
-              <a:rPr lang="en-US" dirty="0"/>
-              <a:t>Legal professionals cannot trust an AI that predicts "Dismissed" without providing clear, verifiable legal reasoning.</a:t>
-            </a:r>
+            <a:pPr marL="285750" indent="-285750">
+              <a:buFont typeface="Arial" panose="020B0604020202020204" pitchFamily="34" charset="0"/>
+              <a:buChar char="•"/>
+            </a:pPr>
+            <a:r>
+              <a:rPr lang="en-IN" dirty="0"/>
+              <a:t>India's judiciary has </a:t>
+            </a:r>
+            <a:r>
+              <a:rPr lang="en-IN" b="1" dirty="0"/>
+              <a:t>over 5 crore pending cases</a:t>
+            </a:r>
+            <a:r>
+              <a:rPr lang="en-IN" dirty="0"/>
+              <a:t> across the Supreme Court, 25 High Courts, and 700+ District Courts — one of the largest judicial backlogs globally.</a:t>
+            </a:r>
+          </a:p>
+          <a:p>
+            <a:pPr marL="285750" indent="-285750">
+              <a:buFont typeface="Arial" panose="020B0604020202020204" pitchFamily="34" charset="0"/>
+              <a:buChar char="•"/>
+            </a:pPr>
+            <a:r>
+              <a:rPr lang="en-IN" dirty="0"/>
+              <a:t>Court judgments are </a:t>
+            </a:r>
+            <a:r>
+              <a:rPr lang="en-IN" b="1" dirty="0"/>
+              <a:t>lengthy, unstructured PDFs</a:t>
+            </a:r>
+            <a:r>
+              <a:rPr lang="en-IN" dirty="0"/>
+              <a:t> (20–100+ pages) written in complex legal English, making manual analysis extremely time-consuming.</a:t>
+            </a:r>
+          </a:p>
+          <a:p>
+            <a:pPr marL="285750" indent="-285750">
+              <a:buFont typeface="Arial" panose="020B0604020202020204" pitchFamily="34" charset="0"/>
+              <a:buChar char="•"/>
+            </a:pPr>
+            <a:r>
+              <a:rPr lang="en-IN" b="1" dirty="0"/>
+              <a:t>No domain-specific AI tool</a:t>
+            </a:r>
+            <a:r>
+              <a:rPr lang="en-IN" dirty="0"/>
+              <a:t> exists for the Indian legal system — generic LLMs like GPT lack understanding of Indian statutes, FIR terminology, and case law structures.</a:t>
+            </a:r>
+          </a:p>
+          <a:p>
+            <a:pPr marL="285750" indent="-285750">
+              <a:buFont typeface="Arial" panose="020B0604020202020204" pitchFamily="34" charset="0"/>
+              <a:buChar char="•"/>
+            </a:pPr>
+            <a:r>
+              <a:rPr lang="en-IN" dirty="0"/>
+              <a:t>India's 2023 transition from the </a:t>
+            </a:r>
+            <a:r>
+              <a:rPr lang="en-IN" b="1" dirty="0"/>
+              <a:t>Indian Penal Code (IPC, 1860)</a:t>
+            </a:r>
+            <a:r>
+              <a:rPr lang="en-IN" dirty="0"/>
+              <a:t> to the </a:t>
+            </a:r>
+            <a:r>
+              <a:rPr lang="en-IN" b="1" dirty="0"/>
+              <a:t>Bharatiya Nyaya Sanhita (BNS)</a:t>
+            </a:r>
+            <a:r>
+              <a:rPr lang="en-IN" dirty="0"/>
+              <a:t> has created widespread confusion among legal professionals due to renumbered sections.</a:t>
+            </a:r>
+          </a:p>
+          <a:p>
+            <a:pPr marL="285750" indent="-285750">
+              <a:buFont typeface="Arial" panose="020B0604020202020204" pitchFamily="34" charset="0"/>
+              <a:buChar char="•"/>
+            </a:pPr>
+            <a:r>
+              <a:rPr lang="en-IN" dirty="0"/>
+              <a:t>Lawyers and litigants </a:t>
+            </a:r>
+            <a:r>
+              <a:rPr lang="en-IN" b="1" dirty="0"/>
+              <a:t>lack predictive insight</a:t>
+            </a:r>
+            <a:r>
+              <a:rPr lang="en-IN" dirty="0"/>
+              <a:t> into case outcomes, leading to uncertainty, wasted effort, and delayed justice.</a:t>
+            </a:r>
+          </a:p>
+        </p:txBody>
+      </p:sp>
+      <p:sp>
+        <p:nvSpPr>
+          <p:cNvPr id="3" name="TextBox 7">
+            <a:extLst>
+              <a:ext uri="{FF2B5EF4-FFF2-40B4-BE49-F238E27FC236}">
+                <a16:creationId xmlns:a16="http://schemas.microsoft.com/office/drawing/2014/main" id="{46DE5231-D33E-2CEA-8325-35F7FCD2A430}"/>
+              </a:ext>
+            </a:extLst>
+          </p:cNvPr>
+          <p:cNvSpPr txBox="1">
+            <a:spLocks noChangeArrowheads="1"/>
+          </p:cNvSpPr>
+          <p:nvPr/>
+        </p:nvSpPr>
+        <p:spPr bwMode="auto">
+          <a:xfrm>
+            <a:off x="0" y="1052736"/>
+            <a:ext cx="9180512" cy="338554"/>
+          </a:xfrm>
+          <a:prstGeom prst="rect">
+            <a:avLst/>
+          </a:prstGeom>
+          <a:solidFill>
+            <a:srgbClr val="FFC000"/>
+          </a:solidFill>
+          <a:ln w="9525">
+            <a:noFill/>
+            <a:miter lim="800000"/>
+          </a:ln>
+        </p:spPr>
+        <p:txBody>
+          <a:bodyPr wrap="square">
+            <a:spAutoFit/>
+          </a:bodyPr>
+          <a:lstStyle/>
+          <a:p>
+            <a:pPr algn="ctr"/>
+            <a:r>
+              <a:rPr lang="en-US" sz="1600" b="1" dirty="0">
+                <a:latin typeface="Times New Roman" panose="02020603050405020304" pitchFamily="18" charset="0"/>
+                <a:cs typeface="Times New Roman" panose="02020603050405020304" pitchFamily="18" charset="0"/>
+              </a:rPr>
+              <a:t>Final Presentation</a:t>
+            </a:r>
+            <a:endParaRPr lang="en-IN" sz="1600" b="1" dirty="0">
+              <a:latin typeface="Times New Roman" panose="02020603050405020304" pitchFamily="18" charset="0"/>
+              <a:cs typeface="Times New Roman" panose="02020603050405020304" pitchFamily="18" charset="0"/>
+            </a:endParaRPr>
           </a:p>
         </p:txBody>
       </p:sp>
@@ -11039,7 +15019,7 @@
         <p:spPr>
           <a:xfrm>
             <a:off x="467544" y="2399402"/>
-            <a:ext cx="8280920" cy="3477875"/>
+            <a:ext cx="8280920" cy="4247317"/>
           </a:xfrm>
           <a:prstGeom prst="rect">
             <a:avLst/>
@@ -11056,12 +15036,12 @@
               <a:buChar char="•"/>
             </a:pPr>
             <a:r>
-              <a:rPr lang="en-IN" sz="2000" b="1" dirty="0"/>
+              <a:rPr lang="en-IN" b="1" dirty="0"/>
               <a:t>Structure-Aware Chunking:</a:t>
             </a:r>
             <a:r>
-              <a:rPr lang="en-IN" sz="2000" dirty="0"/>
-              <a:t> Engineered a custom Regex pipeline to specifically isolate 'Facts' and 'Arguments', bypassing token limits and preventing data leakage.</a:t>
+              <a:rPr lang="en-IN" dirty="0"/>
+              <a:t> Engineered a custom Regex pipeline to specifically isolate 'Facts' and 'Arguments' sections from unstructured judgments, bypassing BERT's 512-token limit and feeding only legally relevant text.</a:t>
             </a:r>
           </a:p>
           <a:p>
@@ -11070,12 +15050,20 @@
               <a:buChar char="•"/>
             </a:pPr>
             <a:r>
-              <a:rPr lang="en-IN" sz="2000" b="1" dirty="0"/>
+              <a:rPr lang="en-IN" b="1" dirty="0"/>
               <a:t>Dynamic JSON Middleware:</a:t>
             </a:r>
             <a:r>
-              <a:rPr lang="en-IN" sz="2000" dirty="0"/>
-              <a:t> Built an automated translation layer that seamlessly maps historical IPC sections to modern BNS equivalents before AI inference.</a:t>
+              <a:rPr lang="en-IN" dirty="0"/>
+              <a:t> Built an automated IPC-to-BNS translation layer (80+ mappings in </a:t>
+            </a:r>
+            <a:r>
+              <a:rPr lang="en-IN" dirty="0" err="1"/>
+              <a:t>bns_mapping.json</a:t>
+            </a:r>
+            <a:r>
+              <a:rPr lang="en-IN" dirty="0"/>
+              <a:t>) that seamlessly converts legacy IPC section references to modern BNS equivalents before AI inference.</a:t>
             </a:r>
           </a:p>
           <a:p>
@@ -11084,12 +15072,20 @@
               <a:buChar char="•"/>
             </a:pPr>
             <a:r>
-              <a:rPr lang="en-IN" sz="2000" b="1" dirty="0"/>
+              <a:rPr lang="en-IN" b="1" dirty="0"/>
               <a:t>Dual-Inference Pipeline:</a:t>
             </a:r>
             <a:r>
-              <a:rPr lang="en-IN" sz="2000" dirty="0"/>
-              <a:t> Utilizes InLegalBERT to instantly predict both Jurisdiction and Appellate Outcome with 85.2% accuracy.</a:t>
+              <a:rPr lang="en-IN" dirty="0"/>
+              <a:t> Two separately fine-tuned InLegalBERT models — Module B classifies Jurisdiction (Civil / Criminal / Constitutional) and Module C predicts Appellate Outcome (Allowed / Dismissed) — achieving </a:t>
+            </a:r>
+            <a:r>
+              <a:rPr lang="en-IN" b="1" dirty="0"/>
+              <a:t>85.2% accuracy</a:t>
+            </a:r>
+            <a:r>
+              <a:rPr lang="en-IN" dirty="0"/>
+              <a:t>.</a:t>
             </a:r>
           </a:p>
           <a:p>
@@ -11098,21 +15094,86 @@
               <a:buChar char="•"/>
             </a:pPr>
             <a:r>
-              <a:rPr lang="en-IN" sz="2000" b="1" dirty="0"/>
-              <a:t>NER-Filtered Explainability: </a:t>
-            </a:r>
-            <a:r>
-              <a:rPr lang="en-IN" sz="2000" dirty="0"/>
-              <a:t>Integrated SHAP with </a:t>
-            </a:r>
-            <a:r>
-              <a:rPr lang="en-IN" sz="2000" dirty="0" err="1"/>
-              <a:t>spaCy</a:t>
-            </a:r>
-            <a:r>
-              <a:rPr lang="en-IN" sz="2000" dirty="0"/>
-              <a:t> (NER) to highlight only critical legal statutes and entities, ensuring zero-noise transparency for lawyers.</a:t>
-            </a:r>
+              <a:rPr lang="en-IN" b="1" dirty="0"/>
+              <a:t>Role-Based Access Control:</a:t>
+            </a:r>
+            <a:r>
+              <a:rPr lang="en-IN" dirty="0"/>
+              <a:t> Four user roles (Student, Lawyer, Judge, Admin) with </a:t>
+            </a:r>
+            <a:r>
+              <a:rPr lang="en-IN" dirty="0" err="1"/>
+              <a:t>Supabase</a:t>
+            </a:r>
+            <a:r>
+              <a:rPr lang="en-IN" dirty="0"/>
+              <a:t> authentication and Row Level Security, ensuring each user only accesses authorized modules and their own data.</a:t>
+            </a:r>
+          </a:p>
+          <a:p>
+            <a:pPr marL="285750" indent="-285750" algn="just">
+              <a:buFont typeface="Arial" panose="020B0604020202020204" pitchFamily="34" charset="0"/>
+              <a:buChar char="•"/>
+            </a:pPr>
+            <a:r>
+              <a:rPr lang="en-IN" b="1" dirty="0"/>
+              <a:t>Cloud-Backed Audit Trail:</a:t>
+            </a:r>
+            <a:r>
+              <a:rPr lang="en-IN" dirty="0"/>
+              <a:t> Every prediction is automatically logged to a PostgreSQL database with timestamps, confidence scores, and file references for full traceability.</a:t>
+            </a:r>
+          </a:p>
+        </p:txBody>
+      </p:sp>
+      <p:sp>
+        <p:nvSpPr>
+          <p:cNvPr id="5" name="TextBox 7">
+            <a:extLst>
+              <a:ext uri="{FF2B5EF4-FFF2-40B4-BE49-F238E27FC236}">
+                <a16:creationId xmlns:a16="http://schemas.microsoft.com/office/drawing/2014/main" id="{71176B41-7C31-48A8-B503-CEAF72F125AA}"/>
+              </a:ext>
+            </a:extLst>
+          </p:cNvPr>
+          <p:cNvSpPr txBox="1">
+            <a:spLocks noChangeArrowheads="1"/>
+          </p:cNvSpPr>
+          <p:nvPr/>
+        </p:nvSpPr>
+        <p:spPr bwMode="auto">
+          <a:xfrm>
+            <a:off x="0" y="1052736"/>
+            <a:ext cx="9180512" cy="338554"/>
+          </a:xfrm>
+          <a:prstGeom prst="rect">
+            <a:avLst/>
+          </a:prstGeom>
+          <a:solidFill>
+            <a:srgbClr val="FFC000"/>
+          </a:solidFill>
+          <a:ln w="9525">
+            <a:noFill/>
+            <a:miter lim="800000"/>
+          </a:ln>
+        </p:spPr>
+        <p:txBody>
+          <a:bodyPr wrap="square">
+            <a:spAutoFit/>
+          </a:bodyPr>
+          <a:lstStyle/>
+          <a:p>
+            <a:pPr algn="ctr"/>
+            <a:r>
+              <a:rPr lang="en-US" sz="1600" b="1" dirty="0">
+                <a:latin typeface="Times New Roman" panose="02020603050405020304" pitchFamily="18" charset="0"/>
+                <a:cs typeface="Times New Roman" panose="02020603050405020304" pitchFamily="18" charset="0"/>
+              </a:rPr>
+              <a:t>Final Presentation</a:t>
+            </a:r>
+            <a:endParaRPr lang="en-IN" sz="1600" b="1" dirty="0">
+              <a:latin typeface="Times New Roman" panose="02020603050405020304" pitchFamily="18" charset="0"/>
+              <a:cs typeface="Times New Roman" panose="02020603050405020304" pitchFamily="18" charset="0"/>
+            </a:endParaRPr>
           </a:p>
         </p:txBody>
       </p:sp>
@@ -11425,8 +15486,8 @@
         </p:nvSpPr>
         <p:spPr bwMode="auto">
           <a:xfrm>
-            <a:off x="404608" y="2425187"/>
-            <a:ext cx="8407808" cy="3416320"/>
+            <a:off x="404608" y="2113686"/>
+            <a:ext cx="8407808" cy="4339650"/>
           </a:xfrm>
           <a:prstGeom prst="rect">
             <a:avLst/>
@@ -11474,66 +15535,61 @@
           </a:bodyPr>
           <a:lstStyle/>
           <a:p>
-            <a:pPr algn="just"/>
-            <a:r>
-              <a:rPr lang="en-US" sz="2000" b="1" dirty="0"/>
-              <a:t>Objective 1</a:t>
-            </a:r>
-            <a:r>
-              <a:rPr lang="en-US" sz="2000" dirty="0"/>
-              <a:t>: Curate a real-world corpus of Indian judicial data from the Supreme Court and High Courts.</a:t>
-            </a:r>
-          </a:p>
-          <a:p>
-            <a:pPr algn="just"/>
-            <a:r>
-              <a:rPr lang="en-US" sz="2000" b="1" dirty="0"/>
-              <a:t>Objective 2</a:t>
-            </a:r>
-            <a:r>
-              <a:rPr lang="en-US" sz="2000" dirty="0"/>
-              <a:t>: Engineer a robust NLP pipeline using PyMuPDF and Structure-Aware Chunking to extract core case facts.</a:t>
-            </a:r>
-          </a:p>
-          <a:p>
-            <a:pPr algn="just"/>
-            <a:r>
-              <a:rPr lang="en-US" sz="2000" b="1" dirty="0"/>
-              <a:t>Objective 3</a:t>
-            </a:r>
-            <a:r>
-              <a:rPr lang="en-US" sz="2000" dirty="0"/>
-              <a:t>: Implement a dynamic translation layer to bridge the gap between historical IPC laws and the new BNS framework.</a:t>
-            </a:r>
-          </a:p>
-          <a:p>
-            <a:pPr algn="just"/>
-            <a:r>
-              <a:rPr lang="en-US" sz="2000" b="1" dirty="0"/>
-              <a:t>Objective 4</a:t>
-            </a:r>
-            <a:r>
-              <a:rPr lang="en-US" sz="2000" dirty="0"/>
-              <a:t>: Train and deploy a high-accuracy InLegalBERT transformer model for binary outcome prediction.</a:t>
-            </a:r>
-          </a:p>
-          <a:p>
-            <a:pPr algn="just"/>
-            <a:r>
-              <a:rPr lang="en-US" sz="2000" b="1" dirty="0"/>
-              <a:t>Objective 5</a:t>
-            </a:r>
-            <a:r>
-              <a:rPr lang="en-US" sz="2000" dirty="0"/>
-              <a:t>: Develop a fully secure, cloud-based SaaS dashboard (</a:t>
-            </a:r>
-            <a:r>
-              <a:rPr lang="en-US" sz="2000" dirty="0" err="1"/>
+            <a:r>
+              <a:rPr lang="en-IN" sz="2000" b="1" dirty="0"/>
+              <a:t>Objective 1:</a:t>
+            </a:r>
+            <a:r>
+              <a:rPr lang="en-IN" sz="2000" dirty="0"/>
+              <a:t> Curate a real-world corpus of Indian judicial data from Supreme Court and High Court appellate records.</a:t>
+            </a:r>
+          </a:p>
+          <a:p>
+            <a:r>
+              <a:rPr lang="en-IN" sz="2000" b="1" dirty="0"/>
+              <a:t>Objective 2:</a:t>
+            </a:r>
+            <a:r>
+              <a:rPr lang="en-IN" sz="2000" dirty="0"/>
+              <a:t> Engineer a robust NLP pipeline using PyMuPDF and Structure-Aware Chunking to extract core case facts, arguments, and judgment sections from raw PDFs.</a:t>
+            </a:r>
+          </a:p>
+          <a:p>
+            <a:r>
+              <a:rPr lang="en-IN" sz="2000" b="1" dirty="0"/>
+              <a:t>Objective 3:</a:t>
+            </a:r>
+            <a:r>
+              <a:rPr lang="en-IN" sz="2000" dirty="0"/>
+              <a:t> Implement a dynamic IPC-to-BNS translation layer with 80+ statutory section mappings to bridge legacy and modern penal codes.</a:t>
+            </a:r>
+          </a:p>
+          <a:p>
+            <a:r>
+              <a:rPr lang="en-IN" sz="2000" b="1" dirty="0"/>
+              <a:t>Objective 4:</a:t>
+            </a:r>
+            <a:r>
+              <a:rPr lang="en-IN" sz="2000" dirty="0"/>
+              <a:t> Train and deploy a dual-inference InLegalBERT transformer pipeline — one model for jurisdiction classification (3-class) and one for outcome prediction (binary).</a:t>
+            </a:r>
+          </a:p>
+          <a:p>
+            <a:r>
+              <a:rPr lang="en-IN" sz="2000" b="1" dirty="0"/>
+              <a:t>Objective 5:</a:t>
+            </a:r>
+            <a:r>
+              <a:rPr lang="en-IN" sz="2000" dirty="0"/>
+              <a:t> Develop a secure, role-based SaaS dashboard (Streamlit + </a:t>
+            </a:r>
+            <a:r>
+              <a:rPr lang="en-IN" sz="2000" dirty="0" err="1"/>
               <a:t>Supabase</a:t>
             </a:r>
             <a:r>
-              <a:rPr lang="en-US" sz="2000" dirty="0"/>
-              <a:t> + Streamlit) with transparent AI reasoning.</a:t>
+              <a:rPr lang="en-IN" sz="2000" dirty="0"/>
+              <a:t>) with authenticated access for Students, Lawyers, Judges, and Admins.</a:t>
             </a:r>
           </a:p>
         </p:txBody>
@@ -11628,6 +15684,57 @@
           </a:p>
         </p:txBody>
       </p:sp>
+      <p:sp>
+        <p:nvSpPr>
+          <p:cNvPr id="3" name="TextBox 7">
+            <a:extLst>
+              <a:ext uri="{FF2B5EF4-FFF2-40B4-BE49-F238E27FC236}">
+                <a16:creationId xmlns:a16="http://schemas.microsoft.com/office/drawing/2014/main" id="{7CEDFD2C-308A-D9C2-2C39-5C7ACE293A02}"/>
+              </a:ext>
+            </a:extLst>
+          </p:cNvPr>
+          <p:cNvSpPr txBox="1">
+            <a:spLocks noChangeArrowheads="1"/>
+          </p:cNvSpPr>
+          <p:nvPr/>
+        </p:nvSpPr>
+        <p:spPr bwMode="auto">
+          <a:xfrm>
+            <a:off x="0" y="1052736"/>
+            <a:ext cx="9180512" cy="338554"/>
+          </a:xfrm>
+          <a:prstGeom prst="rect">
+            <a:avLst/>
+          </a:prstGeom>
+          <a:solidFill>
+            <a:srgbClr val="FFC000"/>
+          </a:solidFill>
+          <a:ln w="9525">
+            <a:noFill/>
+            <a:miter lim="800000"/>
+          </a:ln>
+        </p:spPr>
+        <p:txBody>
+          <a:bodyPr wrap="square">
+            <a:spAutoFit/>
+          </a:bodyPr>
+          <a:lstStyle/>
+          <a:p>
+            <a:pPr algn="ctr"/>
+            <a:r>
+              <a:rPr lang="en-US" sz="1600" b="1" dirty="0">
+                <a:latin typeface="Times New Roman" panose="02020603050405020304" pitchFamily="18" charset="0"/>
+                <a:cs typeface="Times New Roman" panose="02020603050405020304" pitchFamily="18" charset="0"/>
+              </a:rPr>
+              <a:t>Final Presentation</a:t>
+            </a:r>
+            <a:endParaRPr lang="en-IN" sz="1600" b="1" dirty="0">
+              <a:latin typeface="Times New Roman" panose="02020603050405020304" pitchFamily="18" charset="0"/>
+              <a:cs typeface="Times New Roman" panose="02020603050405020304" pitchFamily="18" charset="0"/>
+            </a:endParaRPr>
+          </a:p>
+        </p:txBody>
+      </p:sp>
     </p:spTree>
     <p:extLst>
       <p:ext uri="{BB962C8B-B14F-4D97-AF65-F5344CB8AC3E}">
@@ -11935,8 +16042,8 @@
         </p:nvSpPr>
         <p:spPr bwMode="auto">
           <a:xfrm rot="10800000" flipV="1">
-            <a:off x="257111" y="2316774"/>
-            <a:ext cx="8629778" cy="3785652"/>
+            <a:off x="257111" y="2012061"/>
+            <a:ext cx="8629778" cy="4801314"/>
           </a:xfrm>
           <a:prstGeom prst="rect">
             <a:avLst/>
@@ -11989,12 +16096,20 @@
               <a:buChar char="•"/>
             </a:pPr>
             <a:r>
-              <a:rPr lang="en-US" sz="2000" b="1" dirty="0"/>
-              <a:t>Data Extraction</a:t>
-            </a:r>
-            <a:r>
-              <a:rPr lang="en-US" sz="2000" dirty="0"/>
-              <a:t>: Extracted raw text from legal PDFs using PyMuPDF.</a:t>
+              <a:rPr lang="en-IN" b="1" dirty="0"/>
+              <a:t>Data Extraction:</a:t>
+            </a:r>
+            <a:r>
+              <a:rPr lang="en-IN" dirty="0"/>
+              <a:t> Extracted raw text from legal judgment PDFs using PyMuPDF (</a:t>
+            </a:r>
+            <a:r>
+              <a:rPr lang="en-IN" dirty="0" err="1"/>
+              <a:t>fitz</a:t>
+            </a:r>
+            <a:r>
+              <a:rPr lang="en-IN" dirty="0"/>
+              <a:t>), handling multi-page documents with complex formatting.</a:t>
             </a:r>
           </a:p>
           <a:p>
@@ -12003,12 +16118,12 @@
               <a:buChar char="•"/>
             </a:pPr>
             <a:r>
-              <a:rPr lang="en-US" sz="2000" b="1" dirty="0"/>
-              <a:t>Dynamic Translation</a:t>
-            </a:r>
-            <a:r>
-              <a:rPr lang="en-US" sz="2000" dirty="0"/>
-              <a:t>: Passed text through a JSON/Regex middleware to translate IPC references to BNS.</a:t>
+              <a:rPr lang="en-IN" b="1" dirty="0"/>
+              <a:t>Text Preprocessing:</a:t>
+            </a:r>
+            <a:r>
+              <a:rPr lang="en-IN" dirty="0"/>
+              <a:t> Applied custom Regex patterns to remove irrelevant metadata — CORAM, HEADNOTE, administrative headers — retaining only the substantive legal content.</a:t>
             </a:r>
           </a:p>
           <a:p>
@@ -12017,12 +16132,12 @@
               <a:buChar char="•"/>
             </a:pPr>
             <a:r>
-              <a:rPr lang="en-US" sz="2000" b="1" dirty="0"/>
-              <a:t>Structure-Aware Chunking</a:t>
-            </a:r>
-            <a:r>
-              <a:rPr lang="en-US" sz="2000" dirty="0"/>
-              <a:t>: Isolated strictly 'Facts' and 'Arguments' to feed the AI pure, unbiased context.</a:t>
+              <a:rPr lang="en-IN" b="1" dirty="0"/>
+              <a:t>Dynamic Translation:</a:t>
+            </a:r>
+            <a:r>
+              <a:rPr lang="en-IN" dirty="0"/>
+              <a:t> Passed cleaned text through a JSON-based IPC-to-BNS middleware that replaces legacy penal code references with their modern BNS equivalents (80+ mappings).</a:t>
             </a:r>
           </a:p>
           <a:p>
@@ -12031,12 +16146,12 @@
               <a:buChar char="•"/>
             </a:pPr>
             <a:r>
-              <a:rPr lang="en-US" sz="2000" b="1" dirty="0"/>
-              <a:t>InLegalBERT Execution</a:t>
-            </a:r>
-            <a:r>
-              <a:rPr lang="en-US" sz="2000" dirty="0"/>
-              <a:t>: Processed cleaned chunks through fine-tuned InLegalBERT for Jurisdiction and Outcome prediction.</a:t>
+              <a:rPr lang="en-IN" b="1" dirty="0"/>
+              <a:t>Structure-Aware Chunking:</a:t>
+            </a:r>
+            <a:r>
+              <a:rPr lang="en-IN" dirty="0"/>
+              <a:t> Isolated the three key sections — 'Facts', 'Arguments', and 'Judgment' — using domain-specific Regex patterns to feed the AI only pure, contextually relevant text.</a:t>
             </a:r>
           </a:p>
           <a:p>
@@ -12045,20 +16160,12 @@
               <a:buChar char="•"/>
             </a:pPr>
             <a:r>
-              <a:rPr lang="en-US" sz="2000" b="1" dirty="0"/>
-              <a:t>Explainable AI (XAI)</a:t>
-            </a:r>
-            <a:r>
-              <a:rPr lang="en-US" sz="2000" dirty="0"/>
-              <a:t>: Filtered SHAP outputs through </a:t>
-            </a:r>
-            <a:r>
-              <a:rPr lang="en-US" sz="2000" dirty="0" err="1"/>
-              <a:t>spaCy</a:t>
-            </a:r>
-            <a:r>
-              <a:rPr lang="en-US" sz="2000" dirty="0"/>
-              <a:t> NER to generate visual heatmaps of the exact decision-driving words.</a:t>
+              <a:rPr lang="en-IN" b="1" dirty="0"/>
+              <a:t>Dual-Model Inference:</a:t>
+            </a:r>
+            <a:r>
+              <a:rPr lang="en-IN" dirty="0"/>
+              <a:t> Processed extracted chunks through two separately fine-tuned InLegalBERT models — Module B for Jurisdiction classification (3-class) and Module C for Outcome prediction (binary).</a:t>
             </a:r>
           </a:p>
           <a:p>
@@ -12067,20 +16174,20 @@
               <a:buChar char="•"/>
             </a:pPr>
             <a:r>
-              <a:rPr lang="en-US" sz="2000" b="1" dirty="0"/>
-              <a:t>Secure SaaS Deployment</a:t>
-            </a:r>
-            <a:r>
-              <a:rPr lang="en-US" sz="2000" dirty="0"/>
-              <a:t>: Wrapped the entire pipeline in a Streamlit frontend with a </a:t>
-            </a:r>
-            <a:r>
-              <a:rPr lang="en-US" sz="2000" dirty="0" err="1"/>
+              <a:rPr lang="en-IN" b="1" dirty="0"/>
+              <a:t>Secure SaaS Deployment:</a:t>
+            </a:r>
+            <a:r>
+              <a:rPr lang="en-IN" dirty="0"/>
+              <a:t> Wrapped the entire pipeline in a Streamlit dashboard with </a:t>
+            </a:r>
+            <a:r>
+              <a:rPr lang="en-IN" dirty="0" err="1"/>
               <a:t>Supabase</a:t>
             </a:r>
             <a:r>
-              <a:rPr lang="en-US" sz="2000" dirty="0"/>
-              <a:t> PostgreSQL backend for encrypted lawyer authentication and case history tracking.</a:t>
+              <a:rPr lang="en-IN" dirty="0"/>
+              <a:t> PostgreSQL backend for role-based authentication, encrypted data storage, and prediction audit logging.</a:t>
             </a:r>
           </a:p>
         </p:txBody>
@@ -12093,7 +16200,7 @@
         </p:nvSpPr>
         <p:spPr>
           <a:xfrm>
-            <a:off x="190694" y="1526858"/>
+            <a:off x="190694" y="1412776"/>
             <a:ext cx="8843028" cy="584775"/>
           </a:xfrm>
           <a:prstGeom prst="rect">
@@ -12121,6 +16228,57 @@
               </a:rPr>
               <a:t>Methodology/ Workflow</a:t>
             </a:r>
+          </a:p>
+        </p:txBody>
+      </p:sp>
+      <p:sp>
+        <p:nvSpPr>
+          <p:cNvPr id="4" name="TextBox 7">
+            <a:extLst>
+              <a:ext uri="{FF2B5EF4-FFF2-40B4-BE49-F238E27FC236}">
+                <a16:creationId xmlns:a16="http://schemas.microsoft.com/office/drawing/2014/main" id="{5D2CEBED-EFDE-80CC-D688-92F0D02401A2}"/>
+              </a:ext>
+            </a:extLst>
+          </p:cNvPr>
+          <p:cNvSpPr txBox="1">
+            <a:spLocks noChangeArrowheads="1"/>
+          </p:cNvSpPr>
+          <p:nvPr/>
+        </p:nvSpPr>
+        <p:spPr bwMode="auto">
+          <a:xfrm>
+            <a:off x="0" y="1052736"/>
+            <a:ext cx="9180512" cy="338554"/>
+          </a:xfrm>
+          <a:prstGeom prst="rect">
+            <a:avLst/>
+          </a:prstGeom>
+          <a:solidFill>
+            <a:srgbClr val="FFC000"/>
+          </a:solidFill>
+          <a:ln w="9525">
+            <a:noFill/>
+            <a:miter lim="800000"/>
+          </a:ln>
+        </p:spPr>
+        <p:txBody>
+          <a:bodyPr wrap="square">
+            <a:spAutoFit/>
+          </a:bodyPr>
+          <a:lstStyle/>
+          <a:p>
+            <a:pPr algn="ctr"/>
+            <a:r>
+              <a:rPr lang="en-US" sz="1600" b="1" dirty="0">
+                <a:latin typeface="Times New Roman" panose="02020603050405020304" pitchFamily="18" charset="0"/>
+                <a:cs typeface="Times New Roman" panose="02020603050405020304" pitchFamily="18" charset="0"/>
+              </a:rPr>
+              <a:t>Final Presentation</a:t>
+            </a:r>
+            <a:endParaRPr lang="en-IN" sz="1600" b="1" dirty="0">
+              <a:latin typeface="Times New Roman" panose="02020603050405020304" pitchFamily="18" charset="0"/>
+              <a:cs typeface="Times New Roman" panose="02020603050405020304" pitchFamily="18" charset="0"/>
+            </a:endParaRPr>
           </a:p>
         </p:txBody>
       </p:sp>
@@ -12488,14 +16646,65 @@
         </p:blipFill>
         <p:spPr>
           <a:xfrm>
-            <a:off x="2819839" y="2028033"/>
-            <a:ext cx="3432314" cy="4690714"/>
+            <a:off x="2855843" y="2204864"/>
+            <a:ext cx="3432314" cy="4334048"/>
           </a:xfrm>
           <a:prstGeom prst="rect">
             <a:avLst/>
           </a:prstGeom>
         </p:spPr>
       </p:pic>
+      <p:sp>
+        <p:nvSpPr>
+          <p:cNvPr id="4" name="TextBox 7">
+            <a:extLst>
+              <a:ext uri="{FF2B5EF4-FFF2-40B4-BE49-F238E27FC236}">
+                <a16:creationId xmlns:a16="http://schemas.microsoft.com/office/drawing/2014/main" id="{0CCAD606-1041-7110-070A-591A6C159994}"/>
+              </a:ext>
+            </a:extLst>
+          </p:cNvPr>
+          <p:cNvSpPr txBox="1">
+            <a:spLocks noChangeArrowheads="1"/>
+          </p:cNvSpPr>
+          <p:nvPr/>
+        </p:nvSpPr>
+        <p:spPr bwMode="auto">
+          <a:xfrm>
+            <a:off x="0" y="1052736"/>
+            <a:ext cx="9180512" cy="338554"/>
+          </a:xfrm>
+          <a:prstGeom prst="rect">
+            <a:avLst/>
+          </a:prstGeom>
+          <a:solidFill>
+            <a:srgbClr val="FFC000"/>
+          </a:solidFill>
+          <a:ln w="9525">
+            <a:noFill/>
+            <a:miter lim="800000"/>
+          </a:ln>
+        </p:spPr>
+        <p:txBody>
+          <a:bodyPr wrap="square">
+            <a:spAutoFit/>
+          </a:bodyPr>
+          <a:lstStyle/>
+          <a:p>
+            <a:pPr algn="ctr"/>
+            <a:r>
+              <a:rPr lang="en-US" sz="1600" b="1" dirty="0">
+                <a:latin typeface="Times New Roman" panose="02020603050405020304" pitchFamily="18" charset="0"/>
+                <a:cs typeface="Times New Roman" panose="02020603050405020304" pitchFamily="18" charset="0"/>
+              </a:rPr>
+              <a:t>Final Presentation</a:t>
+            </a:r>
+            <a:endParaRPr lang="en-IN" sz="1600" b="1" dirty="0">
+              <a:latin typeface="Times New Roman" panose="02020603050405020304" pitchFamily="18" charset="0"/>
+              <a:cs typeface="Times New Roman" panose="02020603050405020304" pitchFamily="18" charset="0"/>
+            </a:endParaRPr>
+          </a:p>
+        </p:txBody>
+      </p:sp>
     </p:spTree>
     <p:extLst>
       <p:ext uri="{BB962C8B-B14F-4D97-AF65-F5344CB8AC3E}">
@@ -14706,6 +18915,57 @@
           </a:graphicData>
         </a:graphic>
       </p:graphicFrame>
+      <p:sp>
+        <p:nvSpPr>
+          <p:cNvPr id="4" name="TextBox 7">
+            <a:extLst>
+              <a:ext uri="{FF2B5EF4-FFF2-40B4-BE49-F238E27FC236}">
+                <a16:creationId xmlns:a16="http://schemas.microsoft.com/office/drawing/2014/main" id="{C4D3329F-63BD-CFCF-951E-A2081300F356}"/>
+              </a:ext>
+            </a:extLst>
+          </p:cNvPr>
+          <p:cNvSpPr txBox="1">
+            <a:spLocks noChangeArrowheads="1"/>
+          </p:cNvSpPr>
+          <p:nvPr/>
+        </p:nvSpPr>
+        <p:spPr bwMode="auto">
+          <a:xfrm>
+            <a:off x="0" y="1052736"/>
+            <a:ext cx="9180512" cy="338554"/>
+          </a:xfrm>
+          <a:prstGeom prst="rect">
+            <a:avLst/>
+          </a:prstGeom>
+          <a:solidFill>
+            <a:srgbClr val="FFC000"/>
+          </a:solidFill>
+          <a:ln w="9525">
+            <a:noFill/>
+            <a:miter lim="800000"/>
+          </a:ln>
+        </p:spPr>
+        <p:txBody>
+          <a:bodyPr wrap="square">
+            <a:spAutoFit/>
+          </a:bodyPr>
+          <a:lstStyle/>
+          <a:p>
+            <a:pPr algn="ctr"/>
+            <a:r>
+              <a:rPr lang="en-US" sz="1600" b="1" dirty="0">
+                <a:latin typeface="Times New Roman" panose="02020603050405020304" pitchFamily="18" charset="0"/>
+                <a:cs typeface="Times New Roman" panose="02020603050405020304" pitchFamily="18" charset="0"/>
+              </a:rPr>
+              <a:t>Final Presentation</a:t>
+            </a:r>
+            <a:endParaRPr lang="en-IN" sz="1600" b="1" dirty="0">
+              <a:latin typeface="Times New Roman" panose="02020603050405020304" pitchFamily="18" charset="0"/>
+              <a:cs typeface="Times New Roman" panose="02020603050405020304" pitchFamily="18" charset="0"/>
+            </a:endParaRPr>
+          </a:p>
+        </p:txBody>
+      </p:sp>
     </p:spTree>
     <p:extLst>
       <p:ext uri="{BB962C8B-B14F-4D97-AF65-F5344CB8AC3E}">
@@ -16426,6 +20686,57 @@
           </a:graphicData>
         </a:graphic>
       </p:graphicFrame>
+      <p:sp>
+        <p:nvSpPr>
+          <p:cNvPr id="3" name="TextBox 7">
+            <a:extLst>
+              <a:ext uri="{FF2B5EF4-FFF2-40B4-BE49-F238E27FC236}">
+                <a16:creationId xmlns:a16="http://schemas.microsoft.com/office/drawing/2014/main" id="{71AD23B9-4671-BD8F-3EB3-51AAD39F9D69}"/>
+              </a:ext>
+            </a:extLst>
+          </p:cNvPr>
+          <p:cNvSpPr txBox="1">
+            <a:spLocks noChangeArrowheads="1"/>
+          </p:cNvSpPr>
+          <p:nvPr/>
+        </p:nvSpPr>
+        <p:spPr bwMode="auto">
+          <a:xfrm>
+            <a:off x="0" y="1052736"/>
+            <a:ext cx="9180512" cy="338554"/>
+          </a:xfrm>
+          <a:prstGeom prst="rect">
+            <a:avLst/>
+          </a:prstGeom>
+          <a:solidFill>
+            <a:srgbClr val="FFC000"/>
+          </a:solidFill>
+          <a:ln w="9525">
+            <a:noFill/>
+            <a:miter lim="800000"/>
+          </a:ln>
+        </p:spPr>
+        <p:txBody>
+          <a:bodyPr wrap="square">
+            <a:spAutoFit/>
+          </a:bodyPr>
+          <a:lstStyle/>
+          <a:p>
+            <a:pPr algn="ctr"/>
+            <a:r>
+              <a:rPr lang="en-US" sz="1600" b="1" dirty="0">
+                <a:latin typeface="Times New Roman" panose="02020603050405020304" pitchFamily="18" charset="0"/>
+                <a:cs typeface="Times New Roman" panose="02020603050405020304" pitchFamily="18" charset="0"/>
+              </a:rPr>
+              <a:t>Final Presentation</a:t>
+            </a:r>
+            <a:endParaRPr lang="en-IN" sz="1600" b="1" dirty="0">
+              <a:latin typeface="Times New Roman" panose="02020603050405020304" pitchFamily="18" charset="0"/>
+              <a:cs typeface="Times New Roman" panose="02020603050405020304" pitchFamily="18" charset="0"/>
+            </a:endParaRPr>
+          </a:p>
+        </p:txBody>
+      </p:sp>
     </p:spTree>
     <p:extLst>
       <p:ext uri="{BB962C8B-B14F-4D97-AF65-F5344CB8AC3E}">
